--- a/Presentations/Graphs/param_rose_map_new.pptx
+++ b/Presentations/Graphs/param_rose_map_new.pptx
@@ -1178,7 +1178,7 @@
           <a:p>
             <a:fld id="{416EE624-B9F0-41BB-BB4E-97902D9C20A7}" type="datetimeFigureOut">
               <a:rPr lang="en-US" smtClean="0"/>
-              <a:t>7/3/2026</a:t>
+              <a:t>7/6/2026</a:t>
             </a:fld>
             <a:endParaRPr lang="en-US"/>
           </a:p>
@@ -1676,7 +1676,7 @@
           <a:p>
             <a:fld id="{04277E52-7FB3-4160-B2FF-FC214D695529}" type="datetimeFigureOut">
               <a:rPr lang="en-US" smtClean="0"/>
-              <a:t>7/3/2026</a:t>
+              <a:t>7/6/2026</a:t>
             </a:fld>
             <a:endParaRPr lang="en-US"/>
           </a:p>
@@ -1874,7 +1874,7 @@
           <a:p>
             <a:fld id="{04277E52-7FB3-4160-B2FF-FC214D695529}" type="datetimeFigureOut">
               <a:rPr lang="en-US" smtClean="0"/>
-              <a:t>7/3/2026</a:t>
+              <a:t>7/6/2026</a:t>
             </a:fld>
             <a:endParaRPr lang="en-US"/>
           </a:p>
@@ -2082,7 +2082,7 @@
           <a:p>
             <a:fld id="{04277E52-7FB3-4160-B2FF-FC214D695529}" type="datetimeFigureOut">
               <a:rPr lang="en-US" smtClean="0"/>
-              <a:t>7/3/2026</a:t>
+              <a:t>7/6/2026</a:t>
             </a:fld>
             <a:endParaRPr lang="en-US"/>
           </a:p>
@@ -2280,7 +2280,7 @@
           <a:p>
             <a:fld id="{04277E52-7FB3-4160-B2FF-FC214D695529}" type="datetimeFigureOut">
               <a:rPr lang="en-US" smtClean="0"/>
-              <a:t>7/3/2026</a:t>
+              <a:t>7/6/2026</a:t>
             </a:fld>
             <a:endParaRPr lang="en-US"/>
           </a:p>
@@ -2555,7 +2555,7 @@
           <a:p>
             <a:fld id="{04277E52-7FB3-4160-B2FF-FC214D695529}" type="datetimeFigureOut">
               <a:rPr lang="en-US" smtClean="0"/>
-              <a:t>7/3/2026</a:t>
+              <a:t>7/6/2026</a:t>
             </a:fld>
             <a:endParaRPr lang="en-US"/>
           </a:p>
@@ -2820,7 +2820,7 @@
           <a:p>
             <a:fld id="{04277E52-7FB3-4160-B2FF-FC214D695529}" type="datetimeFigureOut">
               <a:rPr lang="en-US" smtClean="0"/>
-              <a:t>7/3/2026</a:t>
+              <a:t>7/6/2026</a:t>
             </a:fld>
             <a:endParaRPr lang="en-US"/>
           </a:p>
@@ -3232,7 +3232,7 @@
           <a:p>
             <a:fld id="{04277E52-7FB3-4160-B2FF-FC214D695529}" type="datetimeFigureOut">
               <a:rPr lang="en-US" smtClean="0"/>
-              <a:t>7/3/2026</a:t>
+              <a:t>7/6/2026</a:t>
             </a:fld>
             <a:endParaRPr lang="en-US"/>
           </a:p>
@@ -3373,7 +3373,7 @@
           <a:p>
             <a:fld id="{04277E52-7FB3-4160-B2FF-FC214D695529}" type="datetimeFigureOut">
               <a:rPr lang="en-US" smtClean="0"/>
-              <a:t>7/3/2026</a:t>
+              <a:t>7/6/2026</a:t>
             </a:fld>
             <a:endParaRPr lang="en-US"/>
           </a:p>
@@ -3486,7 +3486,7 @@
           <a:p>
             <a:fld id="{04277E52-7FB3-4160-B2FF-FC214D695529}" type="datetimeFigureOut">
               <a:rPr lang="en-US" smtClean="0"/>
-              <a:t>7/3/2026</a:t>
+              <a:t>7/6/2026</a:t>
             </a:fld>
             <a:endParaRPr lang="en-US"/>
           </a:p>
@@ -3797,7 +3797,7 @@
           <a:p>
             <a:fld id="{04277E52-7FB3-4160-B2FF-FC214D695529}" type="datetimeFigureOut">
               <a:rPr lang="en-US" smtClean="0"/>
-              <a:t>7/3/2026</a:t>
+              <a:t>7/6/2026</a:t>
             </a:fld>
             <a:endParaRPr lang="en-US"/>
           </a:p>
@@ -4085,7 +4085,7 @@
           <a:p>
             <a:fld id="{04277E52-7FB3-4160-B2FF-FC214D695529}" type="datetimeFigureOut">
               <a:rPr lang="en-US" smtClean="0"/>
-              <a:t>7/3/2026</a:t>
+              <a:t>7/6/2026</a:t>
             </a:fld>
             <a:endParaRPr lang="en-US"/>
           </a:p>
@@ -4326,7 +4326,7 @@
           <a:p>
             <a:fld id="{04277E52-7FB3-4160-B2FF-FC214D695529}" type="datetimeFigureOut">
               <a:rPr lang="en-US" smtClean="0"/>
-              <a:t>7/3/2026</a:t>
+              <a:t>7/6/2026</a:t>
             </a:fld>
             <a:endParaRPr lang="en-US"/>
           </a:p>
@@ -4743,6 +4743,67 @@
           <a:chExt cx="0" cy="0"/>
         </a:xfrm>
       </p:grpSpPr>
+      <p:sp>
+        <p:nvSpPr>
+          <p:cNvPr id="8" name="Partial Circle 7">
+            <a:extLst>
+              <a:ext uri="{FF2B5EF4-FFF2-40B4-BE49-F238E27FC236}">
+                <a16:creationId xmlns:a16="http://schemas.microsoft.com/office/drawing/2014/main" id="{92AE3274-4DB4-F763-BD1E-8CC77B9D7504}"/>
+              </a:ext>
+            </a:extLst>
+          </p:cNvPr>
+          <p:cNvSpPr/>
+          <p:nvPr/>
+        </p:nvSpPr>
+        <p:spPr>
+          <a:xfrm>
+            <a:off x="594912" y="1379521"/>
+            <a:ext cx="3657600" cy="3657600"/>
+          </a:xfrm>
+          <a:prstGeom prst="pie">
+            <a:avLst>
+              <a:gd name="adj1" fmla="val 16181484"/>
+              <a:gd name="adj2" fmla="val 20528996"/>
+            </a:avLst>
+          </a:prstGeom>
+          <a:solidFill>
+            <a:srgbClr val="A79ADF">
+              <a:alpha val="50000"/>
+            </a:srgbClr>
+          </a:solidFill>
+          <a:ln>
+            <a:noFill/>
+          </a:ln>
+        </p:spPr>
+        <p:style>
+          <a:lnRef idx="2">
+            <a:schemeClr val="accent1">
+              <a:shade val="15000"/>
+            </a:schemeClr>
+          </a:lnRef>
+          <a:fillRef idx="1">
+            <a:schemeClr val="accent1"/>
+          </a:fillRef>
+          <a:effectRef idx="0">
+            <a:schemeClr val="accent1"/>
+          </a:effectRef>
+          <a:fontRef idx="minor">
+            <a:schemeClr val="lt1"/>
+          </a:fontRef>
+        </p:style>
+        <p:txBody>
+          <a:bodyPr rtlCol="0" anchor="ctr"/>
+          <a:lstStyle/>
+          <a:p>
+            <a:pPr algn="ctr"/>
+            <a:endParaRPr lang="en-US">
+              <a:solidFill>
+                <a:schemeClr val="tx1"/>
+              </a:solidFill>
+            </a:endParaRPr>
+          </a:p>
+        </p:txBody>
+      </p:sp>
       <p:grpSp>
         <p:nvGrpSpPr>
           <p:cNvPr id="12" name="Group 11">
@@ -5960,10 +6021,10 @@
           </p:nvGrpSpPr>
           <p:grpSpPr>
             <a:xfrm>
-              <a:off x="729714" y="1503081"/>
+              <a:off x="729714" y="1503080"/>
               <a:ext cx="3396485" cy="3396485"/>
               <a:chOff x="534209" y="1353510"/>
-              <a:chExt cx="3697990" cy="3697990"/>
+              <a:chExt cx="3697990" cy="3697991"/>
             </a:xfrm>
           </p:grpSpPr>
           <p:sp>
@@ -6041,7 +6102,7 @@
             </p:nvSpPr>
             <p:spPr>
               <a:xfrm>
-                <a:off x="534209" y="1353510"/>
+                <a:off x="534209" y="1353511"/>
                 <a:ext cx="3697990" cy="3697990"/>
               </a:xfrm>
               <a:prstGeom prst="pie">
@@ -6192,14 +6253,14 @@
           </p:nvGrpSpPr>
           <p:grpSpPr>
             <a:xfrm>
-              <a:off x="455264" y="1185069"/>
-              <a:ext cx="3824662" cy="3852052"/>
-              <a:chOff x="348509" y="1226896"/>
-              <a:chExt cx="3861590" cy="3828753"/>
+              <a:off x="455264" y="994829"/>
+              <a:ext cx="3856936" cy="4042292"/>
+              <a:chOff x="348509" y="1037807"/>
+              <a:chExt cx="3894176" cy="4017842"/>
             </a:xfrm>
           </p:grpSpPr>
-          <mc:AlternateContent xmlns:mc="http://schemas.openxmlformats.org/markup-compatibility/2006" xmlns:a14="http://schemas.microsoft.com/office/drawing/2010/main">
-            <mc:Choice Requires="a14">
+          <mc:AlternateContent xmlns:mc="http://schemas.openxmlformats.org/markup-compatibility/2006">
+            <mc:Choice xmlns:a14="http://schemas.microsoft.com/office/drawing/2010/main" Requires="a14">
               <p:sp>
                 <p:nvSpPr>
                   <p:cNvPr id="15" name="文本框 14">
@@ -6214,7 +6275,7 @@
                 </p:nvSpPr>
                 <p:spPr>
                   <a:xfrm>
-                    <a:off x="3736344" y="1999613"/>
+                    <a:off x="3936303" y="1949348"/>
                     <a:ext cx="306382" cy="256543"/>
                   </a:xfrm>
                   <a:prstGeom prst="rect">
@@ -6255,7 +6316,7 @@
                 </p:txBody>
               </p:sp>
             </mc:Choice>
-            <mc:Fallback xmlns="">
+            <mc:Fallback>
               <p:sp>
                 <p:nvSpPr>
                   <p:cNvPr id="15" name="文本框 14">
@@ -6272,7 +6333,7 @@
                 </p:nvSpPr>
                 <p:spPr>
                   <a:xfrm>
-                    <a:off x="3736344" y="1999613"/>
+                    <a:off x="3936303" y="1949348"/>
                     <a:ext cx="306382" cy="256543"/>
                   </a:xfrm>
                   <a:prstGeom prst="rect">
@@ -6281,7 +6342,7 @@
                   <a:blipFill>
                     <a:blip r:embed="rId11"/>
                     <a:stretch>
-                      <a:fillRect l="-24000" r="-4000" b="-83333"/>
+                      <a:fillRect l="-26531" r="-4082" b="-83333"/>
                     </a:stretch>
                   </a:blipFill>
                 </p:spPr>
@@ -6830,8 +6891,8 @@
               </p:sp>
             </mc:Fallback>
           </mc:AlternateContent>
-          <mc:AlternateContent xmlns:mc="http://schemas.openxmlformats.org/markup-compatibility/2006" xmlns:a14="http://schemas.microsoft.com/office/drawing/2010/main">
-            <mc:Choice Requires="a14">
+          <mc:AlternateContent xmlns:mc="http://schemas.openxmlformats.org/markup-compatibility/2006">
+            <mc:Choice xmlns:a14="http://schemas.microsoft.com/office/drawing/2010/main" Requires="a14">
               <p:sp>
                 <p:nvSpPr>
                   <p:cNvPr id="28" name="文本框 21">
@@ -6846,7 +6907,7 @@
                 </p:nvSpPr>
                 <p:spPr>
                   <a:xfrm>
-                    <a:off x="2715623" y="1226896"/>
+                    <a:off x="2789554" y="1037807"/>
                     <a:ext cx="641384" cy="256543"/>
                   </a:xfrm>
                   <a:prstGeom prst="rect">
@@ -6907,7 +6968,7 @@
                 </p:txBody>
               </p:sp>
             </mc:Choice>
-            <mc:Fallback xmlns="">
+            <mc:Fallback>
               <p:sp>
                 <p:nvSpPr>
                   <p:cNvPr id="28" name="文本框 21">
@@ -6924,7 +6985,7 @@
                 </p:nvSpPr>
                 <p:spPr>
                   <a:xfrm>
-                    <a:off x="2715623" y="1226896"/>
+                    <a:off x="2789554" y="1037807"/>
                     <a:ext cx="641384" cy="256543"/>
                   </a:xfrm>
                   <a:prstGeom prst="rect">
@@ -8394,6 +8455,234 @@
           </p:sp>
         </p:grpSp>
       </p:grpSp>
+      <p:sp>
+        <p:nvSpPr>
+          <p:cNvPr id="2" name="TextBox 1">
+            <a:extLst>
+              <a:ext uri="{FF2B5EF4-FFF2-40B4-BE49-F238E27FC236}">
+                <a16:creationId xmlns:a16="http://schemas.microsoft.com/office/drawing/2014/main" id="{A13F5675-BF05-2B14-6C61-EEFA49186904}"/>
+              </a:ext>
+            </a:extLst>
+          </p:cNvPr>
+          <p:cNvSpPr txBox="1"/>
+          <p:nvPr/>
+        </p:nvSpPr>
+        <p:spPr>
+          <a:xfrm rot="1042146">
+            <a:off x="2667780" y="1384875"/>
+            <a:ext cx="583814" cy="261610"/>
+          </a:xfrm>
+          <a:prstGeom prst="rect">
+            <a:avLst/>
+          </a:prstGeom>
+          <a:noFill/>
+        </p:spPr>
+        <p:txBody>
+          <a:bodyPr wrap="none" rtlCol="0">
+            <a:spAutoFit/>
+          </a:bodyPr>
+          <a:lstStyle/>
+          <a:p>
+            <a:r>
+              <a:rPr lang="en-US" sz="1100" dirty="0">
+                <a:latin typeface="Arial" panose="020B0604020202020204" pitchFamily="34" charset="0"/>
+                <a:cs typeface="Arial" panose="020B0604020202020204" pitchFamily="34" charset="0"/>
+              </a:rPr>
+              <a:t>44.9%</a:t>
+            </a:r>
+          </a:p>
+        </p:txBody>
+      </p:sp>
+      <p:sp>
+        <p:nvSpPr>
+          <p:cNvPr id="21" name="TextBox 20">
+            <a:extLst>
+              <a:ext uri="{FF2B5EF4-FFF2-40B4-BE49-F238E27FC236}">
+                <a16:creationId xmlns:a16="http://schemas.microsoft.com/office/drawing/2014/main" id="{1C9F9918-1889-FF0E-EF7A-9F3AB7CE4237}"/>
+              </a:ext>
+            </a:extLst>
+          </p:cNvPr>
+          <p:cNvSpPr txBox="1"/>
+          <p:nvPr/>
+        </p:nvSpPr>
+        <p:spPr>
+          <a:xfrm rot="1115154">
+            <a:off x="2624825" y="1527457"/>
+            <a:ext cx="583814" cy="261610"/>
+          </a:xfrm>
+          <a:prstGeom prst="rect">
+            <a:avLst/>
+          </a:prstGeom>
+          <a:noFill/>
+        </p:spPr>
+        <p:txBody>
+          <a:bodyPr wrap="none" rtlCol="0">
+            <a:spAutoFit/>
+          </a:bodyPr>
+          <a:lstStyle/>
+          <a:p>
+            <a:r>
+              <a:rPr lang="en-US" sz="1100" dirty="0">
+                <a:latin typeface="Arial" panose="020B0604020202020204" pitchFamily="34" charset="0"/>
+                <a:cs typeface="Arial" panose="020B0604020202020204" pitchFamily="34" charset="0"/>
+              </a:rPr>
+              <a:t>43.7%</a:t>
+            </a:r>
+          </a:p>
+        </p:txBody>
+      </p:sp>
+      <p:sp>
+        <p:nvSpPr>
+          <p:cNvPr id="23" name="TextBox 22">
+            <a:extLst>
+              <a:ext uri="{FF2B5EF4-FFF2-40B4-BE49-F238E27FC236}">
+                <a16:creationId xmlns:a16="http://schemas.microsoft.com/office/drawing/2014/main" id="{C34BDD9C-9D90-DBB0-2EA9-4247B879AF7D}"/>
+              </a:ext>
+            </a:extLst>
+          </p:cNvPr>
+          <p:cNvSpPr txBox="1"/>
+          <p:nvPr/>
+        </p:nvSpPr>
+        <p:spPr>
+          <a:xfrm>
+            <a:off x="1958081" y="1297151"/>
+            <a:ext cx="498855" cy="261610"/>
+          </a:xfrm>
+          <a:prstGeom prst="rect">
+            <a:avLst/>
+          </a:prstGeom>
+          <a:noFill/>
+        </p:spPr>
+        <p:txBody>
+          <a:bodyPr wrap="none" rtlCol="0">
+            <a:spAutoFit/>
+          </a:bodyPr>
+          <a:lstStyle/>
+          <a:p>
+            <a:r>
+              <a:rPr lang="en-US" sz="1100" dirty="0">
+                <a:latin typeface="Arial" panose="020B0604020202020204" pitchFamily="34" charset="0"/>
+                <a:cs typeface="Arial" panose="020B0604020202020204" pitchFamily="34" charset="0"/>
+              </a:rPr>
+              <a:t>2016</a:t>
+            </a:r>
+          </a:p>
+        </p:txBody>
+      </p:sp>
+      <p:sp>
+        <p:nvSpPr>
+          <p:cNvPr id="25" name="TextBox 24">
+            <a:extLst>
+              <a:ext uri="{FF2B5EF4-FFF2-40B4-BE49-F238E27FC236}">
+                <a16:creationId xmlns:a16="http://schemas.microsoft.com/office/drawing/2014/main" id="{578B74D2-6334-EE62-A2A9-06724CE6830D}"/>
+              </a:ext>
+            </a:extLst>
+          </p:cNvPr>
+          <p:cNvSpPr txBox="1"/>
+          <p:nvPr/>
+        </p:nvSpPr>
+        <p:spPr>
+          <a:xfrm>
+            <a:off x="1958081" y="1438555"/>
+            <a:ext cx="498855" cy="261610"/>
+          </a:xfrm>
+          <a:prstGeom prst="rect">
+            <a:avLst/>
+          </a:prstGeom>
+          <a:noFill/>
+        </p:spPr>
+        <p:txBody>
+          <a:bodyPr wrap="none" rtlCol="0">
+            <a:spAutoFit/>
+          </a:bodyPr>
+          <a:lstStyle/>
+          <a:p>
+            <a:r>
+              <a:rPr lang="en-US" sz="1100" dirty="0">
+                <a:latin typeface="Arial" panose="020B0604020202020204" pitchFamily="34" charset="0"/>
+                <a:cs typeface="Arial" panose="020B0604020202020204" pitchFamily="34" charset="0"/>
+              </a:rPr>
+              <a:t>2023</a:t>
+            </a:r>
+          </a:p>
+        </p:txBody>
+      </p:sp>
+      <p:sp>
+        <p:nvSpPr>
+          <p:cNvPr id="29" name="TextBox 28">
+            <a:extLst>
+              <a:ext uri="{FF2B5EF4-FFF2-40B4-BE49-F238E27FC236}">
+                <a16:creationId xmlns:a16="http://schemas.microsoft.com/office/drawing/2014/main" id="{75268BB0-C380-8966-BAC7-36AB97DD366A}"/>
+              </a:ext>
+            </a:extLst>
+          </p:cNvPr>
+          <p:cNvSpPr txBox="1"/>
+          <p:nvPr/>
+        </p:nvSpPr>
+        <p:spPr>
+          <a:xfrm rot="3190648">
+            <a:off x="3599579" y="2072400"/>
+            <a:ext cx="537327" cy="261610"/>
+          </a:xfrm>
+          <a:prstGeom prst="rect">
+            <a:avLst/>
+          </a:prstGeom>
+          <a:noFill/>
+        </p:spPr>
+        <p:txBody>
+          <a:bodyPr wrap="none" rtlCol="0">
+            <a:spAutoFit/>
+          </a:bodyPr>
+          <a:lstStyle/>
+          <a:p>
+            <a:r>
+              <a:rPr lang="en-US" sz="1100" dirty="0">
+                <a:latin typeface="Arial" panose="020B0604020202020204" pitchFamily="34" charset="0"/>
+                <a:cs typeface="Arial" panose="020B0604020202020204" pitchFamily="34" charset="0"/>
+              </a:rPr>
+              <a:t>0.264</a:t>
+            </a:r>
+          </a:p>
+        </p:txBody>
+      </p:sp>
+      <p:sp>
+        <p:nvSpPr>
+          <p:cNvPr id="33" name="TextBox 32">
+            <a:extLst>
+              <a:ext uri="{FF2B5EF4-FFF2-40B4-BE49-F238E27FC236}">
+                <a16:creationId xmlns:a16="http://schemas.microsoft.com/office/drawing/2014/main" id="{4FA6C340-7451-59B4-0D34-9C2C755BF723}"/>
+              </a:ext>
+            </a:extLst>
+          </p:cNvPr>
+          <p:cNvSpPr txBox="1"/>
+          <p:nvPr/>
+        </p:nvSpPr>
+        <p:spPr>
+          <a:xfrm rot="3190648">
+            <a:off x="3489947" y="2141178"/>
+            <a:ext cx="537327" cy="261610"/>
+          </a:xfrm>
+          <a:prstGeom prst="rect">
+            <a:avLst/>
+          </a:prstGeom>
+          <a:noFill/>
+        </p:spPr>
+        <p:txBody>
+          <a:bodyPr wrap="none" rtlCol="0">
+            <a:spAutoFit/>
+          </a:bodyPr>
+          <a:lstStyle/>
+          <a:p>
+            <a:r>
+              <a:rPr lang="en-US" sz="1100" dirty="0">
+                <a:latin typeface="Arial" panose="020B0604020202020204" pitchFamily="34" charset="0"/>
+                <a:cs typeface="Arial" panose="020B0604020202020204" pitchFamily="34" charset="0"/>
+              </a:rPr>
+              <a:t>0.269</a:t>
+            </a:r>
+          </a:p>
+        </p:txBody>
+      </p:sp>
     </p:spTree>
     <p:extLst>
       <p:ext uri="{BB962C8B-B14F-4D97-AF65-F5344CB8AC3E}">
@@ -11308,6 +11597,162 @@
           </a:p>
         </p:txBody>
       </p:sp>
+      <p:sp>
+        <p:nvSpPr>
+          <p:cNvPr id="2" name="Rectangle 1">
+            <a:extLst>
+              <a:ext uri="{FF2B5EF4-FFF2-40B4-BE49-F238E27FC236}">
+                <a16:creationId xmlns:a16="http://schemas.microsoft.com/office/drawing/2014/main" id="{8FC3D0FF-9D82-4C22-2CB5-6426D0548373}"/>
+              </a:ext>
+            </a:extLst>
+          </p:cNvPr>
+          <p:cNvSpPr/>
+          <p:nvPr/>
+        </p:nvSpPr>
+        <p:spPr>
+          <a:xfrm>
+            <a:off x="629265" y="688258"/>
+            <a:ext cx="1877961" cy="1285952"/>
+          </a:xfrm>
+          <a:prstGeom prst="rect">
+            <a:avLst/>
+          </a:prstGeom>
+          <a:solidFill>
+            <a:srgbClr val="8472D3"/>
+          </a:solidFill>
+          <a:ln>
+            <a:noFill/>
+          </a:ln>
+        </p:spPr>
+        <p:style>
+          <a:lnRef idx="2">
+            <a:schemeClr val="accent1">
+              <a:shade val="15000"/>
+            </a:schemeClr>
+          </a:lnRef>
+          <a:fillRef idx="1">
+            <a:schemeClr val="accent1"/>
+          </a:fillRef>
+          <a:effectRef idx="0">
+            <a:schemeClr val="accent1"/>
+          </a:effectRef>
+          <a:fontRef idx="minor">
+            <a:schemeClr val="lt1"/>
+          </a:fontRef>
+        </p:style>
+        <p:txBody>
+          <a:bodyPr rtlCol="0" anchor="ctr"/>
+          <a:lstStyle/>
+          <a:p>
+            <a:pPr algn="ctr"/>
+            <a:endParaRPr lang="en-US"/>
+          </a:p>
+        </p:txBody>
+      </p:sp>
+      <p:sp>
+        <p:nvSpPr>
+          <p:cNvPr id="5" name="Rectangle 4">
+            <a:extLst>
+              <a:ext uri="{FF2B5EF4-FFF2-40B4-BE49-F238E27FC236}">
+                <a16:creationId xmlns:a16="http://schemas.microsoft.com/office/drawing/2014/main" id="{BC579B57-325E-D66F-B45A-CC4EF117E1C4}"/>
+              </a:ext>
+            </a:extLst>
+          </p:cNvPr>
+          <p:cNvSpPr/>
+          <p:nvPr/>
+        </p:nvSpPr>
+        <p:spPr>
+          <a:xfrm>
+            <a:off x="2632555" y="692618"/>
+            <a:ext cx="1877961" cy="1285952"/>
+          </a:xfrm>
+          <a:prstGeom prst="rect">
+            <a:avLst/>
+          </a:prstGeom>
+          <a:solidFill>
+            <a:srgbClr val="91D372"/>
+          </a:solidFill>
+          <a:ln>
+            <a:noFill/>
+          </a:ln>
+        </p:spPr>
+        <p:style>
+          <a:lnRef idx="2">
+            <a:schemeClr val="accent1">
+              <a:shade val="15000"/>
+            </a:schemeClr>
+          </a:lnRef>
+          <a:fillRef idx="1">
+            <a:schemeClr val="accent1"/>
+          </a:fillRef>
+          <a:effectRef idx="0">
+            <a:schemeClr val="accent1"/>
+          </a:effectRef>
+          <a:fontRef idx="minor">
+            <a:schemeClr val="lt1"/>
+          </a:fontRef>
+        </p:style>
+        <p:txBody>
+          <a:bodyPr rtlCol="0" anchor="ctr"/>
+          <a:lstStyle/>
+          <a:p>
+            <a:pPr algn="ctr"/>
+            <a:endParaRPr lang="en-US"/>
+          </a:p>
+        </p:txBody>
+      </p:sp>
+      <p:sp>
+        <p:nvSpPr>
+          <p:cNvPr id="47" name="Rectangle 46">
+            <a:extLst>
+              <a:ext uri="{FF2B5EF4-FFF2-40B4-BE49-F238E27FC236}">
+                <a16:creationId xmlns:a16="http://schemas.microsoft.com/office/drawing/2014/main" id="{F7F693CE-DE15-2A8F-DC2A-D6E7DBBDFA10}"/>
+              </a:ext>
+            </a:extLst>
+          </p:cNvPr>
+          <p:cNvSpPr/>
+          <p:nvPr/>
+        </p:nvSpPr>
+        <p:spPr>
+          <a:xfrm>
+            <a:off x="4635845" y="702208"/>
+            <a:ext cx="1877961" cy="1285952"/>
+          </a:xfrm>
+          <a:prstGeom prst="rect">
+            <a:avLst/>
+          </a:prstGeom>
+          <a:solidFill>
+            <a:srgbClr val="D3B472"/>
+          </a:solidFill>
+          <a:ln>
+            <a:noFill/>
+          </a:ln>
+        </p:spPr>
+        <p:style>
+          <a:lnRef idx="2">
+            <a:schemeClr val="accent1">
+              <a:shade val="15000"/>
+            </a:schemeClr>
+          </a:lnRef>
+          <a:fillRef idx="1">
+            <a:schemeClr val="accent1"/>
+          </a:fillRef>
+          <a:effectRef idx="0">
+            <a:schemeClr val="accent1"/>
+          </a:effectRef>
+          <a:fontRef idx="minor">
+            <a:schemeClr val="lt1"/>
+          </a:fontRef>
+        </p:style>
+        <p:txBody>
+          <a:bodyPr rtlCol="0" anchor="ctr"/>
+          <a:lstStyle/>
+          <a:p>
+            <a:pPr algn="ctr"/>
+            <a:endParaRPr lang="en-US"/>
+          </a:p>
+        </p:txBody>
+      </p:sp>
     </p:spTree>
     <p:extLst>
       <p:ext uri="{BB962C8B-B14F-4D97-AF65-F5344CB8AC3E}">

--- a/Presentations/Graphs/param_rose_map_new.pptx
+++ b/Presentations/Graphs/param_rose_map_new.pptx
@@ -1178,7 +1178,7 @@
           <a:p>
             <a:fld id="{416EE624-B9F0-41BB-BB4E-97902D9C20A7}" type="datetimeFigureOut">
               <a:rPr lang="en-US" smtClean="0"/>
-              <a:t>7/7/2026</a:t>
+              <a:t>7/8/2026</a:t>
             </a:fld>
             <a:endParaRPr lang="en-US"/>
           </a:p>
@@ -1760,7 +1760,7 @@
           <a:p>
             <a:fld id="{04277E52-7FB3-4160-B2FF-FC214D695529}" type="datetimeFigureOut">
               <a:rPr lang="en-US" smtClean="0"/>
-              <a:t>7/7/2026</a:t>
+              <a:t>7/8/2026</a:t>
             </a:fld>
             <a:endParaRPr lang="en-US"/>
           </a:p>
@@ -1958,7 +1958,7 @@
           <a:p>
             <a:fld id="{04277E52-7FB3-4160-B2FF-FC214D695529}" type="datetimeFigureOut">
               <a:rPr lang="en-US" smtClean="0"/>
-              <a:t>7/7/2026</a:t>
+              <a:t>7/8/2026</a:t>
             </a:fld>
             <a:endParaRPr lang="en-US"/>
           </a:p>
@@ -2166,7 +2166,7 @@
           <a:p>
             <a:fld id="{04277E52-7FB3-4160-B2FF-FC214D695529}" type="datetimeFigureOut">
               <a:rPr lang="en-US" smtClean="0"/>
-              <a:t>7/7/2026</a:t>
+              <a:t>7/8/2026</a:t>
             </a:fld>
             <a:endParaRPr lang="en-US"/>
           </a:p>
@@ -2364,7 +2364,7 @@
           <a:p>
             <a:fld id="{04277E52-7FB3-4160-B2FF-FC214D695529}" type="datetimeFigureOut">
               <a:rPr lang="en-US" smtClean="0"/>
-              <a:t>7/7/2026</a:t>
+              <a:t>7/8/2026</a:t>
             </a:fld>
             <a:endParaRPr lang="en-US"/>
           </a:p>
@@ -2639,7 +2639,7 @@
           <a:p>
             <a:fld id="{04277E52-7FB3-4160-B2FF-FC214D695529}" type="datetimeFigureOut">
               <a:rPr lang="en-US" smtClean="0"/>
-              <a:t>7/7/2026</a:t>
+              <a:t>7/8/2026</a:t>
             </a:fld>
             <a:endParaRPr lang="en-US"/>
           </a:p>
@@ -2904,7 +2904,7 @@
           <a:p>
             <a:fld id="{04277E52-7FB3-4160-B2FF-FC214D695529}" type="datetimeFigureOut">
               <a:rPr lang="en-US" smtClean="0"/>
-              <a:t>7/7/2026</a:t>
+              <a:t>7/8/2026</a:t>
             </a:fld>
             <a:endParaRPr lang="en-US"/>
           </a:p>
@@ -3316,7 +3316,7 @@
           <a:p>
             <a:fld id="{04277E52-7FB3-4160-B2FF-FC214D695529}" type="datetimeFigureOut">
               <a:rPr lang="en-US" smtClean="0"/>
-              <a:t>7/7/2026</a:t>
+              <a:t>7/8/2026</a:t>
             </a:fld>
             <a:endParaRPr lang="en-US"/>
           </a:p>
@@ -3457,7 +3457,7 @@
           <a:p>
             <a:fld id="{04277E52-7FB3-4160-B2FF-FC214D695529}" type="datetimeFigureOut">
               <a:rPr lang="en-US" smtClean="0"/>
-              <a:t>7/7/2026</a:t>
+              <a:t>7/8/2026</a:t>
             </a:fld>
             <a:endParaRPr lang="en-US"/>
           </a:p>
@@ -3570,7 +3570,7 @@
           <a:p>
             <a:fld id="{04277E52-7FB3-4160-B2FF-FC214D695529}" type="datetimeFigureOut">
               <a:rPr lang="en-US" smtClean="0"/>
-              <a:t>7/7/2026</a:t>
+              <a:t>7/8/2026</a:t>
             </a:fld>
             <a:endParaRPr lang="en-US"/>
           </a:p>
@@ -3881,7 +3881,7 @@
           <a:p>
             <a:fld id="{04277E52-7FB3-4160-B2FF-FC214D695529}" type="datetimeFigureOut">
               <a:rPr lang="en-US" smtClean="0"/>
-              <a:t>7/7/2026</a:t>
+              <a:t>7/8/2026</a:t>
             </a:fld>
             <a:endParaRPr lang="en-US"/>
           </a:p>
@@ -4169,7 +4169,7 @@
           <a:p>
             <a:fld id="{04277E52-7FB3-4160-B2FF-FC214D695529}" type="datetimeFigureOut">
               <a:rPr lang="en-US" smtClean="0"/>
-              <a:t>7/7/2026</a:t>
+              <a:t>7/8/2026</a:t>
             </a:fld>
             <a:endParaRPr lang="en-US"/>
           </a:p>
@@ -4410,7 +4410,7 @@
           <a:p>
             <a:fld id="{04277E52-7FB3-4160-B2FF-FC214D695529}" type="datetimeFigureOut">
               <a:rPr lang="en-US" smtClean="0"/>
-              <a:t>7/7/2026</a:t>
+              <a:t>7/8/2026</a:t>
             </a:fld>
             <a:endParaRPr lang="en-US"/>
           </a:p>
@@ -4842,9 +4842,9 @@
         <p:grpSpPr>
           <a:xfrm>
             <a:off x="114954" y="798266"/>
-            <a:ext cx="11962092" cy="5131313"/>
+            <a:ext cx="12176969" cy="5131313"/>
             <a:chOff x="114954" y="798266"/>
-            <a:chExt cx="11962092" cy="5131313"/>
+            <a:chExt cx="12176969" cy="5131313"/>
           </a:xfrm>
         </p:grpSpPr>
         <p:grpSp>
@@ -5347,9 +5347,9 @@
           <p:grpSpPr>
             <a:xfrm>
               <a:off x="114954" y="798266"/>
-              <a:ext cx="3879654" cy="4565994"/>
+              <a:ext cx="4007289" cy="4565994"/>
               <a:chOff x="-114026" y="798266"/>
-              <a:chExt cx="3879654" cy="4565994"/>
+              <a:chExt cx="4007289" cy="4565994"/>
             </a:xfrm>
           </p:grpSpPr>
           <p:sp>
@@ -5408,10 +5408,10 @@
             </p:nvGrpSpPr>
             <p:grpSpPr>
               <a:xfrm>
-                <a:off x="-114026" y="1196204"/>
-                <a:ext cx="3879654" cy="4168056"/>
-                <a:chOff x="445723" y="1092030"/>
-                <a:chExt cx="3879654" cy="4168056"/>
+                <a:off x="-114026" y="1336717"/>
+                <a:ext cx="4007289" cy="4027543"/>
+                <a:chOff x="445723" y="1232543"/>
+                <a:chExt cx="4007289" cy="4027543"/>
               </a:xfrm>
             </p:grpSpPr>
             <p:sp>
@@ -5672,14 +5672,14 @@
               </p:nvGrpSpPr>
               <p:grpSpPr>
                 <a:xfrm>
-                  <a:off x="445723" y="1092030"/>
-                  <a:ext cx="3879654" cy="4168056"/>
-                  <a:chOff x="325572" y="1123985"/>
-                  <a:chExt cx="3917113" cy="4142845"/>
+                  <a:off x="445723" y="1232543"/>
+                  <a:ext cx="4007289" cy="4027543"/>
+                  <a:chOff x="325572" y="1263648"/>
+                  <a:chExt cx="4045980" cy="4003182"/>
                 </a:xfrm>
               </p:grpSpPr>
-              <mc:AlternateContent xmlns:mc="http://schemas.openxmlformats.org/markup-compatibility/2006" xmlns:a14="http://schemas.microsoft.com/office/drawing/2010/main">
-                <mc:Choice Requires="a14">
+              <mc:AlternateContent xmlns:mc="http://schemas.openxmlformats.org/markup-compatibility/2006">
+                <mc:Choice xmlns:a14="http://schemas.microsoft.com/office/drawing/2010/main" Requires="a14">
                   <p:sp>
                     <p:nvSpPr>
                       <p:cNvPr id="15" name="文本框 14">
@@ -5694,7 +5694,7 @@
                     </p:nvSpPr>
                     <p:spPr>
                       <a:xfrm>
-                        <a:off x="3936303" y="1955573"/>
+                        <a:off x="4065170" y="2349105"/>
                         <a:ext cx="306382" cy="396425"/>
                       </a:xfrm>
                       <a:prstGeom prst="rect">
@@ -5735,7 +5735,7 @@
                     </p:txBody>
                   </p:sp>
                 </mc:Choice>
-                <mc:Fallback xmlns="">
+                <mc:Fallback>
                   <p:sp>
                     <p:nvSpPr>
                       <p:cNvPr id="15" name="文本框 14">
@@ -5752,7 +5752,7 @@
                     </p:nvSpPr>
                     <p:spPr>
                       <a:xfrm>
-                        <a:off x="3936303" y="1955573"/>
+                        <a:off x="4065170" y="2349105"/>
                         <a:ext cx="306382" cy="396425"/>
                       </a:xfrm>
                       <a:prstGeom prst="rect">
@@ -5761,7 +5761,7 @@
                       <a:blipFill>
                         <a:blip r:embed="rId3"/>
                         <a:stretch>
-                          <a:fillRect l="-26531" r="-4082" b="-16667"/>
+                          <a:fillRect l="-24000" r="-4000" b="-16667"/>
                         </a:stretch>
                       </a:blipFill>
                     </p:spPr>
@@ -6326,8 +6326,8 @@
                   </p:sp>
                 </mc:Fallback>
               </mc:AlternateContent>
-              <mc:AlternateContent xmlns:mc="http://schemas.openxmlformats.org/markup-compatibility/2006" xmlns:a14="http://schemas.microsoft.com/office/drawing/2010/main">
-                <mc:Choice Requires="a14">
+              <mc:AlternateContent xmlns:mc="http://schemas.openxmlformats.org/markup-compatibility/2006">
+                <mc:Choice xmlns:a14="http://schemas.microsoft.com/office/drawing/2010/main" Requires="a14">
                   <p:sp>
                     <p:nvSpPr>
                       <p:cNvPr id="28" name="文本框 21">
@@ -6342,8 +6342,8 @@
                     </p:nvSpPr>
                     <p:spPr>
                       <a:xfrm>
-                        <a:off x="2830222" y="1123985"/>
-                        <a:ext cx="641384" cy="479471"/>
+                        <a:off x="3268042" y="1284611"/>
+                        <a:ext cx="641385" cy="479471"/>
                       </a:xfrm>
                       <a:prstGeom prst="rect">
                         <a:avLst/>
@@ -6403,7 +6403,7 @@
                     </p:txBody>
                   </p:sp>
                 </mc:Choice>
-                <mc:Fallback xmlns="">
+                <mc:Fallback>
                   <p:sp>
                     <p:nvSpPr>
                       <p:cNvPr id="28" name="文本框 21">
@@ -6420,8 +6420,8 @@
                     </p:nvSpPr>
                     <p:spPr>
                       <a:xfrm>
-                        <a:off x="2830222" y="1123985"/>
-                        <a:ext cx="641384" cy="479471"/>
+                        <a:off x="3268042" y="1284611"/>
+                        <a:ext cx="641385" cy="479471"/>
                       </a:xfrm>
                       <a:prstGeom prst="rect">
                         <a:avLst/>
@@ -7195,10 +7195,10 @@
               <p:nvPr/>
             </p:nvPicPr>
             <p:blipFill>
-              <a:blip>
+              <a:blip r:embed="rId10">
                 <a:extLst>
                   <a:ext uri="{96DAC541-7B7A-43D3-8B79-37D633B846F1}">
-                    <asvg:svgBlip xmlns:asvg="http://schemas.microsoft.com/office/drawing/2016/SVG/main" r:embed="rId10"/>
+                    <asvg:svgBlip xmlns:asvg="http://schemas.microsoft.com/office/drawing/2016/SVG/main" r:embed="rId11"/>
                   </a:ext>
                 </a:extLst>
               </a:blip>
@@ -7232,9 +7232,9 @@
           <p:grpSpPr>
             <a:xfrm>
               <a:off x="4156173" y="798266"/>
-              <a:ext cx="3879654" cy="4573614"/>
+              <a:ext cx="4019862" cy="4573614"/>
               <a:chOff x="4215823" y="798266"/>
-              <a:chExt cx="3879654" cy="4573614"/>
+              <a:chExt cx="4019862" cy="4573614"/>
             </a:xfrm>
           </p:grpSpPr>
           <p:grpSp>
@@ -7251,10 +7251,10 @@
             </p:nvGrpSpPr>
             <p:grpSpPr>
               <a:xfrm>
-                <a:off x="4215823" y="1203824"/>
-                <a:ext cx="3879654" cy="4168056"/>
-                <a:chOff x="445723" y="1092030"/>
-                <a:chExt cx="3879654" cy="4168056"/>
+                <a:off x="4215823" y="1344337"/>
+                <a:ext cx="4019862" cy="4027543"/>
+                <a:chOff x="445723" y="1232543"/>
+                <a:chExt cx="4019862" cy="4027543"/>
               </a:xfrm>
             </p:grpSpPr>
             <p:sp>
@@ -7515,14 +7515,14 @@
               </p:nvGrpSpPr>
               <p:grpSpPr>
                 <a:xfrm>
-                  <a:off x="445723" y="1092030"/>
-                  <a:ext cx="3879654" cy="4168056"/>
-                  <a:chOff x="325572" y="1123985"/>
-                  <a:chExt cx="3917113" cy="4142845"/>
+                  <a:off x="445723" y="1232543"/>
+                  <a:ext cx="4019862" cy="4027543"/>
+                  <a:chOff x="325572" y="1263648"/>
+                  <a:chExt cx="4058675" cy="4003182"/>
                 </a:xfrm>
               </p:grpSpPr>
-              <mc:AlternateContent xmlns:mc="http://schemas.openxmlformats.org/markup-compatibility/2006" xmlns:a14="http://schemas.microsoft.com/office/drawing/2010/main">
-                <mc:Choice Requires="a14">
+              <mc:AlternateContent xmlns:mc="http://schemas.openxmlformats.org/markup-compatibility/2006">
+                <mc:Choice xmlns:a14="http://schemas.microsoft.com/office/drawing/2010/main" Requires="a14">
                   <p:sp>
                     <p:nvSpPr>
                       <p:cNvPr id="250" name="文本框 14">
@@ -7537,7 +7537,7 @@
                     </p:nvSpPr>
                     <p:spPr>
                       <a:xfrm>
-                        <a:off x="3936303" y="1955573"/>
+                        <a:off x="4077865" y="2320995"/>
                         <a:ext cx="306382" cy="396425"/>
                       </a:xfrm>
                       <a:prstGeom prst="rect">
@@ -7578,7 +7578,7 @@
                     </p:txBody>
                   </p:sp>
                 </mc:Choice>
-                <mc:Fallback xmlns="">
+                <mc:Fallback>
                   <p:sp>
                     <p:nvSpPr>
                       <p:cNvPr id="250" name="文本框 14">
@@ -7595,14 +7595,14 @@
                     </p:nvSpPr>
                     <p:spPr>
                       <a:xfrm>
-                        <a:off x="3936303" y="1955573"/>
+                        <a:off x="4077865" y="2320995"/>
                         <a:ext cx="306382" cy="396425"/>
                       </a:xfrm>
                       <a:prstGeom prst="rect">
                         <a:avLst/>
                       </a:prstGeom>
                       <a:blipFill>
-                        <a:blip r:embed="rId11"/>
+                        <a:blip r:embed="rId12"/>
                         <a:stretch>
                           <a:fillRect l="-24000" r="-4000" b="-18462"/>
                         </a:stretch>
@@ -7724,7 +7724,7 @@
                         <a:avLst/>
                       </a:prstGeom>
                       <a:blipFill>
-                        <a:blip r:embed="rId12"/>
+                        <a:blip r:embed="rId13"/>
                         <a:stretch>
                           <a:fillRect b="-5882"/>
                         </a:stretch>
@@ -7826,7 +7826,7 @@
                         <a:avLst/>
                       </a:prstGeom>
                       <a:blipFill>
-                        <a:blip r:embed="rId13"/>
+                        <a:blip r:embed="rId14"/>
                         <a:stretch>
                           <a:fillRect l="-23810" r="-2381" b="-4918"/>
                         </a:stretch>
@@ -7928,7 +7928,7 @@
                         <a:avLst/>
                       </a:prstGeom>
                       <a:blipFill>
-                        <a:blip r:embed="rId14"/>
+                        <a:blip r:embed="rId15"/>
                         <a:stretch>
                           <a:fillRect l="-16327" b="-46512"/>
                         </a:stretch>
@@ -8046,7 +8046,7 @@
                         <a:avLst/>
                       </a:prstGeom>
                       <a:blipFill>
-                        <a:blip r:embed="rId15"/>
+                        <a:blip r:embed="rId16"/>
                         <a:stretch>
                           <a:fillRect l="-54000" r="-34000" b="-83333"/>
                         </a:stretch>
@@ -8148,7 +8148,7 @@
                         <a:avLst/>
                       </a:prstGeom>
                       <a:blipFill>
-                        <a:blip r:embed="rId16"/>
+                        <a:blip r:embed="rId17"/>
                         <a:stretch>
                           <a:fillRect l="-14000" b="-50000"/>
                         </a:stretch>
@@ -8169,8 +8169,8 @@
                   </p:sp>
                 </mc:Fallback>
               </mc:AlternateContent>
-              <mc:AlternateContent xmlns:mc="http://schemas.openxmlformats.org/markup-compatibility/2006" xmlns:a14="http://schemas.microsoft.com/office/drawing/2010/main">
-                <mc:Choice Requires="a14">
+              <mc:AlternateContent xmlns:mc="http://schemas.openxmlformats.org/markup-compatibility/2006">
+                <mc:Choice xmlns:a14="http://schemas.microsoft.com/office/drawing/2010/main" Requires="a14">
                   <p:sp>
                     <p:nvSpPr>
                       <p:cNvPr id="256" name="文本框 21">
@@ -8185,8 +8185,8 @@
                     </p:nvSpPr>
                     <p:spPr>
                       <a:xfrm>
-                        <a:off x="2830222" y="1123985"/>
-                        <a:ext cx="641384" cy="479471"/>
+                        <a:off x="3398018" y="1374321"/>
+                        <a:ext cx="641385" cy="479471"/>
                       </a:xfrm>
                       <a:prstGeom prst="rect">
                         <a:avLst/>
@@ -8246,7 +8246,7 @@
                     </p:txBody>
                   </p:sp>
                 </mc:Choice>
-                <mc:Fallback xmlns="">
+                <mc:Fallback>
                   <p:sp>
                     <p:nvSpPr>
                       <p:cNvPr id="256" name="文本框 21">
@@ -8263,14 +8263,14 @@
                     </p:nvSpPr>
                     <p:spPr>
                       <a:xfrm>
-                        <a:off x="2830222" y="1123985"/>
-                        <a:ext cx="641384" cy="479471"/>
+                        <a:off x="3398018" y="1374321"/>
+                        <a:ext cx="641385" cy="479471"/>
                       </a:xfrm>
                       <a:prstGeom prst="rect">
                         <a:avLst/>
                       </a:prstGeom>
                       <a:blipFill>
-                        <a:blip r:embed="rId17"/>
+                        <a:blip r:embed="rId18"/>
                         <a:stretch>
                           <a:fillRect/>
                         </a:stretch>
@@ -9080,10 +9080,10 @@
               <p:nvPr/>
             </p:nvPicPr>
             <p:blipFill>
-              <a:blip>
+              <a:blip r:embed="rId19">
                 <a:extLst>
                   <a:ext uri="{96DAC541-7B7A-43D3-8B79-37D633B846F1}">
-                    <asvg:svgBlip xmlns:asvg="http://schemas.microsoft.com/office/drawing/2016/SVG/main" r:embed="rId18"/>
+                    <asvg:svgBlip xmlns:asvg="http://schemas.microsoft.com/office/drawing/2016/SVG/main" r:embed="rId20"/>
                   </a:ext>
                 </a:extLst>
               </a:blip>
@@ -9117,9 +9117,9 @@
           <p:grpSpPr>
             <a:xfrm>
               <a:off x="8197392" y="798266"/>
-              <a:ext cx="3879654" cy="4573614"/>
+              <a:ext cx="4094531" cy="4573614"/>
               <a:chOff x="8544332" y="798266"/>
-              <a:chExt cx="3879654" cy="4573614"/>
+              <a:chExt cx="4094531" cy="4573614"/>
             </a:xfrm>
           </p:grpSpPr>
           <p:grpSp>
@@ -9136,10 +9136,10 @@
             </p:nvGrpSpPr>
             <p:grpSpPr>
               <a:xfrm>
-                <a:off x="8544332" y="1203824"/>
-                <a:ext cx="3879654" cy="4168056"/>
-                <a:chOff x="445723" y="1092030"/>
-                <a:chExt cx="3879654" cy="4168056"/>
+                <a:off x="8544332" y="1344337"/>
+                <a:ext cx="4094531" cy="4027543"/>
+                <a:chOff x="445723" y="1232543"/>
+                <a:chExt cx="4094531" cy="4027543"/>
               </a:xfrm>
             </p:grpSpPr>
             <p:sp>
@@ -9400,14 +9400,14 @@
               </p:nvGrpSpPr>
               <p:grpSpPr>
                 <a:xfrm>
-                  <a:off x="445723" y="1092030"/>
-                  <a:ext cx="3879654" cy="4168056"/>
-                  <a:chOff x="325572" y="1123985"/>
-                  <a:chExt cx="3917113" cy="4142845"/>
+                  <a:off x="445723" y="1232543"/>
+                  <a:ext cx="4094531" cy="4027543"/>
+                  <a:chOff x="325572" y="1263648"/>
+                  <a:chExt cx="4134064" cy="4003182"/>
                 </a:xfrm>
               </p:grpSpPr>
-              <mc:AlternateContent xmlns:mc="http://schemas.openxmlformats.org/markup-compatibility/2006" xmlns:a14="http://schemas.microsoft.com/office/drawing/2010/main">
-                <mc:Choice Requires="a14">
+              <mc:AlternateContent xmlns:mc="http://schemas.openxmlformats.org/markup-compatibility/2006">
+                <mc:Choice xmlns:a14="http://schemas.microsoft.com/office/drawing/2010/main" Requires="a14">
                   <p:sp>
                     <p:nvSpPr>
                       <p:cNvPr id="281" name="文本框 14">
@@ -9422,7 +9422,7 @@
                     </p:nvSpPr>
                     <p:spPr>
                       <a:xfrm>
-                        <a:off x="3936303" y="1955573"/>
+                        <a:off x="4153254" y="2246040"/>
                         <a:ext cx="306382" cy="396425"/>
                       </a:xfrm>
                       <a:prstGeom prst="rect">
@@ -9463,7 +9463,7 @@
                     </p:txBody>
                   </p:sp>
                 </mc:Choice>
-                <mc:Fallback xmlns="">
+                <mc:Fallback>
                   <p:sp>
                     <p:nvSpPr>
                       <p:cNvPr id="281" name="文本框 14">
@@ -9480,16 +9480,16 @@
                     </p:nvSpPr>
                     <p:spPr>
                       <a:xfrm>
-                        <a:off x="3936303" y="1955573"/>
+                        <a:off x="4153254" y="2246040"/>
                         <a:ext cx="306382" cy="396425"/>
                       </a:xfrm>
                       <a:prstGeom prst="rect">
                         <a:avLst/>
                       </a:prstGeom>
                       <a:blipFill>
-                        <a:blip r:embed="rId19"/>
+                        <a:blip r:embed="rId21"/>
                         <a:stretch>
-                          <a:fillRect l="-24000" r="-4000" b="-18462"/>
+                          <a:fillRect l="-26531" r="-4082" b="-18462"/>
                         </a:stretch>
                       </a:blipFill>
                     </p:spPr>
@@ -9609,7 +9609,7 @@
                         <a:avLst/>
                       </a:prstGeom>
                       <a:blipFill>
-                        <a:blip r:embed="rId20"/>
+                        <a:blip r:embed="rId22"/>
                         <a:stretch>
                           <a:fillRect b="-5882"/>
                         </a:stretch>
@@ -9711,7 +9711,7 @@
                         <a:avLst/>
                       </a:prstGeom>
                       <a:blipFill>
-                        <a:blip r:embed="rId21"/>
+                        <a:blip r:embed="rId23"/>
                         <a:stretch>
                           <a:fillRect l="-26190" b="-4918"/>
                         </a:stretch>
@@ -9813,7 +9813,7 @@
                         <a:avLst/>
                       </a:prstGeom>
                       <a:blipFill>
-                        <a:blip r:embed="rId22"/>
+                        <a:blip r:embed="rId24"/>
                         <a:stretch>
                           <a:fillRect l="-16327" b="-46512"/>
                         </a:stretch>
@@ -9931,7 +9931,7 @@
                         <a:avLst/>
                       </a:prstGeom>
                       <a:blipFill>
-                        <a:blip r:embed="rId23"/>
+                        <a:blip r:embed="rId25"/>
                         <a:stretch>
                           <a:fillRect l="-54000" r="-34000" b="-83333"/>
                         </a:stretch>
@@ -10033,7 +10033,7 @@
                         <a:avLst/>
                       </a:prstGeom>
                       <a:blipFill>
-                        <a:blip r:embed="rId24"/>
+                        <a:blip r:embed="rId26"/>
                         <a:stretch>
                           <a:fillRect l="-14000" b="-50000"/>
                         </a:stretch>
@@ -10054,8 +10054,8 @@
                   </p:sp>
                 </mc:Fallback>
               </mc:AlternateContent>
-              <mc:AlternateContent xmlns:mc="http://schemas.openxmlformats.org/markup-compatibility/2006" xmlns:a14="http://schemas.microsoft.com/office/drawing/2010/main">
-                <mc:Choice Requires="a14">
+              <mc:AlternateContent xmlns:mc="http://schemas.openxmlformats.org/markup-compatibility/2006">
+                <mc:Choice xmlns:a14="http://schemas.microsoft.com/office/drawing/2010/main" Requires="a14">
                   <p:sp>
                     <p:nvSpPr>
                       <p:cNvPr id="287" name="文本框 21">
@@ -10070,8 +10070,8 @@
                     </p:nvSpPr>
                     <p:spPr>
                       <a:xfrm>
-                        <a:off x="2830222" y="1123985"/>
-                        <a:ext cx="641384" cy="479471"/>
+                        <a:off x="3302055" y="1374321"/>
+                        <a:ext cx="641385" cy="479471"/>
                       </a:xfrm>
                       <a:prstGeom prst="rect">
                         <a:avLst/>
@@ -10131,7 +10131,7 @@
                     </p:txBody>
                   </p:sp>
                 </mc:Choice>
-                <mc:Fallback xmlns="">
+                <mc:Fallback>
                   <p:sp>
                     <p:nvSpPr>
                       <p:cNvPr id="287" name="文本框 21">
@@ -10148,14 +10148,14 @@
                     </p:nvSpPr>
                     <p:spPr>
                       <a:xfrm>
-                        <a:off x="2830222" y="1123985"/>
-                        <a:ext cx="641384" cy="479471"/>
+                        <a:off x="3302055" y="1374321"/>
+                        <a:ext cx="641385" cy="479471"/>
                       </a:xfrm>
                       <a:prstGeom prst="rect">
                         <a:avLst/>
                       </a:prstGeom>
                       <a:blipFill>
-                        <a:blip r:embed="rId25"/>
+                        <a:blip r:embed="rId27"/>
                         <a:stretch>
                           <a:fillRect/>
                         </a:stretch>
@@ -10965,10 +10965,10 @@
               <p:nvPr/>
             </p:nvPicPr>
             <p:blipFill>
-              <a:blip>
+              <a:blip r:embed="rId28">
                 <a:extLst>
                   <a:ext uri="{96DAC541-7B7A-43D3-8B79-37D633B846F1}">
-                    <asvg:svgBlip xmlns:asvg="http://schemas.microsoft.com/office/drawing/2016/SVG/main" r:embed="rId26"/>
+                    <asvg:svgBlip xmlns:asvg="http://schemas.microsoft.com/office/drawing/2016/SVG/main" r:embed="rId29"/>
                   </a:ext>
                 </a:extLst>
               </a:blip>

--- a/Presentations/Graphs/param_rose_map_new.pptx
+++ b/Presentations/Graphs/param_rose_map_new.pptx
@@ -5,11 +5,12 @@
     <p:sldMasterId id="2147483648" r:id="rId1"/>
   </p:sldMasterIdLst>
   <p:notesMasterIdLst>
-    <p:notesMasterId r:id="rId4"/>
+    <p:notesMasterId r:id="rId5"/>
   </p:notesMasterIdLst>
   <p:sldIdLst>
     <p:sldId id="256" r:id="rId2"/>
-    <p:sldId id="257" r:id="rId3"/>
+    <p:sldId id="258" r:id="rId3"/>
+    <p:sldId id="257" r:id="rId4"/>
   </p:sldIdLst>
   <p:sldSz cx="12192000" cy="6858000"/>
   <p:notesSz cx="6858000" cy="9144000"/>
@@ -1178,7 +1179,7 @@
           <a:p>
             <a:fld id="{416EE624-B9F0-41BB-BB4E-97902D9C20A7}" type="datetimeFigureOut">
               <a:rPr lang="en-US" smtClean="0"/>
-              <a:t>7/8/2026</a:t>
+              <a:t>7/27/2026</a:t>
             </a:fld>
             <a:endParaRPr lang="en-US"/>
           </a:p>
@@ -1534,6 +1535,114 @@
   <p:cSld>
     <p:spTree>
       <p:nvGrpSpPr>
+        <p:cNvPr id="1" name="">
+          <a:extLst>
+            <a:ext uri="{FF2B5EF4-FFF2-40B4-BE49-F238E27FC236}">
+              <a16:creationId xmlns:a16="http://schemas.microsoft.com/office/drawing/2014/main" id="{82F73C89-BDC6-7C7A-A5BA-742505DFF502}"/>
+            </a:ext>
+          </a:extLst>
+        </p:cNvPr>
+        <p:cNvGrpSpPr/>
+        <p:nvPr/>
+      </p:nvGrpSpPr>
+      <p:grpSpPr>
+        <a:xfrm>
+          <a:off x="0" y="0"/>
+          <a:ext cx="0" cy="0"/>
+          <a:chOff x="0" y="0"/>
+          <a:chExt cx="0" cy="0"/>
+        </a:xfrm>
+      </p:grpSpPr>
+      <p:sp>
+        <p:nvSpPr>
+          <p:cNvPr id="2" name="Slide Image Placeholder 1">
+            <a:extLst>
+              <a:ext uri="{FF2B5EF4-FFF2-40B4-BE49-F238E27FC236}">
+                <a16:creationId xmlns:a16="http://schemas.microsoft.com/office/drawing/2014/main" id="{015CA7AA-C1B4-E12E-140C-4A2162C86254}"/>
+              </a:ext>
+            </a:extLst>
+          </p:cNvPr>
+          <p:cNvSpPr>
+            <a:spLocks noGrp="1" noRot="1" noChangeAspect="1"/>
+          </p:cNvSpPr>
+          <p:nvPr>
+            <p:ph type="sldImg"/>
+          </p:nvPr>
+        </p:nvSpPr>
+        <p:spPr/>
+      </p:sp>
+      <p:sp>
+        <p:nvSpPr>
+          <p:cNvPr id="3" name="Notes Placeholder 2">
+            <a:extLst>
+              <a:ext uri="{FF2B5EF4-FFF2-40B4-BE49-F238E27FC236}">
+                <a16:creationId xmlns:a16="http://schemas.microsoft.com/office/drawing/2014/main" id="{824B4D05-F836-6D0B-8F82-B5DB06AEE3B2}"/>
+              </a:ext>
+            </a:extLst>
+          </p:cNvPr>
+          <p:cNvSpPr>
+            <a:spLocks noGrp="1"/>
+          </p:cNvSpPr>
+          <p:nvPr>
+            <p:ph type="body" idx="1"/>
+          </p:nvPr>
+        </p:nvSpPr>
+        <p:spPr/>
+        <p:txBody>
+          <a:bodyPr/>
+          <a:lstStyle/>
+          <a:p>
+            <a:endParaRPr lang="en-US" dirty="0"/>
+          </a:p>
+        </p:txBody>
+      </p:sp>
+      <p:sp>
+        <p:nvSpPr>
+          <p:cNvPr id="4" name="Slide Number Placeholder 3">
+            <a:extLst>
+              <a:ext uri="{FF2B5EF4-FFF2-40B4-BE49-F238E27FC236}">
+                <a16:creationId xmlns:a16="http://schemas.microsoft.com/office/drawing/2014/main" id="{7E8E3C20-E036-4855-1475-8AAEAEC47B07}"/>
+              </a:ext>
+            </a:extLst>
+          </p:cNvPr>
+          <p:cNvSpPr>
+            <a:spLocks noGrp="1"/>
+          </p:cNvSpPr>
+          <p:nvPr>
+            <p:ph type="sldNum" sz="quarter" idx="5"/>
+          </p:nvPr>
+        </p:nvSpPr>
+        <p:spPr/>
+        <p:txBody>
+          <a:bodyPr/>
+          <a:lstStyle/>
+          <a:p>
+            <a:fld id="{FE6BB31A-1568-4CD1-BE99-39BCCBA8C34E}" type="slidenum">
+              <a:rPr lang="en-US" smtClean="0"/>
+              <a:t>2</a:t>
+            </a:fld>
+            <a:endParaRPr lang="en-US"/>
+          </a:p>
+        </p:txBody>
+      </p:sp>
+    </p:spTree>
+    <p:extLst>
+      <p:ext uri="{BB962C8B-B14F-4D97-AF65-F5344CB8AC3E}">
+        <p14:creationId xmlns:p14="http://schemas.microsoft.com/office/powerpoint/2010/main" val="2056966165"/>
+      </p:ext>
+    </p:extLst>
+  </p:cSld>
+  <p:clrMapOvr>
+    <a:masterClrMapping/>
+  </p:clrMapOvr>
+</p:notes>
+</file>
+
+<file path=ppt/notesSlides/notesSlide3.xml><?xml version="1.0" encoding="utf-8"?>
+<p:notes xmlns:a="http://schemas.openxmlformats.org/drawingml/2006/main" xmlns:r="http://schemas.openxmlformats.org/officeDocument/2006/relationships" xmlns:p="http://schemas.openxmlformats.org/presentationml/2006/main">
+  <p:cSld>
+    <p:spTree>
+      <p:nvGrpSpPr>
         <p:cNvPr id="1" name=""/>
         <p:cNvGrpSpPr/>
         <p:nvPr/>
@@ -1594,7 +1703,7 @@
           <a:p>
             <a:fld id="{FE6BB31A-1568-4CD1-BE99-39BCCBA8C34E}" type="slidenum">
               <a:rPr lang="en-US" smtClean="0"/>
-              <a:t>2</a:t>
+              <a:t>3</a:t>
             </a:fld>
             <a:endParaRPr lang="en-US"/>
           </a:p>
@@ -1760,7 +1869,7 @@
           <a:p>
             <a:fld id="{04277E52-7FB3-4160-B2FF-FC214D695529}" type="datetimeFigureOut">
               <a:rPr lang="en-US" smtClean="0"/>
-              <a:t>7/8/2026</a:t>
+              <a:t>7/27/2026</a:t>
             </a:fld>
             <a:endParaRPr lang="en-US"/>
           </a:p>
@@ -1958,7 +2067,7 @@
           <a:p>
             <a:fld id="{04277E52-7FB3-4160-B2FF-FC214D695529}" type="datetimeFigureOut">
               <a:rPr lang="en-US" smtClean="0"/>
-              <a:t>7/8/2026</a:t>
+              <a:t>7/27/2026</a:t>
             </a:fld>
             <a:endParaRPr lang="en-US"/>
           </a:p>
@@ -2166,7 +2275,7 @@
           <a:p>
             <a:fld id="{04277E52-7FB3-4160-B2FF-FC214D695529}" type="datetimeFigureOut">
               <a:rPr lang="en-US" smtClean="0"/>
-              <a:t>7/8/2026</a:t>
+              <a:t>7/27/2026</a:t>
             </a:fld>
             <a:endParaRPr lang="en-US"/>
           </a:p>
@@ -2364,7 +2473,7 @@
           <a:p>
             <a:fld id="{04277E52-7FB3-4160-B2FF-FC214D695529}" type="datetimeFigureOut">
               <a:rPr lang="en-US" smtClean="0"/>
-              <a:t>7/8/2026</a:t>
+              <a:t>7/27/2026</a:t>
             </a:fld>
             <a:endParaRPr lang="en-US"/>
           </a:p>
@@ -2639,7 +2748,7 @@
           <a:p>
             <a:fld id="{04277E52-7FB3-4160-B2FF-FC214D695529}" type="datetimeFigureOut">
               <a:rPr lang="en-US" smtClean="0"/>
-              <a:t>7/8/2026</a:t>
+              <a:t>7/27/2026</a:t>
             </a:fld>
             <a:endParaRPr lang="en-US"/>
           </a:p>
@@ -2904,7 +3013,7 @@
           <a:p>
             <a:fld id="{04277E52-7FB3-4160-B2FF-FC214D695529}" type="datetimeFigureOut">
               <a:rPr lang="en-US" smtClean="0"/>
-              <a:t>7/8/2026</a:t>
+              <a:t>7/27/2026</a:t>
             </a:fld>
             <a:endParaRPr lang="en-US"/>
           </a:p>
@@ -3316,7 +3425,7 @@
           <a:p>
             <a:fld id="{04277E52-7FB3-4160-B2FF-FC214D695529}" type="datetimeFigureOut">
               <a:rPr lang="en-US" smtClean="0"/>
-              <a:t>7/8/2026</a:t>
+              <a:t>7/27/2026</a:t>
             </a:fld>
             <a:endParaRPr lang="en-US"/>
           </a:p>
@@ -3457,7 +3566,7 @@
           <a:p>
             <a:fld id="{04277E52-7FB3-4160-B2FF-FC214D695529}" type="datetimeFigureOut">
               <a:rPr lang="en-US" smtClean="0"/>
-              <a:t>7/8/2026</a:t>
+              <a:t>7/27/2026</a:t>
             </a:fld>
             <a:endParaRPr lang="en-US"/>
           </a:p>
@@ -3570,7 +3679,7 @@
           <a:p>
             <a:fld id="{04277E52-7FB3-4160-B2FF-FC214D695529}" type="datetimeFigureOut">
               <a:rPr lang="en-US" smtClean="0"/>
-              <a:t>7/8/2026</a:t>
+              <a:t>7/27/2026</a:t>
             </a:fld>
             <a:endParaRPr lang="en-US"/>
           </a:p>
@@ -3881,7 +3990,7 @@
           <a:p>
             <a:fld id="{04277E52-7FB3-4160-B2FF-FC214D695529}" type="datetimeFigureOut">
               <a:rPr lang="en-US" smtClean="0"/>
-              <a:t>7/8/2026</a:t>
+              <a:t>7/27/2026</a:t>
             </a:fld>
             <a:endParaRPr lang="en-US"/>
           </a:p>
@@ -4169,7 +4278,7 @@
           <a:p>
             <a:fld id="{04277E52-7FB3-4160-B2FF-FC214D695529}" type="datetimeFigureOut">
               <a:rPr lang="en-US" smtClean="0"/>
-              <a:t>7/8/2026</a:t>
+              <a:t>7/27/2026</a:t>
             </a:fld>
             <a:endParaRPr lang="en-US"/>
           </a:p>
@@ -4410,7 +4519,7 @@
           <a:p>
             <a:fld id="{04277E52-7FB3-4160-B2FF-FC214D695529}" type="datetimeFigureOut">
               <a:rPr lang="en-US" smtClean="0"/>
-              <a:t>7/8/2026</a:t>
+              <a:t>7/27/2026</a:t>
             </a:fld>
             <a:endParaRPr lang="en-US"/>
           </a:p>
@@ -5168,7 +5277,7 @@
                 <a:lstStyle/>
                 <a:p>
                   <a:pPr algn="ctr"/>
-                  <a:endParaRPr lang="zh-CN" altLang="en-US">
+                  <a:endParaRPr lang="zh-CN" altLang="en-US" dirty="0">
                     <a:solidFill>
                       <a:srgbClr val="47A2DE"/>
                     </a:solidFill>
@@ -5678,8 +5787,8 @@
                   <a:chExt cx="4045980" cy="4003182"/>
                 </a:xfrm>
               </p:grpSpPr>
-              <mc:AlternateContent xmlns:mc="http://schemas.openxmlformats.org/markup-compatibility/2006">
-                <mc:Choice xmlns:a14="http://schemas.microsoft.com/office/drawing/2010/main" Requires="a14">
+              <mc:AlternateContent xmlns:mc="http://schemas.openxmlformats.org/markup-compatibility/2006" xmlns:a14="http://schemas.microsoft.com/office/drawing/2010/main">
+                <mc:Choice Requires="a14">
                   <p:sp>
                     <p:nvSpPr>
                       <p:cNvPr id="15" name="文本框 14">
@@ -5735,7 +5844,7 @@
                     </p:txBody>
                   </p:sp>
                 </mc:Choice>
-                <mc:Fallback>
+                <mc:Fallback xmlns="">
                   <p:sp>
                     <p:nvSpPr>
                       <p:cNvPr id="15" name="文本框 14">
@@ -6326,8 +6435,8 @@
                   </p:sp>
                 </mc:Fallback>
               </mc:AlternateContent>
-              <mc:AlternateContent xmlns:mc="http://schemas.openxmlformats.org/markup-compatibility/2006">
-                <mc:Choice xmlns:a14="http://schemas.microsoft.com/office/drawing/2010/main" Requires="a14">
+              <mc:AlternateContent xmlns:mc="http://schemas.openxmlformats.org/markup-compatibility/2006" xmlns:a14="http://schemas.microsoft.com/office/drawing/2010/main">
+                <mc:Choice Requires="a14">
                   <p:sp>
                     <p:nvSpPr>
                       <p:cNvPr id="28" name="文本框 21">
@@ -6403,7 +6512,7 @@
                     </p:txBody>
                   </p:sp>
                 </mc:Choice>
-                <mc:Fallback>
+                <mc:Fallback xmlns="">
                   <p:sp>
                     <p:nvSpPr>
                       <p:cNvPr id="28" name="文本框 21">
@@ -7195,10 +7304,10 @@
               <p:nvPr/>
             </p:nvPicPr>
             <p:blipFill>
-              <a:blip r:embed="rId10">
+              <a:blip>
                 <a:extLst>
                   <a:ext uri="{96DAC541-7B7A-43D3-8B79-37D633B846F1}">
-                    <asvg:svgBlip xmlns:asvg="http://schemas.microsoft.com/office/drawing/2016/SVG/main" r:embed="rId11"/>
+                    <asvg:svgBlip xmlns:asvg="http://schemas.microsoft.com/office/drawing/2016/SVG/main" r:embed="rId10"/>
                   </a:ext>
                 </a:extLst>
               </a:blip>
@@ -7521,8 +7630,8 @@
                   <a:chExt cx="4058675" cy="4003182"/>
                 </a:xfrm>
               </p:grpSpPr>
-              <mc:AlternateContent xmlns:mc="http://schemas.openxmlformats.org/markup-compatibility/2006">
-                <mc:Choice xmlns:a14="http://schemas.microsoft.com/office/drawing/2010/main" Requires="a14">
+              <mc:AlternateContent xmlns:mc="http://schemas.openxmlformats.org/markup-compatibility/2006" xmlns:a14="http://schemas.microsoft.com/office/drawing/2010/main">
+                <mc:Choice Requires="a14">
                   <p:sp>
                     <p:nvSpPr>
                       <p:cNvPr id="250" name="文本框 14">
@@ -7578,7 +7687,7 @@
                     </p:txBody>
                   </p:sp>
                 </mc:Choice>
-                <mc:Fallback>
+                <mc:Fallback xmlns="">
                   <p:sp>
                     <p:nvSpPr>
                       <p:cNvPr id="250" name="文本框 14">
@@ -8169,8 +8278,8 @@
                   </p:sp>
                 </mc:Fallback>
               </mc:AlternateContent>
-              <mc:AlternateContent xmlns:mc="http://schemas.openxmlformats.org/markup-compatibility/2006">
-                <mc:Choice xmlns:a14="http://schemas.microsoft.com/office/drawing/2010/main" Requires="a14">
+              <mc:AlternateContent xmlns:mc="http://schemas.openxmlformats.org/markup-compatibility/2006" xmlns:a14="http://schemas.microsoft.com/office/drawing/2010/main">
+                <mc:Choice Requires="a14">
                   <p:sp>
                     <p:nvSpPr>
                       <p:cNvPr id="256" name="文本框 21">
@@ -8246,7 +8355,7 @@
                     </p:txBody>
                   </p:sp>
                 </mc:Choice>
-                <mc:Fallback>
+                <mc:Fallback xmlns="">
                   <p:sp>
                     <p:nvSpPr>
                       <p:cNvPr id="256" name="文本框 21">
@@ -9080,10 +9189,10 @@
               <p:nvPr/>
             </p:nvPicPr>
             <p:blipFill>
-              <a:blip r:embed="rId19">
+              <a:blip>
                 <a:extLst>
                   <a:ext uri="{96DAC541-7B7A-43D3-8B79-37D633B846F1}">
-                    <asvg:svgBlip xmlns:asvg="http://schemas.microsoft.com/office/drawing/2016/SVG/main" r:embed="rId20"/>
+                    <asvg:svgBlip xmlns:asvg="http://schemas.microsoft.com/office/drawing/2016/SVG/main" r:embed="rId19"/>
                   </a:ext>
                 </a:extLst>
               </a:blip>
@@ -9406,8 +9515,8 @@
                   <a:chExt cx="4134064" cy="4003182"/>
                 </a:xfrm>
               </p:grpSpPr>
-              <mc:AlternateContent xmlns:mc="http://schemas.openxmlformats.org/markup-compatibility/2006">
-                <mc:Choice xmlns:a14="http://schemas.microsoft.com/office/drawing/2010/main" Requires="a14">
+              <mc:AlternateContent xmlns:mc="http://schemas.openxmlformats.org/markup-compatibility/2006" xmlns:a14="http://schemas.microsoft.com/office/drawing/2010/main">
+                <mc:Choice Requires="a14">
                   <p:sp>
                     <p:nvSpPr>
                       <p:cNvPr id="281" name="文本框 14">
@@ -9463,7 +9572,7 @@
                     </p:txBody>
                   </p:sp>
                 </mc:Choice>
-                <mc:Fallback>
+                <mc:Fallback xmlns="">
                   <p:sp>
                     <p:nvSpPr>
                       <p:cNvPr id="281" name="文本框 14">
@@ -10054,8 +10163,8 @@
                   </p:sp>
                 </mc:Fallback>
               </mc:AlternateContent>
-              <mc:AlternateContent xmlns:mc="http://schemas.openxmlformats.org/markup-compatibility/2006">
-                <mc:Choice xmlns:a14="http://schemas.microsoft.com/office/drawing/2010/main" Requires="a14">
+              <mc:AlternateContent xmlns:mc="http://schemas.openxmlformats.org/markup-compatibility/2006" xmlns:a14="http://schemas.microsoft.com/office/drawing/2010/main">
+                <mc:Choice Requires="a14">
                   <p:sp>
                     <p:nvSpPr>
                       <p:cNvPr id="287" name="文本框 21">
@@ -10131,7 +10240,7 @@
                     </p:txBody>
                   </p:sp>
                 </mc:Choice>
-                <mc:Fallback>
+                <mc:Fallback xmlns="">
                   <p:sp>
                     <p:nvSpPr>
                       <p:cNvPr id="287" name="文本框 21">
@@ -10965,10 +11074,10 @@
               <p:nvPr/>
             </p:nvPicPr>
             <p:blipFill>
-              <a:blip r:embed="rId28">
+              <a:blip>
                 <a:extLst>
                   <a:ext uri="{96DAC541-7B7A-43D3-8B79-37D633B846F1}">
-                    <asvg:svgBlip xmlns:asvg="http://schemas.microsoft.com/office/drawing/2016/SVG/main" r:embed="rId29"/>
+                    <asvg:svgBlip xmlns:asvg="http://schemas.microsoft.com/office/drawing/2016/SVG/main" r:embed="rId28"/>
                   </a:ext>
                 </a:extLst>
               </a:blip>
@@ -11002,6 +11111,6164 @@
 </file>
 
 <file path=ppt/slides/slide2.xml><?xml version="1.0" encoding="utf-8"?>
+<p:sld xmlns:a="http://schemas.openxmlformats.org/drawingml/2006/main" xmlns:r="http://schemas.openxmlformats.org/officeDocument/2006/relationships" xmlns:p="http://schemas.openxmlformats.org/presentationml/2006/main">
+  <p:cSld>
+    <p:spTree>
+      <p:nvGrpSpPr>
+        <p:cNvPr id="1" name="">
+          <a:extLst>
+            <a:ext uri="{FF2B5EF4-FFF2-40B4-BE49-F238E27FC236}">
+              <a16:creationId xmlns:a16="http://schemas.microsoft.com/office/drawing/2014/main" id="{AECAD0BC-F5C5-1587-B2E4-EBE8AF124A5B}"/>
+            </a:ext>
+          </a:extLst>
+        </p:cNvPr>
+        <p:cNvGrpSpPr/>
+        <p:nvPr/>
+      </p:nvGrpSpPr>
+      <p:grpSpPr>
+        <a:xfrm>
+          <a:off x="0" y="0"/>
+          <a:ext cx="0" cy="0"/>
+          <a:chOff x="0" y="0"/>
+          <a:chExt cx="0" cy="0"/>
+        </a:xfrm>
+      </p:grpSpPr>
+      <p:grpSp>
+        <p:nvGrpSpPr>
+          <p:cNvPr id="48" name="Group 47">
+            <a:extLst>
+              <a:ext uri="{FF2B5EF4-FFF2-40B4-BE49-F238E27FC236}">
+                <a16:creationId xmlns:a16="http://schemas.microsoft.com/office/drawing/2014/main" id="{B34E9A42-51C4-E3CD-0371-3AE0CEAF12C3}"/>
+              </a:ext>
+            </a:extLst>
+          </p:cNvPr>
+          <p:cNvGrpSpPr/>
+          <p:nvPr/>
+        </p:nvGrpSpPr>
+        <p:grpSpPr>
+          <a:xfrm>
+            <a:off x="114954" y="798266"/>
+            <a:ext cx="12176969" cy="5131313"/>
+            <a:chOff x="114954" y="798266"/>
+            <a:chExt cx="12176969" cy="5131313"/>
+          </a:xfrm>
+        </p:grpSpPr>
+        <p:sp>
+          <p:nvSpPr>
+            <p:cNvPr id="101" name="文本框 27">
+              <a:extLst>
+                <a:ext uri="{FF2B5EF4-FFF2-40B4-BE49-F238E27FC236}">
+                  <a16:creationId xmlns:a16="http://schemas.microsoft.com/office/drawing/2014/main" id="{96665002-DDDC-124B-8FCA-4DAA7625FB8B}"/>
+                </a:ext>
+              </a:extLst>
+            </p:cNvPr>
+            <p:cNvSpPr txBox="1"/>
+            <p:nvPr/>
+          </p:nvSpPr>
+          <p:spPr>
+            <a:xfrm>
+              <a:off x="4909664" y="5560247"/>
+              <a:ext cx="1144471" cy="369332"/>
+            </a:xfrm>
+            <a:prstGeom prst="rect">
+              <a:avLst/>
+            </a:prstGeom>
+            <a:noFill/>
+          </p:spPr>
+          <p:txBody>
+            <a:bodyPr wrap="square" rtlCol="0" anchor="t">
+              <a:spAutoFit/>
+            </a:bodyPr>
+            <a:lstStyle/>
+            <a:p>
+              <a:pPr algn="ctr"/>
+              <a:r>
+                <a:rPr lang="en-US" altLang="zh-CN" dirty="0">
+                  <a:latin typeface="Arial" panose="020B0604020202020204" pitchFamily="34" charset="0"/>
+                  <a:cs typeface="Arial" panose="020B0604020202020204" pitchFamily="34" charset="0"/>
+                  <a:sym typeface="+mn-ea"/>
+                </a:rPr>
+                <a:t>2016</a:t>
+              </a:r>
+            </a:p>
+          </p:txBody>
+        </p:sp>
+        <p:grpSp>
+          <p:nvGrpSpPr>
+            <p:cNvPr id="102" name="组合 30">
+              <a:extLst>
+                <a:ext uri="{FF2B5EF4-FFF2-40B4-BE49-F238E27FC236}">
+                  <a16:creationId xmlns:a16="http://schemas.microsoft.com/office/drawing/2014/main" id="{BED3DF58-69A6-FD34-B9C8-6EB7BADC956B}"/>
+                </a:ext>
+              </a:extLst>
+            </p:cNvPr>
+            <p:cNvGrpSpPr/>
+            <p:nvPr/>
+          </p:nvGrpSpPr>
+          <p:grpSpPr>
+            <a:xfrm>
+              <a:off x="6096000" y="5608298"/>
+              <a:ext cx="1364859" cy="273229"/>
+              <a:chOff x="6153" y="11442"/>
+              <a:chExt cx="1740" cy="348"/>
+            </a:xfrm>
+          </p:grpSpPr>
+          <p:sp>
+            <p:nvSpPr>
+              <p:cNvPr id="103" name="圆角矩形 3">
+                <a:extLst>
+                  <a:ext uri="{FF2B5EF4-FFF2-40B4-BE49-F238E27FC236}">
+                    <a16:creationId xmlns:a16="http://schemas.microsoft.com/office/drawing/2014/main" id="{5876AF4A-4658-20F3-9716-095918D152A6}"/>
+                  </a:ext>
+                </a:extLst>
+              </p:cNvPr>
+              <p:cNvSpPr/>
+              <p:nvPr/>
+            </p:nvSpPr>
+            <p:spPr>
+              <a:xfrm>
+                <a:off x="6153" y="11442"/>
+                <a:ext cx="536" cy="348"/>
+              </a:xfrm>
+              <a:prstGeom prst="roundRect">
+                <a:avLst/>
+              </a:prstGeom>
+              <a:solidFill>
+                <a:srgbClr val="E85748">
+                  <a:alpha val="70000"/>
+                </a:srgbClr>
+              </a:solidFill>
+              <a:ln w="19050">
+                <a:noFill/>
+              </a:ln>
+            </p:spPr>
+            <p:style>
+              <a:lnRef idx="2">
+                <a:schemeClr val="accent1">
+                  <a:lumMod val="75000"/>
+                </a:schemeClr>
+              </a:lnRef>
+              <a:fillRef idx="1">
+                <a:schemeClr val="accent1"/>
+              </a:fillRef>
+              <a:effectRef idx="0">
+                <a:srgbClr val="FFFFFF"/>
+              </a:effectRef>
+              <a:fontRef idx="minor">
+                <a:schemeClr val="lt1"/>
+              </a:fontRef>
+            </p:style>
+            <p:txBody>
+              <a:bodyPr rtlCol="0" anchor="ctr"/>
+              <a:lstStyle/>
+              <a:p>
+                <a:pPr algn="ctr"/>
+                <a:endParaRPr lang="zh-CN" altLang="en-US">
+                  <a:latin typeface="Arial" panose="020B0604020202020204" pitchFamily="34" charset="0"/>
+                  <a:cs typeface="Arial" panose="020B0604020202020204" pitchFamily="34" charset="0"/>
+                </a:endParaRPr>
+              </a:p>
+            </p:txBody>
+          </p:sp>
+          <p:sp>
+            <p:nvSpPr>
+              <p:cNvPr id="104" name="圆角矩形 28">
+                <a:extLst>
+                  <a:ext uri="{FF2B5EF4-FFF2-40B4-BE49-F238E27FC236}">
+                    <a16:creationId xmlns:a16="http://schemas.microsoft.com/office/drawing/2014/main" id="{805E8EE4-4733-A5C8-99C9-A1EFA01062BC}"/>
+                  </a:ext>
+                </a:extLst>
+              </p:cNvPr>
+              <p:cNvSpPr/>
+              <p:nvPr/>
+            </p:nvSpPr>
+            <p:spPr>
+              <a:xfrm>
+                <a:off x="6761" y="11442"/>
+                <a:ext cx="530" cy="338"/>
+              </a:xfrm>
+              <a:prstGeom prst="roundRect">
+                <a:avLst/>
+              </a:prstGeom>
+              <a:solidFill>
+                <a:srgbClr val="F39F1B">
+                  <a:alpha val="70000"/>
+                </a:srgbClr>
+              </a:solidFill>
+              <a:ln w="19050">
+                <a:noFill/>
+              </a:ln>
+            </p:spPr>
+            <p:style>
+              <a:lnRef idx="2">
+                <a:schemeClr val="accent1">
+                  <a:lumMod val="75000"/>
+                </a:schemeClr>
+              </a:lnRef>
+              <a:fillRef idx="1">
+                <a:schemeClr val="accent1"/>
+              </a:fillRef>
+              <a:effectRef idx="0">
+                <a:srgbClr val="FFFFFF"/>
+              </a:effectRef>
+              <a:fontRef idx="minor">
+                <a:schemeClr val="lt1"/>
+              </a:fontRef>
+            </p:style>
+            <p:txBody>
+              <a:bodyPr rtlCol="0" anchor="ctr"/>
+              <a:lstStyle/>
+              <a:p>
+                <a:pPr algn="ctr"/>
+                <a:endParaRPr lang="zh-CN" altLang="en-US">
+                  <a:latin typeface="Arial" panose="020B0604020202020204" pitchFamily="34" charset="0"/>
+                  <a:cs typeface="Arial" panose="020B0604020202020204" pitchFamily="34" charset="0"/>
+                </a:endParaRPr>
+              </a:p>
+            </p:txBody>
+          </p:sp>
+          <p:sp>
+            <p:nvSpPr>
+              <p:cNvPr id="105" name="圆角矩形 29">
+                <a:extLst>
+                  <a:ext uri="{FF2B5EF4-FFF2-40B4-BE49-F238E27FC236}">
+                    <a16:creationId xmlns:a16="http://schemas.microsoft.com/office/drawing/2014/main" id="{9C85905E-9EF6-7AF4-3668-32F7EED5800F}"/>
+                  </a:ext>
+                </a:extLst>
+              </p:cNvPr>
+              <p:cNvSpPr/>
+              <p:nvPr/>
+            </p:nvSpPr>
+            <p:spPr>
+              <a:xfrm>
+                <a:off x="7363" y="11442"/>
+                <a:ext cx="530" cy="338"/>
+              </a:xfrm>
+              <a:prstGeom prst="roundRect">
+                <a:avLst/>
+              </a:prstGeom>
+              <a:solidFill>
+                <a:srgbClr val="47A2DE">
+                  <a:alpha val="70000"/>
+                </a:srgbClr>
+              </a:solidFill>
+              <a:ln w="19050">
+                <a:noFill/>
+              </a:ln>
+            </p:spPr>
+            <p:style>
+              <a:lnRef idx="2">
+                <a:schemeClr val="accent1">
+                  <a:lumMod val="75000"/>
+                </a:schemeClr>
+              </a:lnRef>
+              <a:fillRef idx="1">
+                <a:schemeClr val="accent1"/>
+              </a:fillRef>
+              <a:effectRef idx="0">
+                <a:srgbClr val="FFFFFF"/>
+              </a:effectRef>
+              <a:fontRef idx="minor">
+                <a:schemeClr val="lt1"/>
+              </a:fontRef>
+            </p:style>
+            <p:txBody>
+              <a:bodyPr rtlCol="0" anchor="ctr"/>
+              <a:lstStyle/>
+              <a:p>
+                <a:pPr algn="ctr"/>
+                <a:endParaRPr lang="zh-CN" altLang="en-US">
+                  <a:latin typeface="Arial" panose="020B0604020202020204" pitchFamily="34" charset="0"/>
+                  <a:cs typeface="Arial" panose="020B0604020202020204" pitchFamily="34" charset="0"/>
+                </a:endParaRPr>
+              </a:p>
+            </p:txBody>
+          </p:sp>
+        </p:grpSp>
+        <p:sp>
+          <p:nvSpPr>
+            <p:cNvPr id="110" name="文本框 45">
+              <a:extLst>
+                <a:ext uri="{FF2B5EF4-FFF2-40B4-BE49-F238E27FC236}">
+                  <a16:creationId xmlns:a16="http://schemas.microsoft.com/office/drawing/2014/main" id="{53ECE674-9E1F-52DA-8C66-39522EC5F5F8}"/>
+                </a:ext>
+              </a:extLst>
+            </p:cNvPr>
+            <p:cNvSpPr txBox="1"/>
+            <p:nvPr/>
+          </p:nvSpPr>
+          <p:spPr>
+            <a:xfrm>
+              <a:off x="7252992" y="5542976"/>
+              <a:ext cx="1144471" cy="369332"/>
+            </a:xfrm>
+            <a:prstGeom prst="rect">
+              <a:avLst/>
+            </a:prstGeom>
+            <a:noFill/>
+          </p:spPr>
+          <p:txBody>
+            <a:bodyPr wrap="square" rtlCol="0" anchor="t">
+              <a:spAutoFit/>
+            </a:bodyPr>
+            <a:lstStyle/>
+            <a:p>
+              <a:pPr algn="ctr"/>
+              <a:r>
+                <a:rPr lang="en-US" altLang="zh-CN" dirty="0">
+                  <a:latin typeface="Arial" panose="020B0604020202020204" pitchFamily="34" charset="0"/>
+                  <a:cs typeface="Arial" panose="020B0604020202020204" pitchFamily="34" charset="0"/>
+                  <a:sym typeface="+mn-ea"/>
+                </a:rPr>
+                <a:t>2023</a:t>
+              </a:r>
+            </a:p>
+          </p:txBody>
+        </p:sp>
+        <p:grpSp>
+          <p:nvGrpSpPr>
+            <p:cNvPr id="289" name="Group 288">
+              <a:extLst>
+                <a:ext uri="{FF2B5EF4-FFF2-40B4-BE49-F238E27FC236}">
+                  <a16:creationId xmlns:a16="http://schemas.microsoft.com/office/drawing/2014/main" id="{FA2F9C86-C4E4-C926-5F64-23E03A774113}"/>
+                </a:ext>
+              </a:extLst>
+            </p:cNvPr>
+            <p:cNvGrpSpPr/>
+            <p:nvPr/>
+          </p:nvGrpSpPr>
+          <p:grpSpPr>
+            <a:xfrm>
+              <a:off x="114954" y="798266"/>
+              <a:ext cx="4007289" cy="4565994"/>
+              <a:chOff x="-114026" y="798266"/>
+              <a:chExt cx="4007289" cy="4565994"/>
+            </a:xfrm>
+          </p:grpSpPr>
+          <p:sp>
+            <p:nvSpPr>
+              <p:cNvPr id="96" name="文本框 24">
+                <a:extLst>
+                  <a:ext uri="{FF2B5EF4-FFF2-40B4-BE49-F238E27FC236}">
+                    <a16:creationId xmlns:a16="http://schemas.microsoft.com/office/drawing/2014/main" id="{FDCD2A94-6004-AE66-1330-1BC3085B6781}"/>
+                  </a:ext>
+                </a:extLst>
+              </p:cNvPr>
+              <p:cNvSpPr txBox="1"/>
+              <p:nvPr/>
+            </p:nvSpPr>
+            <p:spPr>
+              <a:xfrm>
+                <a:off x="1074900" y="798266"/>
+                <a:ext cx="1593367" cy="461665"/>
+              </a:xfrm>
+              <a:prstGeom prst="rect">
+                <a:avLst/>
+              </a:prstGeom>
+              <a:noFill/>
+            </p:spPr>
+            <p:txBody>
+              <a:bodyPr wrap="square" rtlCol="0">
+                <a:spAutoFit/>
+              </a:bodyPr>
+              <a:lstStyle/>
+              <a:p>
+                <a:pPr algn="ctr"/>
+                <a:r>
+                  <a:rPr lang="en-US" altLang="zh-CN" sz="2400" b="1" dirty="0">
+                    <a:solidFill>
+                      <a:srgbClr val="E85748"/>
+                    </a:solidFill>
+                    <a:latin typeface="Arial" panose="020B0604020202020204" pitchFamily="34" charset="0"/>
+                    <a:cs typeface="Arial" panose="020B0604020202020204" pitchFamily="34" charset="0"/>
+                  </a:rPr>
+                  <a:t>Africa</a:t>
+                </a:r>
+              </a:p>
+            </p:txBody>
+          </p:sp>
+          <p:grpSp>
+            <p:nvGrpSpPr>
+              <p:cNvPr id="144" name="Group 143">
+                <a:extLst>
+                  <a:ext uri="{FF2B5EF4-FFF2-40B4-BE49-F238E27FC236}">
+                    <a16:creationId xmlns:a16="http://schemas.microsoft.com/office/drawing/2014/main" id="{BDE16FD9-FE30-5EE9-21C1-1990787A3148}"/>
+                  </a:ext>
+                </a:extLst>
+              </p:cNvPr>
+              <p:cNvGrpSpPr/>
+              <p:nvPr/>
+            </p:nvGrpSpPr>
+            <p:grpSpPr>
+              <a:xfrm>
+                <a:off x="-114026" y="1336717"/>
+                <a:ext cx="4007289" cy="4027543"/>
+                <a:chOff x="445723" y="1232543"/>
+                <a:chExt cx="4007289" cy="4027543"/>
+              </a:xfrm>
+            </p:grpSpPr>
+            <p:sp>
+              <p:nvSpPr>
+                <p:cNvPr id="8" name="Partial Circle 7">
+                  <a:extLst>
+                    <a:ext uri="{FF2B5EF4-FFF2-40B4-BE49-F238E27FC236}">
+                      <a16:creationId xmlns:a16="http://schemas.microsoft.com/office/drawing/2014/main" id="{14C26656-FB5B-6D11-C1A2-78A763A2F593}"/>
+                    </a:ext>
+                  </a:extLst>
+                </p:cNvPr>
+                <p:cNvSpPr/>
+                <p:nvPr/>
+              </p:nvSpPr>
+              <p:spPr>
+                <a:xfrm>
+                  <a:off x="613962" y="1368091"/>
+                  <a:ext cx="3657600" cy="3657600"/>
+                </a:xfrm>
+                <a:prstGeom prst="pie">
+                  <a:avLst>
+                    <a:gd name="adj1" fmla="val 17242230"/>
+                    <a:gd name="adj2" fmla="val 21313"/>
+                  </a:avLst>
+                </a:prstGeom>
+                <a:solidFill>
+                  <a:srgbClr val="A79ADF">
+                    <a:alpha val="50000"/>
+                  </a:srgbClr>
+                </a:solidFill>
+                <a:ln>
+                  <a:noFill/>
+                </a:ln>
+              </p:spPr>
+              <p:style>
+                <a:lnRef idx="2">
+                  <a:schemeClr val="accent1">
+                    <a:shade val="15000"/>
+                  </a:schemeClr>
+                </a:lnRef>
+                <a:fillRef idx="1">
+                  <a:schemeClr val="accent1"/>
+                </a:fillRef>
+                <a:effectRef idx="0">
+                  <a:schemeClr val="accent1"/>
+                </a:effectRef>
+                <a:fontRef idx="minor">
+                  <a:schemeClr val="lt1"/>
+                </a:fontRef>
+              </p:style>
+              <p:txBody>
+                <a:bodyPr rtlCol="0" anchor="ctr"/>
+                <a:lstStyle/>
+                <a:p>
+                  <a:pPr algn="ctr"/>
+                  <a:endParaRPr lang="en-US">
+                    <a:solidFill>
+                      <a:schemeClr val="tx1"/>
+                    </a:solidFill>
+                  </a:endParaRPr>
+                </a:p>
+              </p:txBody>
+            </p:sp>
+            <p:sp>
+              <p:nvSpPr>
+                <p:cNvPr id="55" name="Partial Circle 54">
+                  <a:extLst>
+                    <a:ext uri="{FF2B5EF4-FFF2-40B4-BE49-F238E27FC236}">
+                      <a16:creationId xmlns:a16="http://schemas.microsoft.com/office/drawing/2014/main" id="{ACDA55E6-7118-F129-5760-E0E5C57C4E4C}"/>
+                    </a:ext>
+                  </a:extLst>
+                </p:cNvPr>
+                <p:cNvSpPr/>
+                <p:nvPr/>
+              </p:nvSpPr>
+              <p:spPr>
+                <a:xfrm>
+                  <a:off x="602759" y="1369023"/>
+                  <a:ext cx="3657600" cy="3657600"/>
+                </a:xfrm>
+                <a:prstGeom prst="pie">
+                  <a:avLst>
+                    <a:gd name="adj1" fmla="val 10761800"/>
+                    <a:gd name="adj2" fmla="val 15143024"/>
+                  </a:avLst>
+                </a:prstGeom>
+                <a:solidFill>
+                  <a:srgbClr val="B0DF9A">
+                    <a:alpha val="50000"/>
+                  </a:srgbClr>
+                </a:solidFill>
+                <a:ln>
+                  <a:noFill/>
+                </a:ln>
+              </p:spPr>
+              <p:style>
+                <a:lnRef idx="2">
+                  <a:schemeClr val="accent1">
+                    <a:shade val="15000"/>
+                  </a:schemeClr>
+                </a:lnRef>
+                <a:fillRef idx="1">
+                  <a:schemeClr val="accent1"/>
+                </a:fillRef>
+                <a:effectRef idx="0">
+                  <a:schemeClr val="accent1"/>
+                </a:effectRef>
+                <a:fontRef idx="minor">
+                  <a:schemeClr val="lt1"/>
+                </a:fontRef>
+              </p:style>
+              <p:txBody>
+                <a:bodyPr rtlCol="0" anchor="ctr"/>
+                <a:lstStyle/>
+                <a:p>
+                  <a:pPr algn="ctr"/>
+                  <a:endParaRPr lang="en-US">
+                    <a:solidFill>
+                      <a:schemeClr val="tx1"/>
+                    </a:solidFill>
+                  </a:endParaRPr>
+                </a:p>
+              </p:txBody>
+            </p:sp>
+            <p:sp>
+              <p:nvSpPr>
+                <p:cNvPr id="53" name="Partial Circle 52">
+                  <a:extLst>
+                    <a:ext uri="{FF2B5EF4-FFF2-40B4-BE49-F238E27FC236}">
+                      <a16:creationId xmlns:a16="http://schemas.microsoft.com/office/drawing/2014/main" id="{21FF4069-BEFA-BDE8-8248-9D06FA3B2674}"/>
+                    </a:ext>
+                  </a:extLst>
+                </p:cNvPr>
+                <p:cNvSpPr/>
+                <p:nvPr/>
+              </p:nvSpPr>
+              <p:spPr>
+                <a:xfrm>
+                  <a:off x="826871" y="1601122"/>
+                  <a:ext cx="3200400" cy="3200400"/>
+                </a:xfrm>
+                <a:prstGeom prst="pie">
+                  <a:avLst>
+                    <a:gd name="adj1" fmla="val 17267760"/>
+                    <a:gd name="adj2" fmla="val 6512"/>
+                  </a:avLst>
+                </a:prstGeom>
+                <a:solidFill>
+                  <a:srgbClr val="A79ADF">
+                    <a:alpha val="50000"/>
+                  </a:srgbClr>
+                </a:solidFill>
+                <a:ln>
+                  <a:noFill/>
+                </a:ln>
+              </p:spPr>
+              <p:style>
+                <a:lnRef idx="2">
+                  <a:schemeClr val="accent1">
+                    <a:shade val="15000"/>
+                  </a:schemeClr>
+                </a:lnRef>
+                <a:fillRef idx="1">
+                  <a:schemeClr val="accent1"/>
+                </a:fillRef>
+                <a:effectRef idx="0">
+                  <a:schemeClr val="accent1"/>
+                </a:effectRef>
+                <a:fontRef idx="minor">
+                  <a:schemeClr val="lt1"/>
+                </a:fontRef>
+              </p:style>
+              <p:txBody>
+                <a:bodyPr rtlCol="0" anchor="ctr"/>
+                <a:lstStyle/>
+                <a:p>
+                  <a:pPr algn="ctr"/>
+                  <a:endParaRPr lang="en-US">
+                    <a:solidFill>
+                      <a:schemeClr val="tx1"/>
+                    </a:solidFill>
+                  </a:endParaRPr>
+                </a:p>
+              </p:txBody>
+            </p:sp>
+            <p:sp>
+              <p:nvSpPr>
+                <p:cNvPr id="51" name="Partial Circle 50">
+                  <a:extLst>
+                    <a:ext uri="{FF2B5EF4-FFF2-40B4-BE49-F238E27FC236}">
+                      <a16:creationId xmlns:a16="http://schemas.microsoft.com/office/drawing/2014/main" id="{AD898B8F-0211-7257-A122-AFC1F6FE7F22}"/>
+                    </a:ext>
+                  </a:extLst>
+                </p:cNvPr>
+                <p:cNvSpPr/>
+                <p:nvPr/>
+              </p:nvSpPr>
+              <p:spPr>
+                <a:xfrm>
+                  <a:off x="600841" y="1386003"/>
+                  <a:ext cx="3657600" cy="3657600"/>
+                </a:xfrm>
+                <a:prstGeom prst="pie">
+                  <a:avLst>
+                    <a:gd name="adj1" fmla="val 2118224"/>
+                    <a:gd name="adj2" fmla="val 8689523"/>
+                  </a:avLst>
+                </a:prstGeom>
+                <a:solidFill>
+                  <a:srgbClr val="DFCA9A">
+                    <a:alpha val="50000"/>
+                  </a:srgbClr>
+                </a:solidFill>
+                <a:ln>
+                  <a:noFill/>
+                </a:ln>
+              </p:spPr>
+              <p:style>
+                <a:lnRef idx="2">
+                  <a:schemeClr val="accent1">
+                    <a:shade val="15000"/>
+                  </a:schemeClr>
+                </a:lnRef>
+                <a:fillRef idx="1">
+                  <a:schemeClr val="accent1"/>
+                </a:fillRef>
+                <a:effectRef idx="0">
+                  <a:schemeClr val="accent1"/>
+                </a:effectRef>
+                <a:fontRef idx="minor">
+                  <a:schemeClr val="lt1"/>
+                </a:fontRef>
+              </p:style>
+              <p:txBody>
+                <a:bodyPr rtlCol="0" anchor="ctr"/>
+                <a:lstStyle/>
+                <a:p>
+                  <a:pPr algn="ctr"/>
+                  <a:endParaRPr lang="en-US">
+                    <a:solidFill>
+                      <a:srgbClr val="00F5D4"/>
+                    </a:solidFill>
+                  </a:endParaRPr>
+                </a:p>
+              </p:txBody>
+            </p:sp>
+            <p:grpSp>
+              <p:nvGrpSpPr>
+                <p:cNvPr id="30" name="Group 29">
+                  <a:extLst>
+                    <a:ext uri="{FF2B5EF4-FFF2-40B4-BE49-F238E27FC236}">
+                      <a16:creationId xmlns:a16="http://schemas.microsoft.com/office/drawing/2014/main" id="{D7DDA26A-575F-51F1-4A88-3E0E5E788E99}"/>
+                    </a:ext>
+                  </a:extLst>
+                </p:cNvPr>
+                <p:cNvGrpSpPr/>
+                <p:nvPr/>
+              </p:nvGrpSpPr>
+              <p:grpSpPr>
+                <a:xfrm>
+                  <a:off x="445723" y="1232543"/>
+                  <a:ext cx="4007289" cy="4027543"/>
+                  <a:chOff x="325572" y="1263648"/>
+                  <a:chExt cx="4045980" cy="4003182"/>
+                </a:xfrm>
+              </p:grpSpPr>
+              <mc:AlternateContent xmlns:mc="http://schemas.openxmlformats.org/markup-compatibility/2006">
+                <mc:Choice xmlns:a14="http://schemas.microsoft.com/office/drawing/2010/main" Requires="a14">
+                  <p:sp>
+                    <p:nvSpPr>
+                      <p:cNvPr id="15" name="文本框 14">
+                        <a:extLst>
+                          <a:ext uri="{FF2B5EF4-FFF2-40B4-BE49-F238E27FC236}">
+                            <a16:creationId xmlns:a16="http://schemas.microsoft.com/office/drawing/2014/main" id="{8B5D5245-36AD-0D87-1EEB-70DC204E1713}"/>
+                          </a:ext>
+                        </a:extLst>
+                      </p:cNvPr>
+                      <p:cNvSpPr txBox="1"/>
+                      <p:nvPr/>
+                    </p:nvSpPr>
+                    <p:spPr>
+                      <a:xfrm>
+                        <a:off x="4065170" y="2349105"/>
+                        <a:ext cx="306382" cy="396425"/>
+                      </a:xfrm>
+                      <a:prstGeom prst="rect">
+                        <a:avLst/>
+                      </a:prstGeom>
+                      <a:noFill/>
+                    </p:spPr>
+                    <p:txBody>
+                      <a:bodyPr wrap="square" rtlCol="0">
+                        <a:noAutofit/>
+                      </a:bodyPr>
+                      <a:lstStyle/>
+                      <a:p>
+                        <a:pPr algn="ctr"/>
+                        <a14:m>
+                          <m:oMathPara xmlns:m="http://schemas.openxmlformats.org/officeDocument/2006/math">
+                            <m:oMathParaPr>
+                              <m:jc m:val="center"/>
+                            </m:oMathParaPr>
+                            <m:oMath xmlns:m="http://schemas.openxmlformats.org/officeDocument/2006/math">
+                              <m:r>
+                                <a:rPr lang="en-US" altLang="zh-CN" sz="2000" i="1">
+                                  <a:latin typeface="Cambria Math" panose="02040503050406030204" charset="0"/>
+                                  <a:ea typeface="MS Mincho" charset="0"/>
+                                  <a:cs typeface="Cambria Math" panose="02040503050406030204" charset="0"/>
+                                </a:rPr>
+                                <m:t>𝛽</m:t>
+                              </m:r>
+                            </m:oMath>
+                          </m:oMathPara>
+                        </a14:m>
+                        <a:endParaRPr lang="en-US" altLang="zh-CN" sz="2000" i="1" dirty="0">
+                          <a:latin typeface="Cambria Math" panose="02040503050406030204" charset="0"/>
+                          <a:ea typeface="MS Mincho" charset="0"/>
+                          <a:cs typeface="Cambria Math" panose="02040503050406030204" charset="0"/>
+                        </a:endParaRPr>
+                      </a:p>
+                    </p:txBody>
+                  </p:sp>
+                </mc:Choice>
+                <mc:Fallback>
+                  <p:sp>
+                    <p:nvSpPr>
+                      <p:cNvPr id="15" name="文本框 14">
+                        <a:extLst>
+                          <a:ext uri="{FF2B5EF4-FFF2-40B4-BE49-F238E27FC236}">
+                            <a16:creationId xmlns:a16="http://schemas.microsoft.com/office/drawing/2014/main" id="{8B5D5245-36AD-0D87-1EEB-70DC204E1713}"/>
+                          </a:ext>
+                        </a:extLst>
+                      </p:cNvPr>
+                      <p:cNvSpPr txBox="1">
+                        <a:spLocks noRot="1" noChangeAspect="1" noMove="1" noResize="1" noEditPoints="1" noAdjustHandles="1" noChangeArrowheads="1" noChangeShapeType="1" noTextEdit="1"/>
+                      </p:cNvSpPr>
+                      <p:nvPr/>
+                    </p:nvSpPr>
+                    <p:spPr>
+                      <a:xfrm>
+                        <a:off x="4065170" y="2349105"/>
+                        <a:ext cx="306382" cy="396425"/>
+                      </a:xfrm>
+                      <a:prstGeom prst="rect">
+                        <a:avLst/>
+                      </a:prstGeom>
+                      <a:blipFill>
+                        <a:blip r:embed="rId3"/>
+                        <a:stretch>
+                          <a:fillRect l="-24000" r="-4000" b="-16667"/>
+                        </a:stretch>
+                      </a:blipFill>
+                    </p:spPr>
+                    <p:txBody>
+                      <a:bodyPr/>
+                      <a:lstStyle/>
+                      <a:p>
+                        <a:r>
+                          <a:rPr lang="en-US">
+                            <a:noFill/>
+                          </a:rPr>
+                          <a:t> </a:t>
+                        </a:r>
+                      </a:p>
+                    </p:txBody>
+                  </p:sp>
+                </mc:Fallback>
+              </mc:AlternateContent>
+              <mc:AlternateContent xmlns:mc="http://schemas.openxmlformats.org/markup-compatibility/2006">
+                <mc:Choice xmlns:a14="http://schemas.microsoft.com/office/drawing/2010/main" Requires="a14">
+                  <p:sp>
+                    <p:nvSpPr>
+                      <p:cNvPr id="16" name="文本框 21">
+                        <a:extLst>
+                          <a:ext uri="{FF2B5EF4-FFF2-40B4-BE49-F238E27FC236}">
+                            <a16:creationId xmlns:a16="http://schemas.microsoft.com/office/drawing/2014/main" id="{53C01DAE-E46B-DCB4-AD22-CE77DF6B7146}"/>
+                          </a:ext>
+                        </a:extLst>
+                      </p:cNvPr>
+                      <p:cNvSpPr txBox="1"/>
+                      <p:nvPr/>
+                    </p:nvSpPr>
+                    <p:spPr>
+                      <a:xfrm>
+                        <a:off x="880377" y="1263648"/>
+                        <a:ext cx="641384" cy="414627"/>
+                      </a:xfrm>
+                      <a:prstGeom prst="rect">
+                        <a:avLst/>
+                      </a:prstGeom>
+                      <a:noFill/>
+                    </p:spPr>
+                    <p:txBody>
+                      <a:bodyPr wrap="square" rtlCol="0">
+                        <a:noAutofit/>
+                      </a:bodyPr>
+                      <a:lstStyle/>
+                      <a:p>
+                        <a:pPr algn="ctr"/>
+                        <a14:m>
+                          <m:oMathPara xmlns:m="http://schemas.openxmlformats.org/officeDocument/2006/math">
+                            <m:oMathParaPr>
+                              <m:jc m:val="center"/>
+                            </m:oMathParaPr>
+                            <m:oMath xmlns:m="http://schemas.openxmlformats.org/officeDocument/2006/math">
+                              <m:sSub>
+                                <m:sSubPr>
+                                  <m:ctrlPr>
+                                    <a:rPr lang="en-US" altLang="zh-CN" sz="2000" i="1" smtClean="0">
+                                      <a:latin typeface="Cambria Math" panose="02040503050406030204" pitchFamily="18" charset="0"/>
+                                      <a:ea typeface="MS Mincho" charset="0"/>
+                                    </a:rPr>
+                                  </m:ctrlPr>
+                                </m:sSubPr>
+                                <m:e>
+                                  <m:r>
+                                    <a:rPr lang="en-US" altLang="zh-CN" sz="2000" b="0" i="1" smtClean="0">
+                                      <a:latin typeface="Cambria Math" panose="02040503050406030204" pitchFamily="18" charset="0"/>
+                                      <a:ea typeface="MS Mincho" charset="0"/>
+                                    </a:rPr>
+                                    <m:t>𝑝</m:t>
+                                  </m:r>
+                                </m:e>
+                                <m:sub>
+                                  <m:r>
+                                    <a:rPr lang="zh-CN" altLang="en-US" sz="2000" i="1" smtClean="0">
+                                      <a:latin typeface="Cambria Math" panose="02040503050406030204" pitchFamily="18" charset="0"/>
+                                      <a:ea typeface="MS Mincho" charset="0"/>
+                                    </a:rPr>
+                                    <m:t>𝜅</m:t>
+                                  </m:r>
+                                </m:sub>
+                              </m:sSub>
+                            </m:oMath>
+                          </m:oMathPara>
+                        </a14:m>
+                        <a:endParaRPr lang="en-US" altLang="zh-CN" sz="2000" i="1" dirty="0">
+                          <a:latin typeface="Cambria Math" panose="02040503050406030204" charset="0"/>
+                          <a:ea typeface="MS Mincho" charset="0"/>
+                          <a:cs typeface="Cambria Math" panose="02040503050406030204" charset="0"/>
+                        </a:endParaRPr>
+                      </a:p>
+                    </p:txBody>
+                  </p:sp>
+                </mc:Choice>
+                <mc:Fallback>
+                  <p:sp>
+                    <p:nvSpPr>
+                      <p:cNvPr id="16" name="文本框 21">
+                        <a:extLst>
+                          <a:ext uri="{FF2B5EF4-FFF2-40B4-BE49-F238E27FC236}">
+                            <a16:creationId xmlns:a16="http://schemas.microsoft.com/office/drawing/2014/main" id="{53C01DAE-E46B-DCB4-AD22-CE77DF6B7146}"/>
+                          </a:ext>
+                        </a:extLst>
+                      </p:cNvPr>
+                      <p:cNvSpPr txBox="1">
+                        <a:spLocks noRot="1" noChangeAspect="1" noMove="1" noResize="1" noEditPoints="1" noAdjustHandles="1" noChangeArrowheads="1" noChangeShapeType="1" noTextEdit="1"/>
+                      </p:cNvSpPr>
+                      <p:nvPr/>
+                    </p:nvSpPr>
+                    <p:spPr>
+                      <a:xfrm>
+                        <a:off x="880377" y="1263648"/>
+                        <a:ext cx="641384" cy="414627"/>
+                      </a:xfrm>
+                      <a:prstGeom prst="rect">
+                        <a:avLst/>
+                      </a:prstGeom>
+                      <a:blipFill>
+                        <a:blip r:embed="rId4"/>
+                        <a:stretch>
+                          <a:fillRect b="-5797"/>
+                        </a:stretch>
+                      </a:blipFill>
+                    </p:spPr>
+                    <p:txBody>
+                      <a:bodyPr/>
+                      <a:lstStyle/>
+                      <a:p>
+                        <a:r>
+                          <a:rPr lang="en-US">
+                            <a:noFill/>
+                          </a:rPr>
+                          <a:t> </a:t>
+                        </a:r>
+                      </a:p>
+                    </p:txBody>
+                  </p:sp>
+                </mc:Fallback>
+              </mc:AlternateContent>
+              <mc:AlternateContent xmlns:mc="http://schemas.openxmlformats.org/markup-compatibility/2006">
+                <mc:Choice xmlns:a14="http://schemas.microsoft.com/office/drawing/2010/main" Requires="a14">
+                  <p:sp>
+                    <p:nvSpPr>
+                      <p:cNvPr id="17" name="文本框 22">
+                        <a:extLst>
+                          <a:ext uri="{FF2B5EF4-FFF2-40B4-BE49-F238E27FC236}">
+                            <a16:creationId xmlns:a16="http://schemas.microsoft.com/office/drawing/2014/main" id="{7F6E8EDE-1AC9-65B0-868E-D1B84E92D46B}"/>
+                          </a:ext>
+                        </a:extLst>
+                      </p:cNvPr>
+                      <p:cNvSpPr txBox="1"/>
+                      <p:nvPr/>
+                    </p:nvSpPr>
+                    <p:spPr>
+                      <a:xfrm>
+                        <a:off x="325572" y="2329605"/>
+                        <a:ext cx="262815" cy="369327"/>
+                      </a:xfrm>
+                      <a:prstGeom prst="rect">
+                        <a:avLst/>
+                      </a:prstGeom>
+                      <a:noFill/>
+                    </p:spPr>
+                    <p:txBody>
+                      <a:bodyPr wrap="square" rtlCol="0">
+                        <a:noAutofit/>
+                      </a:bodyPr>
+                      <a:lstStyle/>
+                      <a:p>
+                        <a:pPr algn="ctr"/>
+                        <a14:m>
+                          <m:oMathPara xmlns:m="http://schemas.openxmlformats.org/officeDocument/2006/math">
+                            <m:oMathParaPr>
+                              <m:jc m:val="center"/>
+                            </m:oMathParaPr>
+                            <m:oMath xmlns:m="http://schemas.openxmlformats.org/officeDocument/2006/math">
+                              <m:r>
+                                <a:rPr lang="en-US" altLang="zh-CN" sz="2000" i="1">
+                                  <a:latin typeface="Cambria Math" panose="02040503050406030204" charset="0"/>
+                                  <a:ea typeface="MS Mincho" charset="0"/>
+                                  <a:cs typeface="Cambria Math" panose="02040503050406030204" charset="0"/>
+                                </a:rPr>
+                                <m:t>𝛿</m:t>
+                              </m:r>
+                            </m:oMath>
+                          </m:oMathPara>
+                        </a14:m>
+                        <a:endParaRPr lang="en-US" altLang="zh-CN" sz="2000" i="1" dirty="0">
+                          <a:latin typeface="Cambria Math" panose="02040503050406030204" charset="0"/>
+                          <a:ea typeface="MS Mincho" charset="0"/>
+                          <a:cs typeface="Cambria Math" panose="02040503050406030204" charset="0"/>
+                        </a:endParaRPr>
+                      </a:p>
+                    </p:txBody>
+                  </p:sp>
+                </mc:Choice>
+                <mc:Fallback>
+                  <p:sp>
+                    <p:nvSpPr>
+                      <p:cNvPr id="17" name="文本框 22">
+                        <a:extLst>
+                          <a:ext uri="{FF2B5EF4-FFF2-40B4-BE49-F238E27FC236}">
+                            <a16:creationId xmlns:a16="http://schemas.microsoft.com/office/drawing/2014/main" id="{7F6E8EDE-1AC9-65B0-868E-D1B84E92D46B}"/>
+                          </a:ext>
+                        </a:extLst>
+                      </p:cNvPr>
+                      <p:cNvSpPr txBox="1">
+                        <a:spLocks noRot="1" noChangeAspect="1" noMove="1" noResize="1" noEditPoints="1" noAdjustHandles="1" noChangeArrowheads="1" noChangeShapeType="1" noTextEdit="1"/>
+                      </p:cNvSpPr>
+                      <p:nvPr/>
+                    </p:nvSpPr>
+                    <p:spPr>
+                      <a:xfrm>
+                        <a:off x="325572" y="2329605"/>
+                        <a:ext cx="262815" cy="369327"/>
+                      </a:xfrm>
+                      <a:prstGeom prst="rect">
+                        <a:avLst/>
+                      </a:prstGeom>
+                      <a:blipFill>
+                        <a:blip r:embed="rId5"/>
+                        <a:stretch>
+                          <a:fillRect l="-23256" b="-4918"/>
+                        </a:stretch>
+                      </a:blipFill>
+                    </p:spPr>
+                    <p:txBody>
+                      <a:bodyPr/>
+                      <a:lstStyle/>
+                      <a:p>
+                        <a:r>
+                          <a:rPr lang="en-US">
+                            <a:noFill/>
+                          </a:rPr>
+                          <a:t> </a:t>
+                        </a:r>
+                      </a:p>
+                    </p:txBody>
+                  </p:sp>
+                </mc:Fallback>
+              </mc:AlternateContent>
+              <mc:AlternateContent xmlns:mc="http://schemas.openxmlformats.org/markup-compatibility/2006">
+                <mc:Choice xmlns:a14="http://schemas.microsoft.com/office/drawing/2010/main" Requires="a14">
+                  <p:sp>
+                    <p:nvSpPr>
+                      <p:cNvPr id="18" name="文本框 6">
+                        <a:extLst>
+                          <a:ext uri="{FF2B5EF4-FFF2-40B4-BE49-F238E27FC236}">
+                            <a16:creationId xmlns:a16="http://schemas.microsoft.com/office/drawing/2014/main" id="{009D626B-2263-CB1B-9BD8-76C8DE7CA79A}"/>
+                          </a:ext>
+                        </a:extLst>
+                      </p:cNvPr>
+                      <p:cNvSpPr txBox="1"/>
+                      <p:nvPr/>
+                    </p:nvSpPr>
+                    <p:spPr>
+                      <a:xfrm>
+                        <a:off x="3531763" y="4546812"/>
+                        <a:ext cx="306382" cy="256543"/>
+                      </a:xfrm>
+                      <a:prstGeom prst="rect">
+                        <a:avLst/>
+                      </a:prstGeom>
+                      <a:noFill/>
+                    </p:spPr>
+                    <p:txBody>
+                      <a:bodyPr wrap="square" rtlCol="0">
+                        <a:noAutofit/>
+                      </a:bodyPr>
+                      <a:lstStyle/>
+                      <a:p>
+                        <a:pPr algn="ctr"/>
+                        <a14:m>
+                          <m:oMathPara xmlns:m="http://schemas.openxmlformats.org/officeDocument/2006/math">
+                            <m:oMathParaPr>
+                              <m:jc m:val="center"/>
+                            </m:oMathParaPr>
+                            <m:oMath xmlns:m="http://schemas.openxmlformats.org/officeDocument/2006/math">
+                              <m:r>
+                                <a:rPr lang="en-US" altLang="zh-CN" sz="2000" i="1">
+                                  <a:latin typeface="Cambria Math" panose="02040503050406030204" charset="0"/>
+                                  <a:ea typeface="MS Mincho" charset="0"/>
+                                  <a:cs typeface="Cambria Math" panose="02040503050406030204" charset="0"/>
+                                </a:rPr>
+                                <m:t>𝐴</m:t>
+                              </m:r>
+                            </m:oMath>
+                          </m:oMathPara>
+                        </a14:m>
+                        <a:endParaRPr lang="en-US" altLang="zh-CN" sz="2000" i="1" dirty="0">
+                          <a:latin typeface="Cambria Math" panose="02040503050406030204" charset="0"/>
+                          <a:ea typeface="MS Mincho" charset="0"/>
+                          <a:cs typeface="Cambria Math" panose="02040503050406030204" charset="0"/>
+                        </a:endParaRPr>
+                      </a:p>
+                    </p:txBody>
+                  </p:sp>
+                </mc:Choice>
+                <mc:Fallback>
+                  <p:sp>
+                    <p:nvSpPr>
+                      <p:cNvPr id="18" name="文本框 6">
+                        <a:extLst>
+                          <a:ext uri="{FF2B5EF4-FFF2-40B4-BE49-F238E27FC236}">
+                            <a16:creationId xmlns:a16="http://schemas.microsoft.com/office/drawing/2014/main" id="{009D626B-2263-CB1B-9BD8-76C8DE7CA79A}"/>
+                          </a:ext>
+                        </a:extLst>
+                      </p:cNvPr>
+                      <p:cNvSpPr txBox="1">
+                        <a:spLocks noRot="1" noChangeAspect="1" noMove="1" noResize="1" noEditPoints="1" noAdjustHandles="1" noChangeArrowheads="1" noChangeShapeType="1" noTextEdit="1"/>
+                      </p:cNvSpPr>
+                      <p:nvPr/>
+                    </p:nvSpPr>
+                    <p:spPr>
+                      <a:xfrm>
+                        <a:off x="3531763" y="4546812"/>
+                        <a:ext cx="306382" cy="256543"/>
+                      </a:xfrm>
+                      <a:prstGeom prst="rect">
+                        <a:avLst/>
+                      </a:prstGeom>
+                      <a:blipFill>
+                        <a:blip r:embed="rId6"/>
+                        <a:stretch>
+                          <a:fillRect l="-16000" b="-50000"/>
+                        </a:stretch>
+                      </a:blipFill>
+                    </p:spPr>
+                    <p:txBody>
+                      <a:bodyPr/>
+                      <a:lstStyle/>
+                      <a:p>
+                        <a:r>
+                          <a:rPr lang="en-US">
+                            <a:noFill/>
+                          </a:rPr>
+                          <a:t> </a:t>
+                        </a:r>
+                      </a:p>
+                    </p:txBody>
+                  </p:sp>
+                </mc:Fallback>
+              </mc:AlternateContent>
+              <mc:AlternateContent xmlns:mc="http://schemas.openxmlformats.org/markup-compatibility/2006">
+                <mc:Choice xmlns:a14="http://schemas.microsoft.com/office/drawing/2010/main" Requires="a14">
+                  <p:sp>
+                    <p:nvSpPr>
+                      <p:cNvPr id="19" name="文本框 7">
+                        <a:extLst>
+                          <a:ext uri="{FF2B5EF4-FFF2-40B4-BE49-F238E27FC236}">
+                            <a16:creationId xmlns:a16="http://schemas.microsoft.com/office/drawing/2014/main" id="{A6C60096-9450-E10E-AFAA-7FB325B4FA34}"/>
+                          </a:ext>
+                        </a:extLst>
+                      </p:cNvPr>
+                      <p:cNvSpPr txBox="1"/>
+                      <p:nvPr/>
+                    </p:nvSpPr>
+                    <p:spPr>
+                      <a:xfrm>
+                        <a:off x="2216862" y="5010287"/>
+                        <a:ext cx="306382" cy="256543"/>
+                      </a:xfrm>
+                      <a:prstGeom prst="rect">
+                        <a:avLst/>
+                      </a:prstGeom>
+                      <a:noFill/>
+                    </p:spPr>
+                    <p:txBody>
+                      <a:bodyPr wrap="square" rtlCol="0">
+                        <a:noAutofit/>
+                      </a:bodyPr>
+                      <a:lstStyle/>
+                      <a:p>
+                        <a:pPr algn="ctr"/>
+                        <a14:m>
+                          <m:oMathPara xmlns:m="http://schemas.openxmlformats.org/officeDocument/2006/math">
+                            <m:oMathParaPr>
+                              <m:jc m:val="center"/>
+                            </m:oMathParaPr>
+                            <m:oMath xmlns:m="http://schemas.openxmlformats.org/officeDocument/2006/math">
+                              <m:r>
+                                <a:rPr lang="en-US" altLang="zh-CN" sz="2000" b="0" i="1" smtClean="0">
+                                  <a:latin typeface="Cambria Math" panose="02040503050406030204" pitchFamily="18" charset="0"/>
+                                  <a:ea typeface="MS Mincho" charset="0"/>
+                                  <a:cs typeface="Cambria Math" panose="02040503050406030204" charset="0"/>
+                                </a:rPr>
+                                <m:t>|</m:t>
+                              </m:r>
+                              <m:r>
+                                <a:rPr lang="en-US" altLang="zh-CN" sz="2000" i="1" smtClean="0">
+                                  <a:latin typeface="Cambria Math" panose="02040503050406030204" charset="0"/>
+                                  <a:ea typeface="MS Mincho" charset="0"/>
+                                  <a:cs typeface="Cambria Math" panose="02040503050406030204" charset="0"/>
+                                </a:rPr>
+                                <m:t>𝐵</m:t>
+                              </m:r>
+                              <m:r>
+                                <a:rPr lang="en-US" altLang="zh-CN" sz="2000" b="0" i="1" smtClean="0">
+                                  <a:latin typeface="Cambria Math" panose="02040503050406030204" pitchFamily="18" charset="0"/>
+                                  <a:ea typeface="MS Mincho" charset="0"/>
+                                  <a:cs typeface="Cambria Math" panose="02040503050406030204" charset="0"/>
+                                </a:rPr>
+                                <m:t>|</m:t>
+                              </m:r>
+                            </m:oMath>
+                          </m:oMathPara>
+                        </a14:m>
+                        <a:endParaRPr lang="en-US" altLang="zh-CN" sz="2000" i="1" dirty="0">
+                          <a:latin typeface="Cambria Math" panose="02040503050406030204" charset="0"/>
+                          <a:ea typeface="MS Mincho" charset="0"/>
+                          <a:cs typeface="Cambria Math" panose="02040503050406030204" charset="0"/>
+                        </a:endParaRPr>
+                      </a:p>
+                    </p:txBody>
+                  </p:sp>
+                </mc:Choice>
+                <mc:Fallback>
+                  <p:sp>
+                    <p:nvSpPr>
+                      <p:cNvPr id="19" name="文本框 7">
+                        <a:extLst>
+                          <a:ext uri="{FF2B5EF4-FFF2-40B4-BE49-F238E27FC236}">
+                            <a16:creationId xmlns:a16="http://schemas.microsoft.com/office/drawing/2014/main" id="{A6C60096-9450-E10E-AFAA-7FB325B4FA34}"/>
+                          </a:ext>
+                        </a:extLst>
+                      </p:cNvPr>
+                      <p:cNvSpPr txBox="1">
+                        <a:spLocks noRot="1" noChangeAspect="1" noMove="1" noResize="1" noEditPoints="1" noAdjustHandles="1" noChangeArrowheads="1" noChangeShapeType="1" noTextEdit="1"/>
+                      </p:cNvSpPr>
+                      <p:nvPr/>
+                    </p:nvSpPr>
+                    <p:spPr>
+                      <a:xfrm>
+                        <a:off x="2216862" y="5010287"/>
+                        <a:ext cx="306382" cy="256543"/>
+                      </a:xfrm>
+                      <a:prstGeom prst="rect">
+                        <a:avLst/>
+                      </a:prstGeom>
+                      <a:blipFill>
+                        <a:blip r:embed="rId7"/>
+                        <a:stretch>
+                          <a:fillRect l="-54000" r="-34000" b="-83333"/>
+                        </a:stretch>
+                      </a:blipFill>
+                    </p:spPr>
+                    <p:txBody>
+                      <a:bodyPr/>
+                      <a:lstStyle/>
+                      <a:p>
+                        <a:r>
+                          <a:rPr lang="en-US">
+                            <a:noFill/>
+                          </a:rPr>
+                          <a:t> </a:t>
+                        </a:r>
+                      </a:p>
+                    </p:txBody>
+                  </p:sp>
+                </mc:Fallback>
+              </mc:AlternateContent>
+              <mc:AlternateContent xmlns:mc="http://schemas.openxmlformats.org/markup-compatibility/2006">
+                <mc:Choice xmlns:a14="http://schemas.microsoft.com/office/drawing/2010/main" Requires="a14">
+                  <p:sp>
+                    <p:nvSpPr>
+                      <p:cNvPr id="20" name="文本框 8">
+                        <a:extLst>
+                          <a:ext uri="{FF2B5EF4-FFF2-40B4-BE49-F238E27FC236}">
+                            <a16:creationId xmlns:a16="http://schemas.microsoft.com/office/drawing/2014/main" id="{99096C25-8740-5AED-E8CF-AC1B6E7DDB8F}"/>
+                          </a:ext>
+                        </a:extLst>
+                      </p:cNvPr>
+                      <p:cNvSpPr txBox="1"/>
+                      <p:nvPr/>
+                    </p:nvSpPr>
+                    <p:spPr>
+                      <a:xfrm>
+                        <a:off x="967720" y="4604017"/>
+                        <a:ext cx="306382" cy="256543"/>
+                      </a:xfrm>
+                      <a:prstGeom prst="rect">
+                        <a:avLst/>
+                      </a:prstGeom>
+                      <a:noFill/>
+                    </p:spPr>
+                    <p:txBody>
+                      <a:bodyPr wrap="square" rtlCol="0">
+                        <a:noAutofit/>
+                      </a:bodyPr>
+                      <a:lstStyle/>
+                      <a:p>
+                        <a:pPr algn="ctr"/>
+                        <a14:m>
+                          <m:oMathPara xmlns:m="http://schemas.openxmlformats.org/officeDocument/2006/math">
+                            <m:oMathParaPr>
+                              <m:jc m:val="center"/>
+                            </m:oMathParaPr>
+                            <m:oMath xmlns:m="http://schemas.openxmlformats.org/officeDocument/2006/math">
+                              <m:r>
+                                <a:rPr lang="en-US" altLang="zh-CN" sz="2000" i="1">
+                                  <a:latin typeface="Cambria Math" panose="02040503050406030204" charset="0"/>
+                                  <a:ea typeface="MS Mincho" charset="0"/>
+                                  <a:cs typeface="Cambria Math" panose="02040503050406030204" charset="0"/>
+                                </a:rPr>
+                                <m:t>𝐶</m:t>
+                              </m:r>
+                            </m:oMath>
+                          </m:oMathPara>
+                        </a14:m>
+                        <a:endParaRPr lang="en-US" altLang="zh-CN" sz="2000" i="1" dirty="0">
+                          <a:latin typeface="Cambria Math" panose="02040503050406030204" charset="0"/>
+                          <a:ea typeface="MS Mincho" charset="0"/>
+                          <a:cs typeface="Cambria Math" panose="02040503050406030204" charset="0"/>
+                        </a:endParaRPr>
+                      </a:p>
+                    </p:txBody>
+                  </p:sp>
+                </mc:Choice>
+                <mc:Fallback>
+                  <p:sp>
+                    <p:nvSpPr>
+                      <p:cNvPr id="20" name="文本框 8">
+                        <a:extLst>
+                          <a:ext uri="{FF2B5EF4-FFF2-40B4-BE49-F238E27FC236}">
+                            <a16:creationId xmlns:a16="http://schemas.microsoft.com/office/drawing/2014/main" id="{99096C25-8740-5AED-E8CF-AC1B6E7DDB8F}"/>
+                          </a:ext>
+                        </a:extLst>
+                      </p:cNvPr>
+                      <p:cNvSpPr txBox="1">
+                        <a:spLocks noRot="1" noChangeAspect="1" noMove="1" noResize="1" noEditPoints="1" noAdjustHandles="1" noChangeArrowheads="1" noChangeShapeType="1" noTextEdit="1"/>
+                      </p:cNvSpPr>
+                      <p:nvPr/>
+                    </p:nvSpPr>
+                    <p:spPr>
+                      <a:xfrm>
+                        <a:off x="967720" y="4604017"/>
+                        <a:ext cx="306382" cy="256543"/>
+                      </a:xfrm>
+                      <a:prstGeom prst="rect">
+                        <a:avLst/>
+                      </a:prstGeom>
+                      <a:blipFill>
+                        <a:blip r:embed="rId8"/>
+                        <a:stretch>
+                          <a:fillRect l="-14000" b="-50000"/>
+                        </a:stretch>
+                      </a:blipFill>
+                    </p:spPr>
+                    <p:txBody>
+                      <a:bodyPr/>
+                      <a:lstStyle/>
+                      <a:p>
+                        <a:r>
+                          <a:rPr lang="en-US">
+                            <a:noFill/>
+                          </a:rPr>
+                          <a:t> </a:t>
+                        </a:r>
+                      </a:p>
+                    </p:txBody>
+                  </p:sp>
+                </mc:Fallback>
+              </mc:AlternateContent>
+              <mc:AlternateContent xmlns:mc="http://schemas.openxmlformats.org/markup-compatibility/2006">
+                <mc:Choice xmlns:a14="http://schemas.microsoft.com/office/drawing/2010/main" Requires="a14">
+                  <p:sp>
+                    <p:nvSpPr>
+                      <p:cNvPr id="28" name="文本框 21">
+                        <a:extLst>
+                          <a:ext uri="{FF2B5EF4-FFF2-40B4-BE49-F238E27FC236}">
+                            <a16:creationId xmlns:a16="http://schemas.microsoft.com/office/drawing/2014/main" id="{DB178288-53C2-01AE-408E-86F01E62D95D}"/>
+                          </a:ext>
+                        </a:extLst>
+                      </p:cNvPr>
+                      <p:cNvSpPr txBox="1"/>
+                      <p:nvPr/>
+                    </p:nvSpPr>
+                    <p:spPr>
+                      <a:xfrm>
+                        <a:off x="3268042" y="1284611"/>
+                        <a:ext cx="641385" cy="479471"/>
+                      </a:xfrm>
+                      <a:prstGeom prst="rect">
+                        <a:avLst/>
+                      </a:prstGeom>
+                      <a:noFill/>
+                    </p:spPr>
+                    <p:txBody>
+                      <a:bodyPr wrap="square" rtlCol="0">
+                        <a:noAutofit/>
+                      </a:bodyPr>
+                      <a:lstStyle/>
+                      <a:p>
+                        <a:pPr algn="ctr"/>
+                        <a14:m>
+                          <m:oMathPara xmlns:m="http://schemas.openxmlformats.org/officeDocument/2006/math">
+                            <m:oMathParaPr>
+                              <m:jc m:val="center"/>
+                            </m:oMathParaPr>
+                            <m:oMath xmlns:m="http://schemas.openxmlformats.org/officeDocument/2006/math">
+                              <m:sSub>
+                                <m:sSubPr>
+                                  <m:ctrlPr>
+                                    <a:rPr lang="en-US" altLang="zh-CN" sz="2000" i="1" smtClean="0">
+                                      <a:latin typeface="Cambria Math" panose="02040503050406030204" pitchFamily="18" charset="0"/>
+                                      <a:ea typeface="MS Mincho" charset="0"/>
+                                    </a:rPr>
+                                  </m:ctrlPr>
+                                </m:sSubPr>
+                                <m:e>
+                                  <m:r>
+                                    <a:rPr lang="en-US" altLang="zh-CN" sz="2000" b="0" i="1" smtClean="0">
+                                      <a:latin typeface="Cambria Math" panose="02040503050406030204" pitchFamily="18" charset="0"/>
+                                      <a:ea typeface="MS Mincho" charset="0"/>
+                                    </a:rPr>
+                                    <m:t>𝑝</m:t>
+                                  </m:r>
+                                </m:e>
+                                <m:sub>
+                                  <m:r>
+                                    <a:rPr lang="zh-CN" altLang="en-US" sz="2000" b="0" i="1" smtClean="0">
+                                      <a:latin typeface="Cambria Math" panose="02040503050406030204" pitchFamily="18" charset="0"/>
+                                      <a:ea typeface="MS Mincho" charset="0"/>
+                                    </a:rPr>
+                                    <m:t>𝛼</m:t>
+                                  </m:r>
+                                </m:sub>
+                              </m:sSub>
+                            </m:oMath>
+                          </m:oMathPara>
+                        </a14:m>
+                        <a:endParaRPr lang="en-US" altLang="zh-CN" sz="2000" i="1" dirty="0">
+                          <a:latin typeface="Cambria Math" panose="02040503050406030204" charset="0"/>
+                          <a:ea typeface="MS Mincho" charset="0"/>
+                          <a:cs typeface="Cambria Math" panose="02040503050406030204" charset="0"/>
+                        </a:endParaRPr>
+                      </a:p>
+                    </p:txBody>
+                  </p:sp>
+                </mc:Choice>
+                <mc:Fallback>
+                  <p:sp>
+                    <p:nvSpPr>
+                      <p:cNvPr id="28" name="文本框 21">
+                        <a:extLst>
+                          <a:ext uri="{FF2B5EF4-FFF2-40B4-BE49-F238E27FC236}">
+                            <a16:creationId xmlns:a16="http://schemas.microsoft.com/office/drawing/2014/main" id="{DB178288-53C2-01AE-408E-86F01E62D95D}"/>
+                          </a:ext>
+                        </a:extLst>
+                      </p:cNvPr>
+                      <p:cNvSpPr txBox="1">
+                        <a:spLocks noRot="1" noChangeAspect="1" noMove="1" noResize="1" noEditPoints="1" noAdjustHandles="1" noChangeArrowheads="1" noChangeShapeType="1" noTextEdit="1"/>
+                      </p:cNvSpPr>
+                      <p:nvPr/>
+                    </p:nvSpPr>
+                    <p:spPr>
+                      <a:xfrm>
+                        <a:off x="3268042" y="1284611"/>
+                        <a:ext cx="641385" cy="479471"/>
+                      </a:xfrm>
+                      <a:prstGeom prst="rect">
+                        <a:avLst/>
+                      </a:prstGeom>
+                      <a:blipFill>
+                        <a:blip r:embed="rId9"/>
+                        <a:stretch>
+                          <a:fillRect/>
+                        </a:stretch>
+                      </a:blipFill>
+                    </p:spPr>
+                    <p:txBody>
+                      <a:bodyPr/>
+                      <a:lstStyle/>
+                      <a:p>
+                        <a:r>
+                          <a:rPr lang="en-US">
+                            <a:noFill/>
+                          </a:rPr>
+                          <a:t> </a:t>
+                        </a:r>
+                      </a:p>
+                    </p:txBody>
+                  </p:sp>
+                </mc:Fallback>
+              </mc:AlternateContent>
+            </p:grpSp>
+            <p:sp>
+              <p:nvSpPr>
+                <p:cNvPr id="2" name="TextBox 1">
+                  <a:extLst>
+                    <a:ext uri="{FF2B5EF4-FFF2-40B4-BE49-F238E27FC236}">
+                      <a16:creationId xmlns:a16="http://schemas.microsoft.com/office/drawing/2014/main" id="{9551372F-848C-59B4-D713-FF5A2E9CF968}"/>
+                    </a:ext>
+                  </a:extLst>
+                </p:cNvPr>
+                <p:cNvSpPr txBox="1"/>
+                <p:nvPr/>
+              </p:nvSpPr>
+              <p:spPr>
+                <a:xfrm rot="1998811">
+                  <a:off x="2947782" y="1876188"/>
+                  <a:ext cx="766557" cy="338554"/>
+                </a:xfrm>
+                <a:prstGeom prst="rect">
+                  <a:avLst/>
+                </a:prstGeom>
+                <a:noFill/>
+              </p:spPr>
+              <p:txBody>
+                <a:bodyPr wrap="none" rtlCol="0">
+                  <a:spAutoFit/>
+                </a:bodyPr>
+                <a:lstStyle/>
+                <a:p>
+                  <a:r>
+                    <a:rPr lang="en-US" sz="1600" dirty="0">
+                      <a:latin typeface="Arial" panose="020B0604020202020204" pitchFamily="34" charset="0"/>
+                      <a:cs typeface="Arial" panose="020B0604020202020204" pitchFamily="34" charset="0"/>
+                    </a:rPr>
+                    <a:t>44.9%</a:t>
+                  </a:r>
+                </a:p>
+              </p:txBody>
+            </p:sp>
+            <p:sp>
+              <p:nvSpPr>
+                <p:cNvPr id="21" name="TextBox 20">
+                  <a:extLst>
+                    <a:ext uri="{FF2B5EF4-FFF2-40B4-BE49-F238E27FC236}">
+                      <a16:creationId xmlns:a16="http://schemas.microsoft.com/office/drawing/2014/main" id="{9D219F24-A5A6-BB05-08C0-320950FDF17B}"/>
+                    </a:ext>
+                  </a:extLst>
+                </p:cNvPr>
+                <p:cNvSpPr txBox="1"/>
+                <p:nvPr/>
+              </p:nvSpPr>
+              <p:spPr>
+                <a:xfrm rot="1872829">
+                  <a:off x="3087001" y="1673183"/>
+                  <a:ext cx="766557" cy="338554"/>
+                </a:xfrm>
+                <a:prstGeom prst="rect">
+                  <a:avLst/>
+                </a:prstGeom>
+                <a:noFill/>
+              </p:spPr>
+              <p:txBody>
+                <a:bodyPr wrap="none" rtlCol="0">
+                  <a:spAutoFit/>
+                </a:bodyPr>
+                <a:lstStyle/>
+                <a:p>
+                  <a:r>
+                    <a:rPr lang="en-US" sz="1600" dirty="0">
+                      <a:latin typeface="Arial" panose="020B0604020202020204" pitchFamily="34" charset="0"/>
+                      <a:cs typeface="Arial" panose="020B0604020202020204" pitchFamily="34" charset="0"/>
+                    </a:rPr>
+                    <a:t>43.7%</a:t>
+                  </a:r>
+                </a:p>
+              </p:txBody>
+            </p:sp>
+            <p:sp>
+              <p:nvSpPr>
+                <p:cNvPr id="23" name="TextBox 22">
+                  <a:extLst>
+                    <a:ext uri="{FF2B5EF4-FFF2-40B4-BE49-F238E27FC236}">
+                      <a16:creationId xmlns:a16="http://schemas.microsoft.com/office/drawing/2014/main" id="{D23DDF79-E57A-1AE0-0E99-E1C064DFCB0B}"/>
+                    </a:ext>
+                  </a:extLst>
+                </p:cNvPr>
+                <p:cNvSpPr txBox="1"/>
+                <p:nvPr/>
+              </p:nvSpPr>
+              <p:spPr>
+                <a:xfrm>
+                  <a:off x="2409937" y="1619880"/>
+                  <a:ext cx="498855" cy="261610"/>
+                </a:xfrm>
+                <a:prstGeom prst="rect">
+                  <a:avLst/>
+                </a:prstGeom>
+                <a:noFill/>
+              </p:spPr>
+              <p:txBody>
+                <a:bodyPr wrap="none" rtlCol="0">
+                  <a:spAutoFit/>
+                </a:bodyPr>
+                <a:lstStyle/>
+                <a:p>
+                  <a:r>
+                    <a:rPr lang="en-US" sz="1100" dirty="0">
+                      <a:latin typeface="Arial" panose="020B0604020202020204" pitchFamily="34" charset="0"/>
+                      <a:cs typeface="Arial" panose="020B0604020202020204" pitchFamily="34" charset="0"/>
+                    </a:rPr>
+                    <a:t>2016</a:t>
+                  </a:r>
+                </a:p>
+              </p:txBody>
+            </p:sp>
+            <p:sp>
+              <p:nvSpPr>
+                <p:cNvPr id="25" name="TextBox 24">
+                  <a:extLst>
+                    <a:ext uri="{FF2B5EF4-FFF2-40B4-BE49-F238E27FC236}">
+                      <a16:creationId xmlns:a16="http://schemas.microsoft.com/office/drawing/2014/main" id="{03AB2FC1-6D2F-F860-A9EB-F99185EEE08A}"/>
+                    </a:ext>
+                  </a:extLst>
+                </p:cNvPr>
+                <p:cNvSpPr txBox="1"/>
+                <p:nvPr/>
+              </p:nvSpPr>
+              <p:spPr>
+                <a:xfrm>
+                  <a:off x="2470653" y="1423744"/>
+                  <a:ext cx="498855" cy="261610"/>
+                </a:xfrm>
+                <a:prstGeom prst="rect">
+                  <a:avLst/>
+                </a:prstGeom>
+                <a:noFill/>
+              </p:spPr>
+              <p:txBody>
+                <a:bodyPr wrap="none" rtlCol="0">
+                  <a:spAutoFit/>
+                </a:bodyPr>
+                <a:lstStyle/>
+                <a:p>
+                  <a:r>
+                    <a:rPr lang="en-US" sz="1100" dirty="0">
+                      <a:latin typeface="Arial" panose="020B0604020202020204" pitchFamily="34" charset="0"/>
+                      <a:cs typeface="Arial" panose="020B0604020202020204" pitchFamily="34" charset="0"/>
+                    </a:rPr>
+                    <a:t>2023</a:t>
+                  </a:r>
+                </a:p>
+              </p:txBody>
+            </p:sp>
+            <p:sp>
+              <p:nvSpPr>
+                <p:cNvPr id="29" name="TextBox 28">
+                  <a:extLst>
+                    <a:ext uri="{FF2B5EF4-FFF2-40B4-BE49-F238E27FC236}">
+                      <a16:creationId xmlns:a16="http://schemas.microsoft.com/office/drawing/2014/main" id="{EAD45733-5147-C392-5473-72A8037C74C9}"/>
+                    </a:ext>
+                  </a:extLst>
+                </p:cNvPr>
+                <p:cNvSpPr txBox="1"/>
+                <p:nvPr/>
+              </p:nvSpPr>
+              <p:spPr>
+                <a:xfrm rot="4450356">
+                  <a:off x="3709523" y="2517467"/>
+                  <a:ext cx="697627" cy="338554"/>
+                </a:xfrm>
+                <a:prstGeom prst="rect">
+                  <a:avLst/>
+                </a:prstGeom>
+                <a:noFill/>
+              </p:spPr>
+              <p:txBody>
+                <a:bodyPr wrap="none" rtlCol="0">
+                  <a:spAutoFit/>
+                </a:bodyPr>
+                <a:lstStyle/>
+                <a:p>
+                  <a:r>
+                    <a:rPr lang="en-US" sz="1600" dirty="0">
+                      <a:latin typeface="Arial" panose="020B0604020202020204" pitchFamily="34" charset="0"/>
+                      <a:cs typeface="Arial" panose="020B0604020202020204" pitchFamily="34" charset="0"/>
+                    </a:rPr>
+                    <a:t>0.264</a:t>
+                  </a:r>
+                </a:p>
+              </p:txBody>
+            </p:sp>
+            <p:sp>
+              <p:nvSpPr>
+                <p:cNvPr id="33" name="TextBox 32">
+                  <a:extLst>
+                    <a:ext uri="{FF2B5EF4-FFF2-40B4-BE49-F238E27FC236}">
+                      <a16:creationId xmlns:a16="http://schemas.microsoft.com/office/drawing/2014/main" id="{048494B0-9E83-042D-FEE4-BFEE2A563793}"/>
+                    </a:ext>
+                  </a:extLst>
+                </p:cNvPr>
+                <p:cNvSpPr txBox="1"/>
+                <p:nvPr/>
+              </p:nvSpPr>
+              <p:spPr>
+                <a:xfrm rot="4362618">
+                  <a:off x="3458937" y="2568974"/>
+                  <a:ext cx="697627" cy="338554"/>
+                </a:xfrm>
+                <a:prstGeom prst="rect">
+                  <a:avLst/>
+                </a:prstGeom>
+                <a:noFill/>
+              </p:spPr>
+              <p:txBody>
+                <a:bodyPr wrap="none" rtlCol="0">
+                  <a:spAutoFit/>
+                </a:bodyPr>
+                <a:lstStyle/>
+                <a:p>
+                  <a:r>
+                    <a:rPr lang="en-US" sz="1600" dirty="0">
+                      <a:latin typeface="Arial" panose="020B0604020202020204" pitchFamily="34" charset="0"/>
+                      <a:cs typeface="Arial" panose="020B0604020202020204" pitchFamily="34" charset="0"/>
+                    </a:rPr>
+                    <a:t>0.269</a:t>
+                  </a:r>
+                </a:p>
+              </p:txBody>
+            </p:sp>
+            <p:sp>
+              <p:nvSpPr>
+                <p:cNvPr id="4" name="Partial Circle 3">
+                  <a:extLst>
+                    <a:ext uri="{FF2B5EF4-FFF2-40B4-BE49-F238E27FC236}">
+                      <a16:creationId xmlns:a16="http://schemas.microsoft.com/office/drawing/2014/main" id="{55133956-DEE0-D2A6-D78D-A051F6E49A6D}"/>
+                    </a:ext>
+                  </a:extLst>
+                </p:cNvPr>
+                <p:cNvSpPr/>
+                <p:nvPr/>
+              </p:nvSpPr>
+              <p:spPr>
+                <a:xfrm>
+                  <a:off x="834945" y="1583249"/>
+                  <a:ext cx="3200400" cy="3200400"/>
+                </a:xfrm>
+                <a:prstGeom prst="pie">
+                  <a:avLst>
+                    <a:gd name="adj1" fmla="val 10752796"/>
+                    <a:gd name="adj2" fmla="val 15122580"/>
+                  </a:avLst>
+                </a:prstGeom>
+                <a:solidFill>
+                  <a:srgbClr val="B0DF9A">
+                    <a:alpha val="50000"/>
+                  </a:srgbClr>
+                </a:solidFill>
+                <a:ln>
+                  <a:noFill/>
+                </a:ln>
+              </p:spPr>
+              <p:style>
+                <a:lnRef idx="2">
+                  <a:schemeClr val="accent1">
+                    <a:shade val="15000"/>
+                  </a:schemeClr>
+                </a:lnRef>
+                <a:fillRef idx="1">
+                  <a:schemeClr val="accent1"/>
+                </a:fillRef>
+                <a:effectRef idx="0">
+                  <a:schemeClr val="accent1"/>
+                </a:effectRef>
+                <a:fontRef idx="minor">
+                  <a:schemeClr val="lt1"/>
+                </a:fontRef>
+              </p:style>
+              <p:txBody>
+                <a:bodyPr rtlCol="0" anchor="ctr"/>
+                <a:lstStyle/>
+                <a:p>
+                  <a:pPr algn="ctr"/>
+                  <a:endParaRPr lang="en-US">
+                    <a:solidFill>
+                      <a:schemeClr val="tx1"/>
+                    </a:solidFill>
+                  </a:endParaRPr>
+                </a:p>
+              </p:txBody>
+            </p:sp>
+            <p:sp>
+              <p:nvSpPr>
+                <p:cNvPr id="6" name="Partial Circle 5">
+                  <a:extLst>
+                    <a:ext uri="{FF2B5EF4-FFF2-40B4-BE49-F238E27FC236}">
+                      <a16:creationId xmlns:a16="http://schemas.microsoft.com/office/drawing/2014/main" id="{B52DD066-ADCF-D4E4-ECE7-BB272F54D86A}"/>
+                    </a:ext>
+                  </a:extLst>
+                </p:cNvPr>
+                <p:cNvSpPr/>
+                <p:nvPr/>
+              </p:nvSpPr>
+              <p:spPr>
+                <a:xfrm>
+                  <a:off x="834491" y="1601121"/>
+                  <a:ext cx="3200400" cy="3200400"/>
+                </a:xfrm>
+                <a:prstGeom prst="pie">
+                  <a:avLst>
+                    <a:gd name="adj1" fmla="val 2154102"/>
+                    <a:gd name="adj2" fmla="val 8665389"/>
+                  </a:avLst>
+                </a:prstGeom>
+                <a:solidFill>
+                  <a:srgbClr val="DFCA9A">
+                    <a:alpha val="50000"/>
+                  </a:srgbClr>
+                </a:solidFill>
+                <a:ln>
+                  <a:noFill/>
+                </a:ln>
+              </p:spPr>
+              <p:style>
+                <a:lnRef idx="2">
+                  <a:schemeClr val="accent1">
+                    <a:shade val="15000"/>
+                  </a:schemeClr>
+                </a:lnRef>
+                <a:fillRef idx="1">
+                  <a:schemeClr val="accent1"/>
+                </a:fillRef>
+                <a:effectRef idx="0">
+                  <a:schemeClr val="accent1"/>
+                </a:effectRef>
+                <a:fontRef idx="minor">
+                  <a:schemeClr val="lt1"/>
+                </a:fontRef>
+              </p:style>
+              <p:txBody>
+                <a:bodyPr rtlCol="0" anchor="ctr"/>
+                <a:lstStyle/>
+                <a:p>
+                  <a:pPr algn="ctr"/>
+                  <a:endParaRPr lang="en-US">
+                    <a:solidFill>
+                      <a:srgbClr val="00F5D4"/>
+                    </a:solidFill>
+                  </a:endParaRPr>
+                </a:p>
+              </p:txBody>
+            </p:sp>
+            <p:sp>
+              <p:nvSpPr>
+                <p:cNvPr id="9" name="TextBox 8">
+                  <a:extLst>
+                    <a:ext uri="{FF2B5EF4-FFF2-40B4-BE49-F238E27FC236}">
+                      <a16:creationId xmlns:a16="http://schemas.microsoft.com/office/drawing/2014/main" id="{1B8A4432-9D80-3920-79AB-17761A63CCE4}"/>
+                    </a:ext>
+                  </a:extLst>
+                </p:cNvPr>
+                <p:cNvSpPr txBox="1"/>
+                <p:nvPr/>
+              </p:nvSpPr>
+              <p:spPr>
+                <a:xfrm rot="19415433">
+                  <a:off x="1133864" y="1876187"/>
+                  <a:ext cx="773968" cy="338554"/>
+                </a:xfrm>
+                <a:prstGeom prst="rect">
+                  <a:avLst/>
+                </a:prstGeom>
+                <a:noFill/>
+              </p:spPr>
+              <p:txBody>
+                <a:bodyPr wrap="square">
+                  <a:spAutoFit/>
+                </a:bodyPr>
+                <a:lstStyle/>
+                <a:p>
+                  <a:r>
+                    <a:rPr lang="en-US" sz="1600" dirty="0">
+                      <a:latin typeface="Arial" panose="020B0604020202020204" pitchFamily="34" charset="0"/>
+                      <a:cs typeface="Arial" panose="020B0604020202020204" pitchFamily="34" charset="0"/>
+                    </a:rPr>
+                    <a:t>39.0%</a:t>
+                  </a:r>
+                </a:p>
+              </p:txBody>
+            </p:sp>
+            <p:sp>
+              <p:nvSpPr>
+                <p:cNvPr id="10" name="TextBox 9">
+                  <a:extLst>
+                    <a:ext uri="{FF2B5EF4-FFF2-40B4-BE49-F238E27FC236}">
+                      <a16:creationId xmlns:a16="http://schemas.microsoft.com/office/drawing/2014/main" id="{A4FA6DA4-C50F-BF3C-2068-3CDDD96A2CA1}"/>
+                    </a:ext>
+                  </a:extLst>
+                </p:cNvPr>
+                <p:cNvSpPr txBox="1"/>
+                <p:nvPr/>
+              </p:nvSpPr>
+              <p:spPr>
+                <a:xfrm rot="19460468">
+                  <a:off x="985508" y="1673182"/>
+                  <a:ext cx="773968" cy="338554"/>
+                </a:xfrm>
+                <a:prstGeom prst="rect">
+                  <a:avLst/>
+                </a:prstGeom>
+                <a:noFill/>
+              </p:spPr>
+              <p:txBody>
+                <a:bodyPr wrap="square">
+                  <a:spAutoFit/>
+                </a:bodyPr>
+                <a:lstStyle/>
+                <a:p>
+                  <a:r>
+                    <a:rPr lang="en-US" sz="1600" dirty="0">
+                      <a:latin typeface="Arial" panose="020B0604020202020204" pitchFamily="34" charset="0"/>
+                      <a:cs typeface="Arial" panose="020B0604020202020204" pitchFamily="34" charset="0"/>
+                    </a:rPr>
+                    <a:t>40.3%</a:t>
+                  </a:r>
+                </a:p>
+              </p:txBody>
+            </p:sp>
+            <p:sp>
+              <p:nvSpPr>
+                <p:cNvPr id="13" name="TextBox 12">
+                  <a:extLst>
+                    <a:ext uri="{FF2B5EF4-FFF2-40B4-BE49-F238E27FC236}">
+                      <a16:creationId xmlns:a16="http://schemas.microsoft.com/office/drawing/2014/main" id="{6DA95F59-4769-9113-A4D4-B68EC46B0EA5}"/>
+                    </a:ext>
+                  </a:extLst>
+                </p:cNvPr>
+                <p:cNvSpPr txBox="1"/>
+                <p:nvPr/>
+              </p:nvSpPr>
+              <p:spPr>
+                <a:xfrm rot="17343629">
+                  <a:off x="653436" y="2558305"/>
+                  <a:ext cx="773968" cy="338554"/>
+                </a:xfrm>
+                <a:prstGeom prst="rect">
+                  <a:avLst/>
+                </a:prstGeom>
+                <a:noFill/>
+              </p:spPr>
+              <p:txBody>
+                <a:bodyPr wrap="square">
+                  <a:spAutoFit/>
+                </a:bodyPr>
+                <a:lstStyle/>
+                <a:p>
+                  <a:r>
+                    <a:rPr lang="en-US" sz="1600" dirty="0">
+                      <a:latin typeface="Arial" panose="020B0604020202020204" pitchFamily="34" charset="0"/>
+                      <a:cs typeface="Arial" panose="020B0604020202020204" pitchFamily="34" charset="0"/>
+                    </a:rPr>
+                    <a:t>0.088</a:t>
+                  </a:r>
+                </a:p>
+              </p:txBody>
+            </p:sp>
+            <p:sp>
+              <p:nvSpPr>
+                <p:cNvPr id="14" name="TextBox 13">
+                  <a:extLst>
+                    <a:ext uri="{FF2B5EF4-FFF2-40B4-BE49-F238E27FC236}">
+                      <a16:creationId xmlns:a16="http://schemas.microsoft.com/office/drawing/2014/main" id="{B7E95F28-F1FC-C650-3EBD-E351DB9F46A8}"/>
+                    </a:ext>
+                  </a:extLst>
+                </p:cNvPr>
+                <p:cNvSpPr txBox="1"/>
+                <p:nvPr/>
+              </p:nvSpPr>
+              <p:spPr>
+                <a:xfrm rot="17357952">
+                  <a:off x="423558" y="2484236"/>
+                  <a:ext cx="773968" cy="338554"/>
+                </a:xfrm>
+                <a:prstGeom prst="rect">
+                  <a:avLst/>
+                </a:prstGeom>
+                <a:noFill/>
+              </p:spPr>
+              <p:txBody>
+                <a:bodyPr wrap="square">
+                  <a:spAutoFit/>
+                </a:bodyPr>
+                <a:lstStyle/>
+                <a:p>
+                  <a:r>
+                    <a:rPr lang="en-US" sz="1600" dirty="0">
+                      <a:latin typeface="Arial" panose="020B0604020202020204" pitchFamily="34" charset="0"/>
+                      <a:cs typeface="Arial" panose="020B0604020202020204" pitchFamily="34" charset="0"/>
+                    </a:rPr>
+                    <a:t>0.092</a:t>
+                  </a:r>
+                </a:p>
+              </p:txBody>
+            </p:sp>
+            <p:sp>
+              <p:nvSpPr>
+                <p:cNvPr id="35" name="TextBox 34">
+                  <a:extLst>
+                    <a:ext uri="{FF2B5EF4-FFF2-40B4-BE49-F238E27FC236}">
+                      <a16:creationId xmlns:a16="http://schemas.microsoft.com/office/drawing/2014/main" id="{166146C6-EDA7-37B5-6A57-EE381011686F}"/>
+                    </a:ext>
+                  </a:extLst>
+                </p:cNvPr>
+                <p:cNvSpPr txBox="1"/>
+                <p:nvPr/>
+              </p:nvSpPr>
+              <p:spPr>
+                <a:xfrm rot="19343146">
+                  <a:off x="2976370" y="4147458"/>
+                  <a:ext cx="773968" cy="338554"/>
+                </a:xfrm>
+                <a:prstGeom prst="rect">
+                  <a:avLst/>
+                </a:prstGeom>
+                <a:noFill/>
+              </p:spPr>
+              <p:txBody>
+                <a:bodyPr wrap="square">
+                  <a:spAutoFit/>
+                </a:bodyPr>
+                <a:lstStyle/>
+                <a:p>
+                  <a:r>
+                    <a:rPr lang="en-US" sz="1600" dirty="0">
+                      <a:latin typeface="Arial" panose="020B0604020202020204" pitchFamily="34" charset="0"/>
+                      <a:cs typeface="Arial" panose="020B0604020202020204" pitchFamily="34" charset="0"/>
+                    </a:rPr>
+                    <a:t>6.58</a:t>
+                  </a:r>
+                </a:p>
+              </p:txBody>
+            </p:sp>
+            <p:sp>
+              <p:nvSpPr>
+                <p:cNvPr id="37" name="TextBox 36">
+                  <a:extLst>
+                    <a:ext uri="{FF2B5EF4-FFF2-40B4-BE49-F238E27FC236}">
+                      <a16:creationId xmlns:a16="http://schemas.microsoft.com/office/drawing/2014/main" id="{3FC24BFE-A82B-DE4C-BF61-2E4E67F0170F}"/>
+                    </a:ext>
+                  </a:extLst>
+                </p:cNvPr>
+                <p:cNvSpPr txBox="1"/>
+                <p:nvPr/>
+              </p:nvSpPr>
+              <p:spPr>
+                <a:xfrm rot="19232585">
+                  <a:off x="3136626" y="4341842"/>
+                  <a:ext cx="773968" cy="338554"/>
+                </a:xfrm>
+                <a:prstGeom prst="rect">
+                  <a:avLst/>
+                </a:prstGeom>
+                <a:noFill/>
+              </p:spPr>
+              <p:txBody>
+                <a:bodyPr wrap="square">
+                  <a:spAutoFit/>
+                </a:bodyPr>
+                <a:lstStyle/>
+                <a:p>
+                  <a:r>
+                    <a:rPr lang="en-US" sz="1600" dirty="0">
+                      <a:latin typeface="Arial" panose="020B0604020202020204" pitchFamily="34" charset="0"/>
+                      <a:cs typeface="Arial" panose="020B0604020202020204" pitchFamily="34" charset="0"/>
+                    </a:rPr>
+                    <a:t>6.64</a:t>
+                  </a:r>
+                </a:p>
+              </p:txBody>
+            </p:sp>
+            <p:sp>
+              <p:nvSpPr>
+                <p:cNvPr id="39" name="TextBox 38">
+                  <a:extLst>
+                    <a:ext uri="{FF2B5EF4-FFF2-40B4-BE49-F238E27FC236}">
+                      <a16:creationId xmlns:a16="http://schemas.microsoft.com/office/drawing/2014/main" id="{2B698DDC-72CC-2E7E-B71C-A057E6194927}"/>
+                    </a:ext>
+                  </a:extLst>
+                </p:cNvPr>
+                <p:cNvSpPr txBox="1"/>
+                <p:nvPr/>
+              </p:nvSpPr>
+              <p:spPr>
+                <a:xfrm>
+                  <a:off x="2082230" y="4485408"/>
+                  <a:ext cx="773968" cy="338554"/>
+                </a:xfrm>
+                <a:prstGeom prst="rect">
+                  <a:avLst/>
+                </a:prstGeom>
+                <a:noFill/>
+              </p:spPr>
+              <p:txBody>
+                <a:bodyPr wrap="square">
+                  <a:spAutoFit/>
+                </a:bodyPr>
+                <a:lstStyle/>
+                <a:p>
+                  <a:r>
+                    <a:rPr lang="en-US" sz="1600" dirty="0">
+                      <a:latin typeface="Arial" panose="020B0604020202020204" pitchFamily="34" charset="0"/>
+                      <a:cs typeface="Arial" panose="020B0604020202020204" pitchFamily="34" charset="0"/>
+                    </a:rPr>
+                    <a:t>0.048</a:t>
+                  </a:r>
+                </a:p>
+              </p:txBody>
+            </p:sp>
+            <p:sp>
+              <p:nvSpPr>
+                <p:cNvPr id="40" name="TextBox 39">
+                  <a:extLst>
+                    <a:ext uri="{FF2B5EF4-FFF2-40B4-BE49-F238E27FC236}">
+                      <a16:creationId xmlns:a16="http://schemas.microsoft.com/office/drawing/2014/main" id="{9F1A45E2-2BBA-5CA3-D89C-F1EE0B33C7D4}"/>
+                    </a:ext>
+                  </a:extLst>
+                </p:cNvPr>
+                <p:cNvSpPr txBox="1"/>
+                <p:nvPr/>
+              </p:nvSpPr>
+              <p:spPr>
+                <a:xfrm>
+                  <a:off x="2089140" y="4732526"/>
+                  <a:ext cx="773968" cy="338554"/>
+                </a:xfrm>
+                <a:prstGeom prst="rect">
+                  <a:avLst/>
+                </a:prstGeom>
+                <a:noFill/>
+              </p:spPr>
+              <p:txBody>
+                <a:bodyPr wrap="square">
+                  <a:spAutoFit/>
+                </a:bodyPr>
+                <a:lstStyle/>
+                <a:p>
+                  <a:r>
+                    <a:rPr lang="en-US" sz="1600" dirty="0">
+                      <a:latin typeface="Arial" panose="020B0604020202020204" pitchFamily="34" charset="0"/>
+                      <a:cs typeface="Arial" panose="020B0604020202020204" pitchFamily="34" charset="0"/>
+                    </a:rPr>
+                    <a:t>0.057</a:t>
+                  </a:r>
+                </a:p>
+              </p:txBody>
+            </p:sp>
+            <p:sp>
+              <p:nvSpPr>
+                <p:cNvPr id="42" name="TextBox 41">
+                  <a:extLst>
+                    <a:ext uri="{FF2B5EF4-FFF2-40B4-BE49-F238E27FC236}">
+                      <a16:creationId xmlns:a16="http://schemas.microsoft.com/office/drawing/2014/main" id="{044E1905-0CE1-1B21-B484-B615163A5261}"/>
+                    </a:ext>
+                  </a:extLst>
+                </p:cNvPr>
+                <p:cNvSpPr txBox="1"/>
+                <p:nvPr/>
+              </p:nvSpPr>
+              <p:spPr>
+                <a:xfrm rot="2122247">
+                  <a:off x="1145732" y="4205060"/>
+                  <a:ext cx="842878" cy="338554"/>
+                </a:xfrm>
+                <a:prstGeom prst="rect">
+                  <a:avLst/>
+                </a:prstGeom>
+                <a:noFill/>
+              </p:spPr>
+              <p:txBody>
+                <a:bodyPr wrap="square">
+                  <a:spAutoFit/>
+                </a:bodyPr>
+                <a:lstStyle/>
+                <a:p>
+                  <a:r>
+                    <a:rPr lang="en-US" sz="1600" dirty="0">
+                      <a:latin typeface="Arial" panose="020B0604020202020204" pitchFamily="34" charset="0"/>
+                      <a:cs typeface="Arial" panose="020B0604020202020204" pitchFamily="34" charset="0"/>
+                    </a:rPr>
+                    <a:t>0.0016</a:t>
+                  </a:r>
+                </a:p>
+              </p:txBody>
+            </p:sp>
+            <p:sp>
+              <p:nvSpPr>
+                <p:cNvPr id="43" name="TextBox 42">
+                  <a:extLst>
+                    <a:ext uri="{FF2B5EF4-FFF2-40B4-BE49-F238E27FC236}">
+                      <a16:creationId xmlns:a16="http://schemas.microsoft.com/office/drawing/2014/main" id="{EFCA96EC-15ED-FD2C-FB2F-828B5ABB70AF}"/>
+                    </a:ext>
+                  </a:extLst>
+                </p:cNvPr>
+                <p:cNvSpPr txBox="1"/>
+                <p:nvPr/>
+              </p:nvSpPr>
+              <p:spPr>
+                <a:xfrm rot="2298318">
+                  <a:off x="1020562" y="4386045"/>
+                  <a:ext cx="842878" cy="338554"/>
+                </a:xfrm>
+                <a:prstGeom prst="rect">
+                  <a:avLst/>
+                </a:prstGeom>
+                <a:noFill/>
+              </p:spPr>
+              <p:txBody>
+                <a:bodyPr wrap="square">
+                  <a:spAutoFit/>
+                </a:bodyPr>
+                <a:lstStyle/>
+                <a:p>
+                  <a:r>
+                    <a:rPr lang="en-US" sz="1600" dirty="0">
+                      <a:latin typeface="Arial" panose="020B0604020202020204" pitchFamily="34" charset="0"/>
+                      <a:cs typeface="Arial" panose="020B0604020202020204" pitchFamily="34" charset="0"/>
+                    </a:rPr>
+                    <a:t>0.0022</a:t>
+                  </a:r>
+                </a:p>
+              </p:txBody>
+            </p:sp>
+          </p:grpSp>
+        </p:grpSp>
+        <p:grpSp>
+          <p:nvGrpSpPr>
+            <p:cNvPr id="290" name="Group 289">
+              <a:extLst>
+                <a:ext uri="{FF2B5EF4-FFF2-40B4-BE49-F238E27FC236}">
+                  <a16:creationId xmlns:a16="http://schemas.microsoft.com/office/drawing/2014/main" id="{E961B361-E855-D350-E9B9-D54FF6DB9CB3}"/>
+                </a:ext>
+              </a:extLst>
+            </p:cNvPr>
+            <p:cNvGrpSpPr/>
+            <p:nvPr/>
+          </p:nvGrpSpPr>
+          <p:grpSpPr>
+            <a:xfrm>
+              <a:off x="4156173" y="798266"/>
+              <a:ext cx="4019862" cy="4573614"/>
+              <a:chOff x="4215823" y="798266"/>
+              <a:chExt cx="4019862" cy="4573614"/>
+            </a:xfrm>
+          </p:grpSpPr>
+          <p:grpSp>
+            <p:nvGrpSpPr>
+              <p:cNvPr id="226" name="Group 225">
+                <a:extLst>
+                  <a:ext uri="{FF2B5EF4-FFF2-40B4-BE49-F238E27FC236}">
+                    <a16:creationId xmlns:a16="http://schemas.microsoft.com/office/drawing/2014/main" id="{8E37DB41-210E-9778-D3C0-3AC1C519D530}"/>
+                  </a:ext>
+                </a:extLst>
+              </p:cNvPr>
+              <p:cNvGrpSpPr/>
+              <p:nvPr/>
+            </p:nvGrpSpPr>
+            <p:grpSpPr>
+              <a:xfrm>
+                <a:off x="4215823" y="1344337"/>
+                <a:ext cx="4019862" cy="4027543"/>
+                <a:chOff x="445723" y="1232543"/>
+                <a:chExt cx="4019862" cy="4027543"/>
+              </a:xfrm>
+            </p:grpSpPr>
+            <p:sp>
+              <p:nvSpPr>
+                <p:cNvPr id="227" name="Partial Circle 226">
+                  <a:extLst>
+                    <a:ext uri="{FF2B5EF4-FFF2-40B4-BE49-F238E27FC236}">
+                      <a16:creationId xmlns:a16="http://schemas.microsoft.com/office/drawing/2014/main" id="{FF989215-050E-71C5-B983-625EE41F3C1C}"/>
+                    </a:ext>
+                  </a:extLst>
+                </p:cNvPr>
+                <p:cNvSpPr/>
+                <p:nvPr/>
+              </p:nvSpPr>
+              <p:spPr>
+                <a:xfrm>
+                  <a:off x="613962" y="1368091"/>
+                  <a:ext cx="3657600" cy="3657600"/>
+                </a:xfrm>
+                <a:prstGeom prst="pie">
+                  <a:avLst>
+                    <a:gd name="adj1" fmla="val 17242230"/>
+                    <a:gd name="adj2" fmla="val 21313"/>
+                  </a:avLst>
+                </a:prstGeom>
+                <a:solidFill>
+                  <a:srgbClr val="A79ADF">
+                    <a:alpha val="50000"/>
+                  </a:srgbClr>
+                </a:solidFill>
+                <a:ln>
+                  <a:noFill/>
+                </a:ln>
+              </p:spPr>
+              <p:style>
+                <a:lnRef idx="2">
+                  <a:schemeClr val="accent1">
+                    <a:shade val="15000"/>
+                  </a:schemeClr>
+                </a:lnRef>
+                <a:fillRef idx="1">
+                  <a:schemeClr val="accent1"/>
+                </a:fillRef>
+                <a:effectRef idx="0">
+                  <a:schemeClr val="accent1"/>
+                </a:effectRef>
+                <a:fontRef idx="minor">
+                  <a:schemeClr val="lt1"/>
+                </a:fontRef>
+              </p:style>
+              <p:txBody>
+                <a:bodyPr rtlCol="0" anchor="ctr"/>
+                <a:lstStyle/>
+                <a:p>
+                  <a:pPr algn="ctr"/>
+                  <a:endParaRPr lang="en-US">
+                    <a:solidFill>
+                      <a:schemeClr val="tx1"/>
+                    </a:solidFill>
+                  </a:endParaRPr>
+                </a:p>
+              </p:txBody>
+            </p:sp>
+            <p:sp>
+              <p:nvSpPr>
+                <p:cNvPr id="228" name="Partial Circle 227">
+                  <a:extLst>
+                    <a:ext uri="{FF2B5EF4-FFF2-40B4-BE49-F238E27FC236}">
+                      <a16:creationId xmlns:a16="http://schemas.microsoft.com/office/drawing/2014/main" id="{5C93ABE7-305D-5FE7-C0A7-43D433AAA157}"/>
+                    </a:ext>
+                  </a:extLst>
+                </p:cNvPr>
+                <p:cNvSpPr/>
+                <p:nvPr/>
+              </p:nvSpPr>
+              <p:spPr>
+                <a:xfrm>
+                  <a:off x="602759" y="1369023"/>
+                  <a:ext cx="3657600" cy="3657600"/>
+                </a:xfrm>
+                <a:prstGeom prst="pie">
+                  <a:avLst>
+                    <a:gd name="adj1" fmla="val 10761800"/>
+                    <a:gd name="adj2" fmla="val 15143024"/>
+                  </a:avLst>
+                </a:prstGeom>
+                <a:solidFill>
+                  <a:srgbClr val="B0DF9A">
+                    <a:alpha val="50000"/>
+                  </a:srgbClr>
+                </a:solidFill>
+                <a:ln>
+                  <a:noFill/>
+                </a:ln>
+              </p:spPr>
+              <p:style>
+                <a:lnRef idx="2">
+                  <a:schemeClr val="accent1">
+                    <a:shade val="15000"/>
+                  </a:schemeClr>
+                </a:lnRef>
+                <a:fillRef idx="1">
+                  <a:schemeClr val="accent1"/>
+                </a:fillRef>
+                <a:effectRef idx="0">
+                  <a:schemeClr val="accent1"/>
+                </a:effectRef>
+                <a:fontRef idx="minor">
+                  <a:schemeClr val="lt1"/>
+                </a:fontRef>
+              </p:style>
+              <p:txBody>
+                <a:bodyPr rtlCol="0" anchor="ctr"/>
+                <a:lstStyle/>
+                <a:p>
+                  <a:pPr algn="ctr"/>
+                  <a:endParaRPr lang="en-US">
+                    <a:solidFill>
+                      <a:schemeClr val="tx1"/>
+                    </a:solidFill>
+                  </a:endParaRPr>
+                </a:p>
+              </p:txBody>
+            </p:sp>
+            <p:sp>
+              <p:nvSpPr>
+                <p:cNvPr id="229" name="Partial Circle 228">
+                  <a:extLst>
+                    <a:ext uri="{FF2B5EF4-FFF2-40B4-BE49-F238E27FC236}">
+                      <a16:creationId xmlns:a16="http://schemas.microsoft.com/office/drawing/2014/main" id="{82EFC70D-4484-DB71-6A82-CF3D62103919}"/>
+                    </a:ext>
+                  </a:extLst>
+                </p:cNvPr>
+                <p:cNvSpPr/>
+                <p:nvPr/>
+              </p:nvSpPr>
+              <p:spPr>
+                <a:xfrm>
+                  <a:off x="826871" y="1601122"/>
+                  <a:ext cx="3200400" cy="3200400"/>
+                </a:xfrm>
+                <a:prstGeom prst="pie">
+                  <a:avLst>
+                    <a:gd name="adj1" fmla="val 17267760"/>
+                    <a:gd name="adj2" fmla="val 6512"/>
+                  </a:avLst>
+                </a:prstGeom>
+                <a:solidFill>
+                  <a:srgbClr val="A79ADF">
+                    <a:alpha val="50000"/>
+                  </a:srgbClr>
+                </a:solidFill>
+                <a:ln>
+                  <a:noFill/>
+                </a:ln>
+              </p:spPr>
+              <p:style>
+                <a:lnRef idx="2">
+                  <a:schemeClr val="accent1">
+                    <a:shade val="15000"/>
+                  </a:schemeClr>
+                </a:lnRef>
+                <a:fillRef idx="1">
+                  <a:schemeClr val="accent1"/>
+                </a:fillRef>
+                <a:effectRef idx="0">
+                  <a:schemeClr val="accent1"/>
+                </a:effectRef>
+                <a:fontRef idx="minor">
+                  <a:schemeClr val="lt1"/>
+                </a:fontRef>
+              </p:style>
+              <p:txBody>
+                <a:bodyPr rtlCol="0" anchor="ctr"/>
+                <a:lstStyle/>
+                <a:p>
+                  <a:pPr algn="ctr"/>
+                  <a:endParaRPr lang="en-US">
+                    <a:solidFill>
+                      <a:schemeClr val="tx1"/>
+                    </a:solidFill>
+                  </a:endParaRPr>
+                </a:p>
+              </p:txBody>
+            </p:sp>
+            <p:sp>
+              <p:nvSpPr>
+                <p:cNvPr id="230" name="Partial Circle 229">
+                  <a:extLst>
+                    <a:ext uri="{FF2B5EF4-FFF2-40B4-BE49-F238E27FC236}">
+                      <a16:creationId xmlns:a16="http://schemas.microsoft.com/office/drawing/2014/main" id="{831388B9-A2EA-2FDA-677B-03F298B31D7A}"/>
+                    </a:ext>
+                  </a:extLst>
+                </p:cNvPr>
+                <p:cNvSpPr/>
+                <p:nvPr/>
+              </p:nvSpPr>
+              <p:spPr>
+                <a:xfrm>
+                  <a:off x="600841" y="1386003"/>
+                  <a:ext cx="3657600" cy="3657600"/>
+                </a:xfrm>
+                <a:prstGeom prst="pie">
+                  <a:avLst>
+                    <a:gd name="adj1" fmla="val 2118224"/>
+                    <a:gd name="adj2" fmla="val 8689523"/>
+                  </a:avLst>
+                </a:prstGeom>
+                <a:solidFill>
+                  <a:srgbClr val="DFCA9A">
+                    <a:alpha val="50000"/>
+                  </a:srgbClr>
+                </a:solidFill>
+                <a:ln>
+                  <a:noFill/>
+                </a:ln>
+              </p:spPr>
+              <p:style>
+                <a:lnRef idx="2">
+                  <a:schemeClr val="accent1">
+                    <a:shade val="15000"/>
+                  </a:schemeClr>
+                </a:lnRef>
+                <a:fillRef idx="1">
+                  <a:schemeClr val="accent1"/>
+                </a:fillRef>
+                <a:effectRef idx="0">
+                  <a:schemeClr val="accent1"/>
+                </a:effectRef>
+                <a:fontRef idx="minor">
+                  <a:schemeClr val="lt1"/>
+                </a:fontRef>
+              </p:style>
+              <p:txBody>
+                <a:bodyPr rtlCol="0" anchor="ctr"/>
+                <a:lstStyle/>
+                <a:p>
+                  <a:pPr algn="ctr"/>
+                  <a:endParaRPr lang="en-US">
+                    <a:solidFill>
+                      <a:srgbClr val="00F5D4"/>
+                    </a:solidFill>
+                  </a:endParaRPr>
+                </a:p>
+              </p:txBody>
+            </p:sp>
+            <p:grpSp>
+              <p:nvGrpSpPr>
+                <p:cNvPr id="231" name="Group 230">
+                  <a:extLst>
+                    <a:ext uri="{FF2B5EF4-FFF2-40B4-BE49-F238E27FC236}">
+                      <a16:creationId xmlns:a16="http://schemas.microsoft.com/office/drawing/2014/main" id="{983CF599-3FA2-26CA-E38A-525B1DCD7B0C}"/>
+                    </a:ext>
+                  </a:extLst>
+                </p:cNvPr>
+                <p:cNvGrpSpPr/>
+                <p:nvPr/>
+              </p:nvGrpSpPr>
+              <p:grpSpPr>
+                <a:xfrm>
+                  <a:off x="445723" y="1232543"/>
+                  <a:ext cx="4019862" cy="4027543"/>
+                  <a:chOff x="325572" y="1263648"/>
+                  <a:chExt cx="4058675" cy="4003182"/>
+                </a:xfrm>
+              </p:grpSpPr>
+              <mc:AlternateContent xmlns:mc="http://schemas.openxmlformats.org/markup-compatibility/2006">
+                <mc:Choice xmlns:a14="http://schemas.microsoft.com/office/drawing/2010/main" Requires="a14">
+                  <p:sp>
+                    <p:nvSpPr>
+                      <p:cNvPr id="250" name="文本框 14">
+                        <a:extLst>
+                          <a:ext uri="{FF2B5EF4-FFF2-40B4-BE49-F238E27FC236}">
+                            <a16:creationId xmlns:a16="http://schemas.microsoft.com/office/drawing/2014/main" id="{7A009E24-8E11-9226-448A-7981A63D3FE4}"/>
+                          </a:ext>
+                        </a:extLst>
+                      </p:cNvPr>
+                      <p:cNvSpPr txBox="1"/>
+                      <p:nvPr/>
+                    </p:nvSpPr>
+                    <p:spPr>
+                      <a:xfrm>
+                        <a:off x="4077865" y="2320995"/>
+                        <a:ext cx="306382" cy="396425"/>
+                      </a:xfrm>
+                      <a:prstGeom prst="rect">
+                        <a:avLst/>
+                      </a:prstGeom>
+                      <a:noFill/>
+                    </p:spPr>
+                    <p:txBody>
+                      <a:bodyPr wrap="square" rtlCol="0">
+                        <a:noAutofit/>
+                      </a:bodyPr>
+                      <a:lstStyle/>
+                      <a:p>
+                        <a:pPr algn="ctr"/>
+                        <a14:m>
+                          <m:oMathPara xmlns:m="http://schemas.openxmlformats.org/officeDocument/2006/math">
+                            <m:oMathParaPr>
+                              <m:jc m:val="center"/>
+                            </m:oMathParaPr>
+                            <m:oMath xmlns:m="http://schemas.openxmlformats.org/officeDocument/2006/math">
+                              <m:r>
+                                <a:rPr lang="en-US" altLang="zh-CN" sz="2000" i="1">
+                                  <a:latin typeface="Cambria Math" panose="02040503050406030204" charset="0"/>
+                                  <a:ea typeface="MS Mincho" charset="0"/>
+                                  <a:cs typeface="Cambria Math" panose="02040503050406030204" charset="0"/>
+                                </a:rPr>
+                                <m:t>𝛽</m:t>
+                              </m:r>
+                            </m:oMath>
+                          </m:oMathPara>
+                        </a14:m>
+                        <a:endParaRPr lang="en-US" altLang="zh-CN" sz="2000" i="1" dirty="0">
+                          <a:latin typeface="Cambria Math" panose="02040503050406030204" charset="0"/>
+                          <a:ea typeface="MS Mincho" charset="0"/>
+                          <a:cs typeface="Cambria Math" panose="02040503050406030204" charset="0"/>
+                        </a:endParaRPr>
+                      </a:p>
+                    </p:txBody>
+                  </p:sp>
+                </mc:Choice>
+                <mc:Fallback>
+                  <p:sp>
+                    <p:nvSpPr>
+                      <p:cNvPr id="250" name="文本框 14">
+                        <a:extLst>
+                          <a:ext uri="{FF2B5EF4-FFF2-40B4-BE49-F238E27FC236}">
+                            <a16:creationId xmlns:a16="http://schemas.microsoft.com/office/drawing/2014/main" id="{7A009E24-8E11-9226-448A-7981A63D3FE4}"/>
+                          </a:ext>
+                        </a:extLst>
+                      </p:cNvPr>
+                      <p:cNvSpPr txBox="1">
+                        <a:spLocks noRot="1" noChangeAspect="1" noMove="1" noResize="1" noEditPoints="1" noAdjustHandles="1" noChangeArrowheads="1" noChangeShapeType="1" noTextEdit="1"/>
+                      </p:cNvSpPr>
+                      <p:nvPr/>
+                    </p:nvSpPr>
+                    <p:spPr>
+                      <a:xfrm>
+                        <a:off x="4077865" y="2320995"/>
+                        <a:ext cx="306382" cy="396425"/>
+                      </a:xfrm>
+                      <a:prstGeom prst="rect">
+                        <a:avLst/>
+                      </a:prstGeom>
+                      <a:blipFill>
+                        <a:blip r:embed="rId10"/>
+                        <a:stretch>
+                          <a:fillRect l="-24000" r="-4000" b="-18462"/>
+                        </a:stretch>
+                      </a:blipFill>
+                    </p:spPr>
+                    <p:txBody>
+                      <a:bodyPr/>
+                      <a:lstStyle/>
+                      <a:p>
+                        <a:r>
+                          <a:rPr lang="en-US">
+                            <a:noFill/>
+                          </a:rPr>
+                          <a:t> </a:t>
+                        </a:r>
+                      </a:p>
+                    </p:txBody>
+                  </p:sp>
+                </mc:Fallback>
+              </mc:AlternateContent>
+              <mc:AlternateContent xmlns:mc="http://schemas.openxmlformats.org/markup-compatibility/2006">
+                <mc:Choice xmlns:a14="http://schemas.microsoft.com/office/drawing/2010/main" Requires="a14">
+                  <p:sp>
+                    <p:nvSpPr>
+                      <p:cNvPr id="251" name="文本框 21">
+                        <a:extLst>
+                          <a:ext uri="{FF2B5EF4-FFF2-40B4-BE49-F238E27FC236}">
+                            <a16:creationId xmlns:a16="http://schemas.microsoft.com/office/drawing/2014/main" id="{61F43B07-9966-0E20-D657-3F471B84C154}"/>
+                          </a:ext>
+                        </a:extLst>
+                      </p:cNvPr>
+                      <p:cNvSpPr txBox="1"/>
+                      <p:nvPr/>
+                    </p:nvSpPr>
+                    <p:spPr>
+                      <a:xfrm>
+                        <a:off x="880377" y="1263648"/>
+                        <a:ext cx="641384" cy="414627"/>
+                      </a:xfrm>
+                      <a:prstGeom prst="rect">
+                        <a:avLst/>
+                      </a:prstGeom>
+                      <a:noFill/>
+                    </p:spPr>
+                    <p:txBody>
+                      <a:bodyPr wrap="square" rtlCol="0">
+                        <a:noAutofit/>
+                      </a:bodyPr>
+                      <a:lstStyle/>
+                      <a:p>
+                        <a:pPr algn="ctr"/>
+                        <a14:m>
+                          <m:oMathPara xmlns:m="http://schemas.openxmlformats.org/officeDocument/2006/math">
+                            <m:oMathParaPr>
+                              <m:jc m:val="center"/>
+                            </m:oMathParaPr>
+                            <m:oMath xmlns:m="http://schemas.openxmlformats.org/officeDocument/2006/math">
+                              <m:sSub>
+                                <m:sSubPr>
+                                  <m:ctrlPr>
+                                    <a:rPr lang="en-US" altLang="zh-CN" sz="2000" i="1" smtClean="0">
+                                      <a:latin typeface="Cambria Math" panose="02040503050406030204" pitchFamily="18" charset="0"/>
+                                      <a:ea typeface="MS Mincho" charset="0"/>
+                                    </a:rPr>
+                                  </m:ctrlPr>
+                                </m:sSubPr>
+                                <m:e>
+                                  <m:r>
+                                    <a:rPr lang="en-US" altLang="zh-CN" sz="2000" b="0" i="1" smtClean="0">
+                                      <a:latin typeface="Cambria Math" panose="02040503050406030204" pitchFamily="18" charset="0"/>
+                                      <a:ea typeface="MS Mincho" charset="0"/>
+                                    </a:rPr>
+                                    <m:t>𝑝</m:t>
+                                  </m:r>
+                                </m:e>
+                                <m:sub>
+                                  <m:r>
+                                    <a:rPr lang="zh-CN" altLang="en-US" sz="2000" i="1" smtClean="0">
+                                      <a:latin typeface="Cambria Math" panose="02040503050406030204" pitchFamily="18" charset="0"/>
+                                      <a:ea typeface="MS Mincho" charset="0"/>
+                                    </a:rPr>
+                                    <m:t>𝜅</m:t>
+                                  </m:r>
+                                </m:sub>
+                              </m:sSub>
+                            </m:oMath>
+                          </m:oMathPara>
+                        </a14:m>
+                        <a:endParaRPr lang="en-US" altLang="zh-CN" sz="2000" i="1" dirty="0">
+                          <a:latin typeface="Cambria Math" panose="02040503050406030204" charset="0"/>
+                          <a:ea typeface="MS Mincho" charset="0"/>
+                          <a:cs typeface="Cambria Math" panose="02040503050406030204" charset="0"/>
+                        </a:endParaRPr>
+                      </a:p>
+                    </p:txBody>
+                  </p:sp>
+                </mc:Choice>
+                <mc:Fallback>
+                  <p:sp>
+                    <p:nvSpPr>
+                      <p:cNvPr id="251" name="文本框 21">
+                        <a:extLst>
+                          <a:ext uri="{FF2B5EF4-FFF2-40B4-BE49-F238E27FC236}">
+                            <a16:creationId xmlns:a16="http://schemas.microsoft.com/office/drawing/2014/main" id="{61F43B07-9966-0E20-D657-3F471B84C154}"/>
+                          </a:ext>
+                        </a:extLst>
+                      </p:cNvPr>
+                      <p:cNvSpPr txBox="1">
+                        <a:spLocks noRot="1" noChangeAspect="1" noMove="1" noResize="1" noEditPoints="1" noAdjustHandles="1" noChangeArrowheads="1" noChangeShapeType="1" noTextEdit="1"/>
+                      </p:cNvSpPr>
+                      <p:nvPr/>
+                    </p:nvSpPr>
+                    <p:spPr>
+                      <a:xfrm>
+                        <a:off x="880377" y="1263648"/>
+                        <a:ext cx="641384" cy="414627"/>
+                      </a:xfrm>
+                      <a:prstGeom prst="rect">
+                        <a:avLst/>
+                      </a:prstGeom>
+                      <a:blipFill>
+                        <a:blip r:embed="rId11"/>
+                        <a:stretch>
+                          <a:fillRect b="-5882"/>
+                        </a:stretch>
+                      </a:blipFill>
+                    </p:spPr>
+                    <p:txBody>
+                      <a:bodyPr/>
+                      <a:lstStyle/>
+                      <a:p>
+                        <a:r>
+                          <a:rPr lang="en-US">
+                            <a:noFill/>
+                          </a:rPr>
+                          <a:t> </a:t>
+                        </a:r>
+                      </a:p>
+                    </p:txBody>
+                  </p:sp>
+                </mc:Fallback>
+              </mc:AlternateContent>
+              <mc:AlternateContent xmlns:mc="http://schemas.openxmlformats.org/markup-compatibility/2006">
+                <mc:Choice xmlns:a14="http://schemas.microsoft.com/office/drawing/2010/main" Requires="a14">
+                  <p:sp>
+                    <p:nvSpPr>
+                      <p:cNvPr id="252" name="文本框 22">
+                        <a:extLst>
+                          <a:ext uri="{FF2B5EF4-FFF2-40B4-BE49-F238E27FC236}">
+                            <a16:creationId xmlns:a16="http://schemas.microsoft.com/office/drawing/2014/main" id="{32934DC1-A969-4C53-03E0-50496C45FB6F}"/>
+                          </a:ext>
+                        </a:extLst>
+                      </p:cNvPr>
+                      <p:cNvSpPr txBox="1"/>
+                      <p:nvPr/>
+                    </p:nvSpPr>
+                    <p:spPr>
+                      <a:xfrm>
+                        <a:off x="325572" y="2329605"/>
+                        <a:ext cx="262815" cy="369327"/>
+                      </a:xfrm>
+                      <a:prstGeom prst="rect">
+                        <a:avLst/>
+                      </a:prstGeom>
+                      <a:noFill/>
+                    </p:spPr>
+                    <p:txBody>
+                      <a:bodyPr wrap="square" rtlCol="0">
+                        <a:noAutofit/>
+                      </a:bodyPr>
+                      <a:lstStyle/>
+                      <a:p>
+                        <a:pPr algn="ctr"/>
+                        <a14:m>
+                          <m:oMathPara xmlns:m="http://schemas.openxmlformats.org/officeDocument/2006/math">
+                            <m:oMathParaPr>
+                              <m:jc m:val="center"/>
+                            </m:oMathParaPr>
+                            <m:oMath xmlns:m="http://schemas.openxmlformats.org/officeDocument/2006/math">
+                              <m:r>
+                                <a:rPr lang="en-US" altLang="zh-CN" sz="2000" i="1">
+                                  <a:latin typeface="Cambria Math" panose="02040503050406030204" charset="0"/>
+                                  <a:ea typeface="MS Mincho" charset="0"/>
+                                  <a:cs typeface="Cambria Math" panose="02040503050406030204" charset="0"/>
+                                </a:rPr>
+                                <m:t>𝛿</m:t>
+                              </m:r>
+                            </m:oMath>
+                          </m:oMathPara>
+                        </a14:m>
+                        <a:endParaRPr lang="en-US" altLang="zh-CN" sz="2000" i="1" dirty="0">
+                          <a:latin typeface="Cambria Math" panose="02040503050406030204" charset="0"/>
+                          <a:ea typeface="MS Mincho" charset="0"/>
+                          <a:cs typeface="Cambria Math" panose="02040503050406030204" charset="0"/>
+                        </a:endParaRPr>
+                      </a:p>
+                    </p:txBody>
+                  </p:sp>
+                </mc:Choice>
+                <mc:Fallback>
+                  <p:sp>
+                    <p:nvSpPr>
+                      <p:cNvPr id="252" name="文本框 22">
+                        <a:extLst>
+                          <a:ext uri="{FF2B5EF4-FFF2-40B4-BE49-F238E27FC236}">
+                            <a16:creationId xmlns:a16="http://schemas.microsoft.com/office/drawing/2014/main" id="{32934DC1-A969-4C53-03E0-50496C45FB6F}"/>
+                          </a:ext>
+                        </a:extLst>
+                      </p:cNvPr>
+                      <p:cNvSpPr txBox="1">
+                        <a:spLocks noRot="1" noChangeAspect="1" noMove="1" noResize="1" noEditPoints="1" noAdjustHandles="1" noChangeArrowheads="1" noChangeShapeType="1" noTextEdit="1"/>
+                      </p:cNvSpPr>
+                      <p:nvPr/>
+                    </p:nvSpPr>
+                    <p:spPr>
+                      <a:xfrm>
+                        <a:off x="325572" y="2329605"/>
+                        <a:ext cx="262815" cy="369327"/>
+                      </a:xfrm>
+                      <a:prstGeom prst="rect">
+                        <a:avLst/>
+                      </a:prstGeom>
+                      <a:blipFill>
+                        <a:blip r:embed="rId12"/>
+                        <a:stretch>
+                          <a:fillRect l="-23810" r="-2381" b="-4918"/>
+                        </a:stretch>
+                      </a:blipFill>
+                    </p:spPr>
+                    <p:txBody>
+                      <a:bodyPr/>
+                      <a:lstStyle/>
+                      <a:p>
+                        <a:r>
+                          <a:rPr lang="en-US">
+                            <a:noFill/>
+                          </a:rPr>
+                          <a:t> </a:t>
+                        </a:r>
+                      </a:p>
+                    </p:txBody>
+                  </p:sp>
+                </mc:Fallback>
+              </mc:AlternateContent>
+              <mc:AlternateContent xmlns:mc="http://schemas.openxmlformats.org/markup-compatibility/2006">
+                <mc:Choice xmlns:a14="http://schemas.microsoft.com/office/drawing/2010/main" Requires="a14">
+                  <p:sp>
+                    <p:nvSpPr>
+                      <p:cNvPr id="253" name="文本框 6">
+                        <a:extLst>
+                          <a:ext uri="{FF2B5EF4-FFF2-40B4-BE49-F238E27FC236}">
+                            <a16:creationId xmlns:a16="http://schemas.microsoft.com/office/drawing/2014/main" id="{9FCD1623-C9D1-B0C3-D4A2-1B4A33AF4890}"/>
+                          </a:ext>
+                        </a:extLst>
+                      </p:cNvPr>
+                      <p:cNvSpPr txBox="1"/>
+                      <p:nvPr/>
+                    </p:nvSpPr>
+                    <p:spPr>
+                      <a:xfrm>
+                        <a:off x="3531763" y="4546812"/>
+                        <a:ext cx="306382" cy="256543"/>
+                      </a:xfrm>
+                      <a:prstGeom prst="rect">
+                        <a:avLst/>
+                      </a:prstGeom>
+                      <a:noFill/>
+                    </p:spPr>
+                    <p:txBody>
+                      <a:bodyPr wrap="square" rtlCol="0">
+                        <a:noAutofit/>
+                      </a:bodyPr>
+                      <a:lstStyle/>
+                      <a:p>
+                        <a:pPr algn="ctr"/>
+                        <a14:m>
+                          <m:oMathPara xmlns:m="http://schemas.openxmlformats.org/officeDocument/2006/math">
+                            <m:oMathParaPr>
+                              <m:jc m:val="center"/>
+                            </m:oMathParaPr>
+                            <m:oMath xmlns:m="http://schemas.openxmlformats.org/officeDocument/2006/math">
+                              <m:r>
+                                <a:rPr lang="en-US" altLang="zh-CN" sz="2000" i="1">
+                                  <a:latin typeface="Cambria Math" panose="02040503050406030204" charset="0"/>
+                                  <a:ea typeface="MS Mincho" charset="0"/>
+                                  <a:cs typeface="Cambria Math" panose="02040503050406030204" charset="0"/>
+                                </a:rPr>
+                                <m:t>𝐴</m:t>
+                              </m:r>
+                            </m:oMath>
+                          </m:oMathPara>
+                        </a14:m>
+                        <a:endParaRPr lang="en-US" altLang="zh-CN" sz="2000" i="1" dirty="0">
+                          <a:latin typeface="Cambria Math" panose="02040503050406030204" charset="0"/>
+                          <a:ea typeface="MS Mincho" charset="0"/>
+                          <a:cs typeface="Cambria Math" panose="02040503050406030204" charset="0"/>
+                        </a:endParaRPr>
+                      </a:p>
+                    </p:txBody>
+                  </p:sp>
+                </mc:Choice>
+                <mc:Fallback>
+                  <p:sp>
+                    <p:nvSpPr>
+                      <p:cNvPr id="253" name="文本框 6">
+                        <a:extLst>
+                          <a:ext uri="{FF2B5EF4-FFF2-40B4-BE49-F238E27FC236}">
+                            <a16:creationId xmlns:a16="http://schemas.microsoft.com/office/drawing/2014/main" id="{9FCD1623-C9D1-B0C3-D4A2-1B4A33AF4890}"/>
+                          </a:ext>
+                        </a:extLst>
+                      </p:cNvPr>
+                      <p:cNvSpPr txBox="1">
+                        <a:spLocks noRot="1" noChangeAspect="1" noMove="1" noResize="1" noEditPoints="1" noAdjustHandles="1" noChangeArrowheads="1" noChangeShapeType="1" noTextEdit="1"/>
+                      </p:cNvSpPr>
+                      <p:nvPr/>
+                    </p:nvSpPr>
+                    <p:spPr>
+                      <a:xfrm>
+                        <a:off x="3531763" y="4546812"/>
+                        <a:ext cx="306382" cy="256543"/>
+                      </a:xfrm>
+                      <a:prstGeom prst="rect">
+                        <a:avLst/>
+                      </a:prstGeom>
+                      <a:blipFill>
+                        <a:blip r:embed="rId13"/>
+                        <a:stretch>
+                          <a:fillRect l="-16327" b="-46512"/>
+                        </a:stretch>
+                      </a:blipFill>
+                    </p:spPr>
+                    <p:txBody>
+                      <a:bodyPr/>
+                      <a:lstStyle/>
+                      <a:p>
+                        <a:r>
+                          <a:rPr lang="en-US">
+                            <a:noFill/>
+                          </a:rPr>
+                          <a:t> </a:t>
+                        </a:r>
+                      </a:p>
+                    </p:txBody>
+                  </p:sp>
+                </mc:Fallback>
+              </mc:AlternateContent>
+              <mc:AlternateContent xmlns:mc="http://schemas.openxmlformats.org/markup-compatibility/2006">
+                <mc:Choice xmlns:a14="http://schemas.microsoft.com/office/drawing/2010/main" Requires="a14">
+                  <p:sp>
+                    <p:nvSpPr>
+                      <p:cNvPr id="254" name="文本框 7">
+                        <a:extLst>
+                          <a:ext uri="{FF2B5EF4-FFF2-40B4-BE49-F238E27FC236}">
+                            <a16:creationId xmlns:a16="http://schemas.microsoft.com/office/drawing/2014/main" id="{32B72E7E-CF40-26F3-4228-612DDF1FBC97}"/>
+                          </a:ext>
+                        </a:extLst>
+                      </p:cNvPr>
+                      <p:cNvSpPr txBox="1"/>
+                      <p:nvPr/>
+                    </p:nvSpPr>
+                    <p:spPr>
+                      <a:xfrm>
+                        <a:off x="2216862" y="5010287"/>
+                        <a:ext cx="306382" cy="256543"/>
+                      </a:xfrm>
+                      <a:prstGeom prst="rect">
+                        <a:avLst/>
+                      </a:prstGeom>
+                      <a:noFill/>
+                    </p:spPr>
+                    <p:txBody>
+                      <a:bodyPr wrap="square" rtlCol="0">
+                        <a:noAutofit/>
+                      </a:bodyPr>
+                      <a:lstStyle/>
+                      <a:p>
+                        <a:pPr algn="ctr"/>
+                        <a14:m>
+                          <m:oMathPara xmlns:m="http://schemas.openxmlformats.org/officeDocument/2006/math">
+                            <m:oMathParaPr>
+                              <m:jc m:val="center"/>
+                            </m:oMathParaPr>
+                            <m:oMath xmlns:m="http://schemas.openxmlformats.org/officeDocument/2006/math">
+                              <m:r>
+                                <a:rPr lang="en-US" altLang="zh-CN" sz="2000" b="0" i="1" smtClean="0">
+                                  <a:latin typeface="Cambria Math" panose="02040503050406030204" pitchFamily="18" charset="0"/>
+                                  <a:ea typeface="MS Mincho" charset="0"/>
+                                  <a:cs typeface="Cambria Math" panose="02040503050406030204" charset="0"/>
+                                </a:rPr>
+                                <m:t>|</m:t>
+                              </m:r>
+                              <m:r>
+                                <a:rPr lang="en-US" altLang="zh-CN" sz="2000" i="1" smtClean="0">
+                                  <a:latin typeface="Cambria Math" panose="02040503050406030204" charset="0"/>
+                                  <a:ea typeface="MS Mincho" charset="0"/>
+                                  <a:cs typeface="Cambria Math" panose="02040503050406030204" charset="0"/>
+                                </a:rPr>
+                                <m:t>𝐵</m:t>
+                              </m:r>
+                              <m:r>
+                                <a:rPr lang="en-US" altLang="zh-CN" sz="2000" b="0" i="1" smtClean="0">
+                                  <a:latin typeface="Cambria Math" panose="02040503050406030204" pitchFamily="18" charset="0"/>
+                                  <a:ea typeface="MS Mincho" charset="0"/>
+                                  <a:cs typeface="Cambria Math" panose="02040503050406030204" charset="0"/>
+                                </a:rPr>
+                                <m:t>|</m:t>
+                              </m:r>
+                            </m:oMath>
+                          </m:oMathPara>
+                        </a14:m>
+                        <a:endParaRPr lang="en-US" altLang="zh-CN" sz="2000" i="1" dirty="0">
+                          <a:latin typeface="Cambria Math" panose="02040503050406030204" charset="0"/>
+                          <a:ea typeface="MS Mincho" charset="0"/>
+                          <a:cs typeface="Cambria Math" panose="02040503050406030204" charset="0"/>
+                        </a:endParaRPr>
+                      </a:p>
+                    </p:txBody>
+                  </p:sp>
+                </mc:Choice>
+                <mc:Fallback>
+                  <p:sp>
+                    <p:nvSpPr>
+                      <p:cNvPr id="254" name="文本框 7">
+                        <a:extLst>
+                          <a:ext uri="{FF2B5EF4-FFF2-40B4-BE49-F238E27FC236}">
+                            <a16:creationId xmlns:a16="http://schemas.microsoft.com/office/drawing/2014/main" id="{32B72E7E-CF40-26F3-4228-612DDF1FBC97}"/>
+                          </a:ext>
+                        </a:extLst>
+                      </p:cNvPr>
+                      <p:cNvSpPr txBox="1">
+                        <a:spLocks noRot="1" noChangeAspect="1" noMove="1" noResize="1" noEditPoints="1" noAdjustHandles="1" noChangeArrowheads="1" noChangeShapeType="1" noTextEdit="1"/>
+                      </p:cNvSpPr>
+                      <p:nvPr/>
+                    </p:nvSpPr>
+                    <p:spPr>
+                      <a:xfrm>
+                        <a:off x="2216862" y="5010287"/>
+                        <a:ext cx="306382" cy="256543"/>
+                      </a:xfrm>
+                      <a:prstGeom prst="rect">
+                        <a:avLst/>
+                      </a:prstGeom>
+                      <a:blipFill>
+                        <a:blip r:embed="rId14"/>
+                        <a:stretch>
+                          <a:fillRect l="-54000" r="-34000" b="-83333"/>
+                        </a:stretch>
+                      </a:blipFill>
+                    </p:spPr>
+                    <p:txBody>
+                      <a:bodyPr/>
+                      <a:lstStyle/>
+                      <a:p>
+                        <a:r>
+                          <a:rPr lang="en-US">
+                            <a:noFill/>
+                          </a:rPr>
+                          <a:t> </a:t>
+                        </a:r>
+                      </a:p>
+                    </p:txBody>
+                  </p:sp>
+                </mc:Fallback>
+              </mc:AlternateContent>
+              <mc:AlternateContent xmlns:mc="http://schemas.openxmlformats.org/markup-compatibility/2006">
+                <mc:Choice xmlns:a14="http://schemas.microsoft.com/office/drawing/2010/main" Requires="a14">
+                  <p:sp>
+                    <p:nvSpPr>
+                      <p:cNvPr id="255" name="文本框 8">
+                        <a:extLst>
+                          <a:ext uri="{FF2B5EF4-FFF2-40B4-BE49-F238E27FC236}">
+                            <a16:creationId xmlns:a16="http://schemas.microsoft.com/office/drawing/2014/main" id="{C5A9C9AD-8103-B106-7A66-D943E4C7679C}"/>
+                          </a:ext>
+                        </a:extLst>
+                      </p:cNvPr>
+                      <p:cNvSpPr txBox="1"/>
+                      <p:nvPr/>
+                    </p:nvSpPr>
+                    <p:spPr>
+                      <a:xfrm>
+                        <a:off x="967720" y="4604017"/>
+                        <a:ext cx="306382" cy="256543"/>
+                      </a:xfrm>
+                      <a:prstGeom prst="rect">
+                        <a:avLst/>
+                      </a:prstGeom>
+                      <a:noFill/>
+                    </p:spPr>
+                    <p:txBody>
+                      <a:bodyPr wrap="square" rtlCol="0">
+                        <a:noAutofit/>
+                      </a:bodyPr>
+                      <a:lstStyle/>
+                      <a:p>
+                        <a:pPr algn="ctr"/>
+                        <a14:m>
+                          <m:oMathPara xmlns:m="http://schemas.openxmlformats.org/officeDocument/2006/math">
+                            <m:oMathParaPr>
+                              <m:jc m:val="center"/>
+                            </m:oMathParaPr>
+                            <m:oMath xmlns:m="http://schemas.openxmlformats.org/officeDocument/2006/math">
+                              <m:r>
+                                <a:rPr lang="en-US" altLang="zh-CN" sz="2000" i="1">
+                                  <a:latin typeface="Cambria Math" panose="02040503050406030204" charset="0"/>
+                                  <a:ea typeface="MS Mincho" charset="0"/>
+                                  <a:cs typeface="Cambria Math" panose="02040503050406030204" charset="0"/>
+                                </a:rPr>
+                                <m:t>𝐶</m:t>
+                              </m:r>
+                            </m:oMath>
+                          </m:oMathPara>
+                        </a14:m>
+                        <a:endParaRPr lang="en-US" altLang="zh-CN" sz="2000" i="1" dirty="0">
+                          <a:latin typeface="Cambria Math" panose="02040503050406030204" charset="0"/>
+                          <a:ea typeface="MS Mincho" charset="0"/>
+                          <a:cs typeface="Cambria Math" panose="02040503050406030204" charset="0"/>
+                        </a:endParaRPr>
+                      </a:p>
+                    </p:txBody>
+                  </p:sp>
+                </mc:Choice>
+                <mc:Fallback>
+                  <p:sp>
+                    <p:nvSpPr>
+                      <p:cNvPr id="255" name="文本框 8">
+                        <a:extLst>
+                          <a:ext uri="{FF2B5EF4-FFF2-40B4-BE49-F238E27FC236}">
+                            <a16:creationId xmlns:a16="http://schemas.microsoft.com/office/drawing/2014/main" id="{C5A9C9AD-8103-B106-7A66-D943E4C7679C}"/>
+                          </a:ext>
+                        </a:extLst>
+                      </p:cNvPr>
+                      <p:cNvSpPr txBox="1">
+                        <a:spLocks noRot="1" noChangeAspect="1" noMove="1" noResize="1" noEditPoints="1" noAdjustHandles="1" noChangeArrowheads="1" noChangeShapeType="1" noTextEdit="1"/>
+                      </p:cNvSpPr>
+                      <p:nvPr/>
+                    </p:nvSpPr>
+                    <p:spPr>
+                      <a:xfrm>
+                        <a:off x="967720" y="4604017"/>
+                        <a:ext cx="306382" cy="256543"/>
+                      </a:xfrm>
+                      <a:prstGeom prst="rect">
+                        <a:avLst/>
+                      </a:prstGeom>
+                      <a:blipFill>
+                        <a:blip r:embed="rId15"/>
+                        <a:stretch>
+                          <a:fillRect l="-14000" b="-50000"/>
+                        </a:stretch>
+                      </a:blipFill>
+                    </p:spPr>
+                    <p:txBody>
+                      <a:bodyPr/>
+                      <a:lstStyle/>
+                      <a:p>
+                        <a:r>
+                          <a:rPr lang="en-US">
+                            <a:noFill/>
+                          </a:rPr>
+                          <a:t> </a:t>
+                        </a:r>
+                      </a:p>
+                    </p:txBody>
+                  </p:sp>
+                </mc:Fallback>
+              </mc:AlternateContent>
+              <mc:AlternateContent xmlns:mc="http://schemas.openxmlformats.org/markup-compatibility/2006">
+                <mc:Choice xmlns:a14="http://schemas.microsoft.com/office/drawing/2010/main" Requires="a14">
+                  <p:sp>
+                    <p:nvSpPr>
+                      <p:cNvPr id="256" name="文本框 21">
+                        <a:extLst>
+                          <a:ext uri="{FF2B5EF4-FFF2-40B4-BE49-F238E27FC236}">
+                            <a16:creationId xmlns:a16="http://schemas.microsoft.com/office/drawing/2014/main" id="{909400EF-59DA-EDE3-9CD7-4BBF91760E59}"/>
+                          </a:ext>
+                        </a:extLst>
+                      </p:cNvPr>
+                      <p:cNvSpPr txBox="1"/>
+                      <p:nvPr/>
+                    </p:nvSpPr>
+                    <p:spPr>
+                      <a:xfrm>
+                        <a:off x="3398018" y="1374321"/>
+                        <a:ext cx="641385" cy="479471"/>
+                      </a:xfrm>
+                      <a:prstGeom prst="rect">
+                        <a:avLst/>
+                      </a:prstGeom>
+                      <a:noFill/>
+                    </p:spPr>
+                    <p:txBody>
+                      <a:bodyPr wrap="square" rtlCol="0">
+                        <a:noAutofit/>
+                      </a:bodyPr>
+                      <a:lstStyle/>
+                      <a:p>
+                        <a:pPr algn="ctr"/>
+                        <a14:m>
+                          <m:oMathPara xmlns:m="http://schemas.openxmlformats.org/officeDocument/2006/math">
+                            <m:oMathParaPr>
+                              <m:jc m:val="center"/>
+                            </m:oMathParaPr>
+                            <m:oMath xmlns:m="http://schemas.openxmlformats.org/officeDocument/2006/math">
+                              <m:sSub>
+                                <m:sSubPr>
+                                  <m:ctrlPr>
+                                    <a:rPr lang="en-US" altLang="zh-CN" sz="2000" i="1" smtClean="0">
+                                      <a:latin typeface="Cambria Math" panose="02040503050406030204" pitchFamily="18" charset="0"/>
+                                      <a:ea typeface="MS Mincho" charset="0"/>
+                                    </a:rPr>
+                                  </m:ctrlPr>
+                                </m:sSubPr>
+                                <m:e>
+                                  <m:r>
+                                    <a:rPr lang="en-US" altLang="zh-CN" sz="2000" b="0" i="1" smtClean="0">
+                                      <a:latin typeface="Cambria Math" panose="02040503050406030204" pitchFamily="18" charset="0"/>
+                                      <a:ea typeface="MS Mincho" charset="0"/>
+                                    </a:rPr>
+                                    <m:t>𝑝</m:t>
+                                  </m:r>
+                                </m:e>
+                                <m:sub>
+                                  <m:r>
+                                    <a:rPr lang="zh-CN" altLang="en-US" sz="2000" b="0" i="1" smtClean="0">
+                                      <a:latin typeface="Cambria Math" panose="02040503050406030204" pitchFamily="18" charset="0"/>
+                                      <a:ea typeface="MS Mincho" charset="0"/>
+                                    </a:rPr>
+                                    <m:t>𝛼</m:t>
+                                  </m:r>
+                                </m:sub>
+                              </m:sSub>
+                            </m:oMath>
+                          </m:oMathPara>
+                        </a14:m>
+                        <a:endParaRPr lang="en-US" altLang="zh-CN" sz="2000" i="1" dirty="0">
+                          <a:latin typeface="Cambria Math" panose="02040503050406030204" charset="0"/>
+                          <a:ea typeface="MS Mincho" charset="0"/>
+                          <a:cs typeface="Cambria Math" panose="02040503050406030204" charset="0"/>
+                        </a:endParaRPr>
+                      </a:p>
+                    </p:txBody>
+                  </p:sp>
+                </mc:Choice>
+                <mc:Fallback>
+                  <p:sp>
+                    <p:nvSpPr>
+                      <p:cNvPr id="256" name="文本框 21">
+                        <a:extLst>
+                          <a:ext uri="{FF2B5EF4-FFF2-40B4-BE49-F238E27FC236}">
+                            <a16:creationId xmlns:a16="http://schemas.microsoft.com/office/drawing/2014/main" id="{909400EF-59DA-EDE3-9CD7-4BBF91760E59}"/>
+                          </a:ext>
+                        </a:extLst>
+                      </p:cNvPr>
+                      <p:cNvSpPr txBox="1">
+                        <a:spLocks noRot="1" noChangeAspect="1" noMove="1" noResize="1" noEditPoints="1" noAdjustHandles="1" noChangeArrowheads="1" noChangeShapeType="1" noTextEdit="1"/>
+                      </p:cNvSpPr>
+                      <p:nvPr/>
+                    </p:nvSpPr>
+                    <p:spPr>
+                      <a:xfrm>
+                        <a:off x="3398018" y="1374321"/>
+                        <a:ext cx="641385" cy="479471"/>
+                      </a:xfrm>
+                      <a:prstGeom prst="rect">
+                        <a:avLst/>
+                      </a:prstGeom>
+                      <a:blipFill>
+                        <a:blip r:embed="rId16"/>
+                        <a:stretch>
+                          <a:fillRect/>
+                        </a:stretch>
+                      </a:blipFill>
+                    </p:spPr>
+                    <p:txBody>
+                      <a:bodyPr/>
+                      <a:lstStyle/>
+                      <a:p>
+                        <a:r>
+                          <a:rPr lang="en-US">
+                            <a:noFill/>
+                          </a:rPr>
+                          <a:t> </a:t>
+                        </a:r>
+                      </a:p>
+                    </p:txBody>
+                  </p:sp>
+                </mc:Fallback>
+              </mc:AlternateContent>
+            </p:grpSp>
+            <p:sp>
+              <p:nvSpPr>
+                <p:cNvPr id="232" name="TextBox 231">
+                  <a:extLst>
+                    <a:ext uri="{FF2B5EF4-FFF2-40B4-BE49-F238E27FC236}">
+                      <a16:creationId xmlns:a16="http://schemas.microsoft.com/office/drawing/2014/main" id="{19105921-D101-284B-A67B-2FEE4C87394F}"/>
+                    </a:ext>
+                  </a:extLst>
+                </p:cNvPr>
+                <p:cNvSpPr txBox="1"/>
+                <p:nvPr/>
+              </p:nvSpPr>
+              <p:spPr>
+                <a:xfrm rot="1998811">
+                  <a:off x="2947782" y="1876188"/>
+                  <a:ext cx="766557" cy="338554"/>
+                </a:xfrm>
+                <a:prstGeom prst="rect">
+                  <a:avLst/>
+                </a:prstGeom>
+                <a:noFill/>
+              </p:spPr>
+              <p:txBody>
+                <a:bodyPr wrap="none" rtlCol="0">
+                  <a:spAutoFit/>
+                </a:bodyPr>
+                <a:lstStyle/>
+                <a:p>
+                  <a:r>
+                    <a:rPr lang="en-US" sz="1600" dirty="0">
+                      <a:latin typeface="Arial" panose="020B0604020202020204" pitchFamily="34" charset="0"/>
+                      <a:cs typeface="Arial" panose="020B0604020202020204" pitchFamily="34" charset="0"/>
+                    </a:rPr>
+                    <a:t>35.7%</a:t>
+                  </a:r>
+                </a:p>
+              </p:txBody>
+            </p:sp>
+            <p:sp>
+              <p:nvSpPr>
+                <p:cNvPr id="233" name="TextBox 232">
+                  <a:extLst>
+                    <a:ext uri="{FF2B5EF4-FFF2-40B4-BE49-F238E27FC236}">
+                      <a16:creationId xmlns:a16="http://schemas.microsoft.com/office/drawing/2014/main" id="{4D1D4054-C15A-11F9-89BE-03BA74B0C510}"/>
+                    </a:ext>
+                  </a:extLst>
+                </p:cNvPr>
+                <p:cNvSpPr txBox="1"/>
+                <p:nvPr/>
+              </p:nvSpPr>
+              <p:spPr>
+                <a:xfrm rot="1872829">
+                  <a:off x="3087001" y="1673183"/>
+                  <a:ext cx="766557" cy="338554"/>
+                </a:xfrm>
+                <a:prstGeom prst="rect">
+                  <a:avLst/>
+                </a:prstGeom>
+                <a:noFill/>
+              </p:spPr>
+              <p:txBody>
+                <a:bodyPr wrap="none" rtlCol="0">
+                  <a:spAutoFit/>
+                </a:bodyPr>
+                <a:lstStyle/>
+                <a:p>
+                  <a:r>
+                    <a:rPr lang="en-US" sz="1600" dirty="0">
+                      <a:latin typeface="Arial" panose="020B0604020202020204" pitchFamily="34" charset="0"/>
+                      <a:cs typeface="Arial" panose="020B0604020202020204" pitchFamily="34" charset="0"/>
+                    </a:rPr>
+                    <a:t>34.7%</a:t>
+                  </a:r>
+                </a:p>
+              </p:txBody>
+            </p:sp>
+            <p:sp>
+              <p:nvSpPr>
+                <p:cNvPr id="234" name="TextBox 233">
+                  <a:extLst>
+                    <a:ext uri="{FF2B5EF4-FFF2-40B4-BE49-F238E27FC236}">
+                      <a16:creationId xmlns:a16="http://schemas.microsoft.com/office/drawing/2014/main" id="{CCB424C7-A63B-0BA5-5864-83932E27A654}"/>
+                    </a:ext>
+                  </a:extLst>
+                </p:cNvPr>
+                <p:cNvSpPr txBox="1"/>
+                <p:nvPr/>
+              </p:nvSpPr>
+              <p:spPr>
+                <a:xfrm>
+                  <a:off x="2409937" y="1619880"/>
+                  <a:ext cx="498855" cy="261610"/>
+                </a:xfrm>
+                <a:prstGeom prst="rect">
+                  <a:avLst/>
+                </a:prstGeom>
+                <a:noFill/>
+              </p:spPr>
+              <p:txBody>
+                <a:bodyPr wrap="none" rtlCol="0">
+                  <a:spAutoFit/>
+                </a:bodyPr>
+                <a:lstStyle/>
+                <a:p>
+                  <a:r>
+                    <a:rPr lang="en-US" sz="1100" dirty="0">
+                      <a:latin typeface="Arial" panose="020B0604020202020204" pitchFamily="34" charset="0"/>
+                      <a:cs typeface="Arial" panose="020B0604020202020204" pitchFamily="34" charset="0"/>
+                    </a:rPr>
+                    <a:t>2016</a:t>
+                  </a:r>
+                </a:p>
+              </p:txBody>
+            </p:sp>
+            <p:sp>
+              <p:nvSpPr>
+                <p:cNvPr id="235" name="TextBox 234">
+                  <a:extLst>
+                    <a:ext uri="{FF2B5EF4-FFF2-40B4-BE49-F238E27FC236}">
+                      <a16:creationId xmlns:a16="http://schemas.microsoft.com/office/drawing/2014/main" id="{F63CFE21-6972-311A-F054-9A81A1579258}"/>
+                    </a:ext>
+                  </a:extLst>
+                </p:cNvPr>
+                <p:cNvSpPr txBox="1"/>
+                <p:nvPr/>
+              </p:nvSpPr>
+              <p:spPr>
+                <a:xfrm>
+                  <a:off x="2470653" y="1423744"/>
+                  <a:ext cx="498855" cy="261610"/>
+                </a:xfrm>
+                <a:prstGeom prst="rect">
+                  <a:avLst/>
+                </a:prstGeom>
+                <a:noFill/>
+              </p:spPr>
+              <p:txBody>
+                <a:bodyPr wrap="none" rtlCol="0">
+                  <a:spAutoFit/>
+                </a:bodyPr>
+                <a:lstStyle/>
+                <a:p>
+                  <a:r>
+                    <a:rPr lang="en-US" sz="1100" dirty="0">
+                      <a:latin typeface="Arial" panose="020B0604020202020204" pitchFamily="34" charset="0"/>
+                      <a:cs typeface="Arial" panose="020B0604020202020204" pitchFamily="34" charset="0"/>
+                    </a:rPr>
+                    <a:t>2023</a:t>
+                  </a:r>
+                </a:p>
+              </p:txBody>
+            </p:sp>
+            <p:sp>
+              <p:nvSpPr>
+                <p:cNvPr id="236" name="TextBox 235">
+                  <a:extLst>
+                    <a:ext uri="{FF2B5EF4-FFF2-40B4-BE49-F238E27FC236}">
+                      <a16:creationId xmlns:a16="http://schemas.microsoft.com/office/drawing/2014/main" id="{A3A63ED0-0C88-7A1A-D560-EE38DDDB75C9}"/>
+                    </a:ext>
+                  </a:extLst>
+                </p:cNvPr>
+                <p:cNvSpPr txBox="1"/>
+                <p:nvPr/>
+              </p:nvSpPr>
+              <p:spPr>
+                <a:xfrm rot="4450356">
+                  <a:off x="3709523" y="2517467"/>
+                  <a:ext cx="697627" cy="338554"/>
+                </a:xfrm>
+                <a:prstGeom prst="rect">
+                  <a:avLst/>
+                </a:prstGeom>
+                <a:noFill/>
+              </p:spPr>
+              <p:txBody>
+                <a:bodyPr wrap="none" rtlCol="0">
+                  <a:spAutoFit/>
+                </a:bodyPr>
+                <a:lstStyle/>
+                <a:p>
+                  <a:r>
+                    <a:rPr lang="en-US" sz="1600" dirty="0">
+                      <a:latin typeface="Arial" panose="020B0604020202020204" pitchFamily="34" charset="0"/>
+                      <a:cs typeface="Arial" panose="020B0604020202020204" pitchFamily="34" charset="0"/>
+                    </a:rPr>
+                    <a:t>0.330</a:t>
+                  </a:r>
+                </a:p>
+              </p:txBody>
+            </p:sp>
+            <p:sp>
+              <p:nvSpPr>
+                <p:cNvPr id="237" name="TextBox 236">
+                  <a:extLst>
+                    <a:ext uri="{FF2B5EF4-FFF2-40B4-BE49-F238E27FC236}">
+                      <a16:creationId xmlns:a16="http://schemas.microsoft.com/office/drawing/2014/main" id="{16B3C5CB-5E4E-BC8A-595C-5F913D2EBE2B}"/>
+                    </a:ext>
+                  </a:extLst>
+                </p:cNvPr>
+                <p:cNvSpPr txBox="1"/>
+                <p:nvPr/>
+              </p:nvSpPr>
+              <p:spPr>
+                <a:xfrm rot="4362618">
+                  <a:off x="3458937" y="2568974"/>
+                  <a:ext cx="697627" cy="338554"/>
+                </a:xfrm>
+                <a:prstGeom prst="rect">
+                  <a:avLst/>
+                </a:prstGeom>
+                <a:noFill/>
+              </p:spPr>
+              <p:txBody>
+                <a:bodyPr wrap="none" rtlCol="0">
+                  <a:spAutoFit/>
+                </a:bodyPr>
+                <a:lstStyle/>
+                <a:p>
+                  <a:r>
+                    <a:rPr lang="en-US" sz="1600" dirty="0">
+                      <a:latin typeface="Arial" panose="020B0604020202020204" pitchFamily="34" charset="0"/>
+                      <a:cs typeface="Arial" panose="020B0604020202020204" pitchFamily="34" charset="0"/>
+                    </a:rPr>
+                    <a:t>0.330</a:t>
+                  </a:r>
+                </a:p>
+              </p:txBody>
+            </p:sp>
+            <p:sp>
+              <p:nvSpPr>
+                <p:cNvPr id="238" name="Partial Circle 237">
+                  <a:extLst>
+                    <a:ext uri="{FF2B5EF4-FFF2-40B4-BE49-F238E27FC236}">
+                      <a16:creationId xmlns:a16="http://schemas.microsoft.com/office/drawing/2014/main" id="{8AE63367-746C-32BB-4616-187BE77E018F}"/>
+                    </a:ext>
+                  </a:extLst>
+                </p:cNvPr>
+                <p:cNvSpPr/>
+                <p:nvPr/>
+              </p:nvSpPr>
+              <p:spPr>
+                <a:xfrm>
+                  <a:off x="834945" y="1583249"/>
+                  <a:ext cx="3200400" cy="3200400"/>
+                </a:xfrm>
+                <a:prstGeom prst="pie">
+                  <a:avLst>
+                    <a:gd name="adj1" fmla="val 10752796"/>
+                    <a:gd name="adj2" fmla="val 15122580"/>
+                  </a:avLst>
+                </a:prstGeom>
+                <a:solidFill>
+                  <a:srgbClr val="B0DF9A">
+                    <a:alpha val="50000"/>
+                  </a:srgbClr>
+                </a:solidFill>
+                <a:ln>
+                  <a:noFill/>
+                </a:ln>
+              </p:spPr>
+              <p:style>
+                <a:lnRef idx="2">
+                  <a:schemeClr val="accent1">
+                    <a:shade val="15000"/>
+                  </a:schemeClr>
+                </a:lnRef>
+                <a:fillRef idx="1">
+                  <a:schemeClr val="accent1"/>
+                </a:fillRef>
+                <a:effectRef idx="0">
+                  <a:schemeClr val="accent1"/>
+                </a:effectRef>
+                <a:fontRef idx="minor">
+                  <a:schemeClr val="lt1"/>
+                </a:fontRef>
+              </p:style>
+              <p:txBody>
+                <a:bodyPr rtlCol="0" anchor="ctr"/>
+                <a:lstStyle/>
+                <a:p>
+                  <a:pPr algn="ctr"/>
+                  <a:endParaRPr lang="en-US">
+                    <a:solidFill>
+                      <a:schemeClr val="tx1"/>
+                    </a:solidFill>
+                  </a:endParaRPr>
+                </a:p>
+              </p:txBody>
+            </p:sp>
+            <p:sp>
+              <p:nvSpPr>
+                <p:cNvPr id="239" name="Partial Circle 238">
+                  <a:extLst>
+                    <a:ext uri="{FF2B5EF4-FFF2-40B4-BE49-F238E27FC236}">
+                      <a16:creationId xmlns:a16="http://schemas.microsoft.com/office/drawing/2014/main" id="{6BD94847-5E34-C7A1-012C-1B7DFCA48F74}"/>
+                    </a:ext>
+                  </a:extLst>
+                </p:cNvPr>
+                <p:cNvSpPr/>
+                <p:nvPr/>
+              </p:nvSpPr>
+              <p:spPr>
+                <a:xfrm>
+                  <a:off x="834491" y="1601121"/>
+                  <a:ext cx="3200400" cy="3200400"/>
+                </a:xfrm>
+                <a:prstGeom prst="pie">
+                  <a:avLst>
+                    <a:gd name="adj1" fmla="val 2154102"/>
+                    <a:gd name="adj2" fmla="val 8665389"/>
+                  </a:avLst>
+                </a:prstGeom>
+                <a:solidFill>
+                  <a:srgbClr val="DFCA9A">
+                    <a:alpha val="50000"/>
+                  </a:srgbClr>
+                </a:solidFill>
+                <a:ln>
+                  <a:noFill/>
+                </a:ln>
+              </p:spPr>
+              <p:style>
+                <a:lnRef idx="2">
+                  <a:schemeClr val="accent1">
+                    <a:shade val="15000"/>
+                  </a:schemeClr>
+                </a:lnRef>
+                <a:fillRef idx="1">
+                  <a:schemeClr val="accent1"/>
+                </a:fillRef>
+                <a:effectRef idx="0">
+                  <a:schemeClr val="accent1"/>
+                </a:effectRef>
+                <a:fontRef idx="minor">
+                  <a:schemeClr val="lt1"/>
+                </a:fontRef>
+              </p:style>
+              <p:txBody>
+                <a:bodyPr rtlCol="0" anchor="ctr"/>
+                <a:lstStyle/>
+                <a:p>
+                  <a:pPr algn="ctr"/>
+                  <a:endParaRPr lang="en-US">
+                    <a:solidFill>
+                      <a:srgbClr val="00F5D4"/>
+                    </a:solidFill>
+                  </a:endParaRPr>
+                </a:p>
+              </p:txBody>
+            </p:sp>
+            <p:sp>
+              <p:nvSpPr>
+                <p:cNvPr id="240" name="TextBox 239">
+                  <a:extLst>
+                    <a:ext uri="{FF2B5EF4-FFF2-40B4-BE49-F238E27FC236}">
+                      <a16:creationId xmlns:a16="http://schemas.microsoft.com/office/drawing/2014/main" id="{20381A17-959B-561F-8470-69A4605FBBB9}"/>
+                    </a:ext>
+                  </a:extLst>
+                </p:cNvPr>
+                <p:cNvSpPr txBox="1"/>
+                <p:nvPr/>
+              </p:nvSpPr>
+              <p:spPr>
+                <a:xfrm rot="19415433">
+                  <a:off x="1133864" y="1876187"/>
+                  <a:ext cx="773968" cy="338554"/>
+                </a:xfrm>
+                <a:prstGeom prst="rect">
+                  <a:avLst/>
+                </a:prstGeom>
+                <a:noFill/>
+              </p:spPr>
+              <p:txBody>
+                <a:bodyPr wrap="square">
+                  <a:spAutoFit/>
+                </a:bodyPr>
+                <a:lstStyle/>
+                <a:p>
+                  <a:r>
+                    <a:rPr lang="en-US" sz="1600" dirty="0">
+                      <a:latin typeface="Arial" panose="020B0604020202020204" pitchFamily="34" charset="0"/>
+                      <a:cs typeface="Arial" panose="020B0604020202020204" pitchFamily="34" charset="0"/>
+                    </a:rPr>
+                    <a:t>50.7%</a:t>
+                  </a:r>
+                </a:p>
+              </p:txBody>
+            </p:sp>
+            <p:sp>
+              <p:nvSpPr>
+                <p:cNvPr id="241" name="TextBox 240">
+                  <a:extLst>
+                    <a:ext uri="{FF2B5EF4-FFF2-40B4-BE49-F238E27FC236}">
+                      <a16:creationId xmlns:a16="http://schemas.microsoft.com/office/drawing/2014/main" id="{3573459C-D928-6617-4C67-9520967EF61A}"/>
+                    </a:ext>
+                  </a:extLst>
+                </p:cNvPr>
+                <p:cNvSpPr txBox="1"/>
+                <p:nvPr/>
+              </p:nvSpPr>
+              <p:spPr>
+                <a:xfrm rot="19460468">
+                  <a:off x="985508" y="1673182"/>
+                  <a:ext cx="773968" cy="338554"/>
+                </a:xfrm>
+                <a:prstGeom prst="rect">
+                  <a:avLst/>
+                </a:prstGeom>
+                <a:noFill/>
+              </p:spPr>
+              <p:txBody>
+                <a:bodyPr wrap="square">
+                  <a:spAutoFit/>
+                </a:bodyPr>
+                <a:lstStyle/>
+                <a:p>
+                  <a:r>
+                    <a:rPr lang="en-US" sz="1600" dirty="0">
+                      <a:latin typeface="Arial" panose="020B0604020202020204" pitchFamily="34" charset="0"/>
+                      <a:cs typeface="Arial" panose="020B0604020202020204" pitchFamily="34" charset="0"/>
+                    </a:rPr>
+                    <a:t>51.8%</a:t>
+                  </a:r>
+                </a:p>
+              </p:txBody>
+            </p:sp>
+            <p:sp>
+              <p:nvSpPr>
+                <p:cNvPr id="242" name="TextBox 241">
+                  <a:extLst>
+                    <a:ext uri="{FF2B5EF4-FFF2-40B4-BE49-F238E27FC236}">
+                      <a16:creationId xmlns:a16="http://schemas.microsoft.com/office/drawing/2014/main" id="{B7886D81-3D2E-E2E5-DCF8-148795141A12}"/>
+                    </a:ext>
+                  </a:extLst>
+                </p:cNvPr>
+                <p:cNvSpPr txBox="1"/>
+                <p:nvPr/>
+              </p:nvSpPr>
+              <p:spPr>
+                <a:xfrm rot="17343629">
+                  <a:off x="653436" y="2558305"/>
+                  <a:ext cx="773968" cy="338554"/>
+                </a:xfrm>
+                <a:prstGeom prst="rect">
+                  <a:avLst/>
+                </a:prstGeom>
+                <a:noFill/>
+              </p:spPr>
+              <p:txBody>
+                <a:bodyPr wrap="square">
+                  <a:spAutoFit/>
+                </a:bodyPr>
+                <a:lstStyle/>
+                <a:p>
+                  <a:r>
+                    <a:rPr lang="en-US" sz="1600" dirty="0">
+                      <a:latin typeface="Arial" panose="020B0604020202020204" pitchFamily="34" charset="0"/>
+                      <a:cs typeface="Arial" panose="020B0604020202020204" pitchFamily="34" charset="0"/>
+                    </a:rPr>
+                    <a:t>0.090</a:t>
+                  </a:r>
+                </a:p>
+              </p:txBody>
+            </p:sp>
+            <p:sp>
+              <p:nvSpPr>
+                <p:cNvPr id="243" name="TextBox 242">
+                  <a:extLst>
+                    <a:ext uri="{FF2B5EF4-FFF2-40B4-BE49-F238E27FC236}">
+                      <a16:creationId xmlns:a16="http://schemas.microsoft.com/office/drawing/2014/main" id="{D8340F66-0DA1-FA65-D383-154D34C21072}"/>
+                    </a:ext>
+                  </a:extLst>
+                </p:cNvPr>
+                <p:cNvSpPr txBox="1"/>
+                <p:nvPr/>
+              </p:nvSpPr>
+              <p:spPr>
+                <a:xfrm rot="17357952">
+                  <a:off x="423558" y="2484236"/>
+                  <a:ext cx="773968" cy="338554"/>
+                </a:xfrm>
+                <a:prstGeom prst="rect">
+                  <a:avLst/>
+                </a:prstGeom>
+                <a:noFill/>
+              </p:spPr>
+              <p:txBody>
+                <a:bodyPr wrap="square">
+                  <a:spAutoFit/>
+                </a:bodyPr>
+                <a:lstStyle/>
+                <a:p>
+                  <a:r>
+                    <a:rPr lang="en-US" sz="1600" dirty="0">
+                      <a:latin typeface="Arial" panose="020B0604020202020204" pitchFamily="34" charset="0"/>
+                      <a:cs typeface="Arial" panose="020B0604020202020204" pitchFamily="34" charset="0"/>
+                    </a:rPr>
+                    <a:t>0.090</a:t>
+                  </a:r>
+                </a:p>
+              </p:txBody>
+            </p:sp>
+            <p:sp>
+              <p:nvSpPr>
+                <p:cNvPr id="244" name="TextBox 243">
+                  <a:extLst>
+                    <a:ext uri="{FF2B5EF4-FFF2-40B4-BE49-F238E27FC236}">
+                      <a16:creationId xmlns:a16="http://schemas.microsoft.com/office/drawing/2014/main" id="{E21C47A6-0F4E-2E37-6344-684B5074148C}"/>
+                    </a:ext>
+                  </a:extLst>
+                </p:cNvPr>
+                <p:cNvSpPr txBox="1"/>
+                <p:nvPr/>
+              </p:nvSpPr>
+              <p:spPr>
+                <a:xfrm rot="19343146">
+                  <a:off x="2976370" y="4147458"/>
+                  <a:ext cx="773968" cy="338554"/>
+                </a:xfrm>
+                <a:prstGeom prst="rect">
+                  <a:avLst/>
+                </a:prstGeom>
+                <a:noFill/>
+              </p:spPr>
+              <p:txBody>
+                <a:bodyPr wrap="square">
+                  <a:spAutoFit/>
+                </a:bodyPr>
+                <a:lstStyle/>
+                <a:p>
+                  <a:r>
+                    <a:rPr lang="en-US" sz="1600" dirty="0">
+                      <a:latin typeface="Arial" panose="020B0604020202020204" pitchFamily="34" charset="0"/>
+                      <a:cs typeface="Arial" panose="020B0604020202020204" pitchFamily="34" charset="0"/>
+                    </a:rPr>
+                    <a:t>8.67</a:t>
+                  </a:r>
+                </a:p>
+              </p:txBody>
+            </p:sp>
+            <p:sp>
+              <p:nvSpPr>
+                <p:cNvPr id="245" name="TextBox 244">
+                  <a:extLst>
+                    <a:ext uri="{FF2B5EF4-FFF2-40B4-BE49-F238E27FC236}">
+                      <a16:creationId xmlns:a16="http://schemas.microsoft.com/office/drawing/2014/main" id="{4F1E7F08-C81D-14C3-D008-613D35A27D28}"/>
+                    </a:ext>
+                  </a:extLst>
+                </p:cNvPr>
+                <p:cNvSpPr txBox="1"/>
+                <p:nvPr/>
+              </p:nvSpPr>
+              <p:spPr>
+                <a:xfrm rot="19232585">
+                  <a:off x="3136626" y="4341842"/>
+                  <a:ext cx="773968" cy="338554"/>
+                </a:xfrm>
+                <a:prstGeom prst="rect">
+                  <a:avLst/>
+                </a:prstGeom>
+                <a:noFill/>
+              </p:spPr>
+              <p:txBody>
+                <a:bodyPr wrap="square">
+                  <a:spAutoFit/>
+                </a:bodyPr>
+                <a:lstStyle/>
+                <a:p>
+                  <a:r>
+                    <a:rPr lang="en-US" sz="1600" dirty="0">
+                      <a:latin typeface="Arial" panose="020B0604020202020204" pitchFamily="34" charset="0"/>
+                      <a:cs typeface="Arial" panose="020B0604020202020204" pitchFamily="34" charset="0"/>
+                    </a:rPr>
+                    <a:t>8.31</a:t>
+                  </a:r>
+                </a:p>
+              </p:txBody>
+            </p:sp>
+            <p:sp>
+              <p:nvSpPr>
+                <p:cNvPr id="246" name="TextBox 245">
+                  <a:extLst>
+                    <a:ext uri="{FF2B5EF4-FFF2-40B4-BE49-F238E27FC236}">
+                      <a16:creationId xmlns:a16="http://schemas.microsoft.com/office/drawing/2014/main" id="{B730AB7F-C457-6D02-C903-A1CDCB981387}"/>
+                    </a:ext>
+                  </a:extLst>
+                </p:cNvPr>
+                <p:cNvSpPr txBox="1"/>
+                <p:nvPr/>
+              </p:nvSpPr>
+              <p:spPr>
+                <a:xfrm>
+                  <a:off x="2082230" y="4485408"/>
+                  <a:ext cx="773968" cy="338554"/>
+                </a:xfrm>
+                <a:prstGeom prst="rect">
+                  <a:avLst/>
+                </a:prstGeom>
+                <a:noFill/>
+              </p:spPr>
+              <p:txBody>
+                <a:bodyPr wrap="square">
+                  <a:spAutoFit/>
+                </a:bodyPr>
+                <a:lstStyle/>
+                <a:p>
+                  <a:r>
+                    <a:rPr lang="en-US" sz="1600" dirty="0">
+                      <a:latin typeface="Arial" panose="020B0604020202020204" pitchFamily="34" charset="0"/>
+                      <a:cs typeface="Arial" panose="020B0604020202020204" pitchFamily="34" charset="0"/>
+                    </a:rPr>
+                    <a:t>0.086</a:t>
+                  </a:r>
+                </a:p>
+              </p:txBody>
+            </p:sp>
+            <p:sp>
+              <p:nvSpPr>
+                <p:cNvPr id="247" name="TextBox 246">
+                  <a:extLst>
+                    <a:ext uri="{FF2B5EF4-FFF2-40B4-BE49-F238E27FC236}">
+                      <a16:creationId xmlns:a16="http://schemas.microsoft.com/office/drawing/2014/main" id="{FB269932-5A0C-15D4-5748-2687C0C04857}"/>
+                    </a:ext>
+                  </a:extLst>
+                </p:cNvPr>
+                <p:cNvSpPr txBox="1"/>
+                <p:nvPr/>
+              </p:nvSpPr>
+              <p:spPr>
+                <a:xfrm>
+                  <a:off x="2089140" y="4732526"/>
+                  <a:ext cx="773968" cy="338554"/>
+                </a:xfrm>
+                <a:prstGeom prst="rect">
+                  <a:avLst/>
+                </a:prstGeom>
+                <a:noFill/>
+              </p:spPr>
+              <p:txBody>
+                <a:bodyPr wrap="square">
+                  <a:spAutoFit/>
+                </a:bodyPr>
+                <a:lstStyle/>
+                <a:p>
+                  <a:r>
+                    <a:rPr lang="en-US" sz="1600" dirty="0">
+                      <a:latin typeface="Arial" panose="020B0604020202020204" pitchFamily="34" charset="0"/>
+                      <a:cs typeface="Arial" panose="020B0604020202020204" pitchFamily="34" charset="0"/>
+                    </a:rPr>
+                    <a:t>0.089</a:t>
+                  </a:r>
+                </a:p>
+              </p:txBody>
+            </p:sp>
+            <p:sp>
+              <p:nvSpPr>
+                <p:cNvPr id="248" name="TextBox 247">
+                  <a:extLst>
+                    <a:ext uri="{FF2B5EF4-FFF2-40B4-BE49-F238E27FC236}">
+                      <a16:creationId xmlns:a16="http://schemas.microsoft.com/office/drawing/2014/main" id="{F20BD95D-2E9E-FA68-AD71-BE98D9DC7476}"/>
+                    </a:ext>
+                  </a:extLst>
+                </p:cNvPr>
+                <p:cNvSpPr txBox="1"/>
+                <p:nvPr/>
+              </p:nvSpPr>
+              <p:spPr>
+                <a:xfrm rot="2122247">
+                  <a:off x="1145732" y="4205060"/>
+                  <a:ext cx="842878" cy="338554"/>
+                </a:xfrm>
+                <a:prstGeom prst="rect">
+                  <a:avLst/>
+                </a:prstGeom>
+                <a:noFill/>
+              </p:spPr>
+              <p:txBody>
+                <a:bodyPr wrap="square">
+                  <a:spAutoFit/>
+                </a:bodyPr>
+                <a:lstStyle/>
+                <a:p>
+                  <a:r>
+                    <a:rPr lang="en-US" sz="1600" dirty="0">
+                      <a:latin typeface="Arial" panose="020B0604020202020204" pitchFamily="34" charset="0"/>
+                      <a:cs typeface="Arial" panose="020B0604020202020204" pitchFamily="34" charset="0"/>
+                    </a:rPr>
+                    <a:t>0.0044</a:t>
+                  </a:r>
+                </a:p>
+              </p:txBody>
+            </p:sp>
+            <p:sp>
+              <p:nvSpPr>
+                <p:cNvPr id="249" name="TextBox 248">
+                  <a:extLst>
+                    <a:ext uri="{FF2B5EF4-FFF2-40B4-BE49-F238E27FC236}">
+                      <a16:creationId xmlns:a16="http://schemas.microsoft.com/office/drawing/2014/main" id="{9B71C4F6-E484-4D60-8E0A-B0DE365F9424}"/>
+                    </a:ext>
+                  </a:extLst>
+                </p:cNvPr>
+                <p:cNvSpPr txBox="1"/>
+                <p:nvPr/>
+              </p:nvSpPr>
+              <p:spPr>
+                <a:xfrm rot="2298318">
+                  <a:off x="1020562" y="4386045"/>
+                  <a:ext cx="842878" cy="338554"/>
+                </a:xfrm>
+                <a:prstGeom prst="rect">
+                  <a:avLst/>
+                </a:prstGeom>
+                <a:noFill/>
+              </p:spPr>
+              <p:txBody>
+                <a:bodyPr wrap="square">
+                  <a:spAutoFit/>
+                </a:bodyPr>
+                <a:lstStyle/>
+                <a:p>
+                  <a:r>
+                    <a:rPr lang="en-US" sz="1600" dirty="0">
+                      <a:latin typeface="Arial" panose="020B0604020202020204" pitchFamily="34" charset="0"/>
+                      <a:cs typeface="Arial" panose="020B0604020202020204" pitchFamily="34" charset="0"/>
+                    </a:rPr>
+                    <a:t>0.0043</a:t>
+                  </a:r>
+                </a:p>
+              </p:txBody>
+            </p:sp>
+          </p:grpSp>
+          <p:sp>
+            <p:nvSpPr>
+              <p:cNvPr id="98" name="文本框 25">
+                <a:extLst>
+                  <a:ext uri="{FF2B5EF4-FFF2-40B4-BE49-F238E27FC236}">
+                    <a16:creationId xmlns:a16="http://schemas.microsoft.com/office/drawing/2014/main" id="{627E4EF4-EA16-FE62-DD45-8933BAFD48D1}"/>
+                  </a:ext>
+                </a:extLst>
+              </p:cNvPr>
+              <p:cNvSpPr txBox="1"/>
+              <p:nvPr/>
+            </p:nvSpPr>
+            <p:spPr>
+              <a:xfrm>
+                <a:off x="4396295" y="798266"/>
+                <a:ext cx="3686038" cy="461665"/>
+              </a:xfrm>
+              <a:prstGeom prst="rect">
+                <a:avLst/>
+              </a:prstGeom>
+              <a:noFill/>
+            </p:spPr>
+            <p:txBody>
+              <a:bodyPr wrap="square" rtlCol="0">
+                <a:spAutoFit/>
+              </a:bodyPr>
+              <a:lstStyle/>
+              <a:p>
+                <a:pPr algn="ctr"/>
+                <a:r>
+                  <a:rPr lang="en-US" altLang="zh-CN" sz="2400" b="1" dirty="0">
+                    <a:solidFill>
+                      <a:srgbClr val="F39F1B"/>
+                    </a:solidFill>
+                    <a:latin typeface="Arial" panose="020B0604020202020204" pitchFamily="34" charset="0"/>
+                    <a:cs typeface="Arial" panose="020B0604020202020204" pitchFamily="34" charset="0"/>
+                  </a:rPr>
+                  <a:t>South &amp; Southeast Asia</a:t>
+                </a:r>
+              </a:p>
+            </p:txBody>
+          </p:sp>
+        </p:grpSp>
+        <p:grpSp>
+          <p:nvGrpSpPr>
+            <p:cNvPr id="291" name="Group 290">
+              <a:extLst>
+                <a:ext uri="{FF2B5EF4-FFF2-40B4-BE49-F238E27FC236}">
+                  <a16:creationId xmlns:a16="http://schemas.microsoft.com/office/drawing/2014/main" id="{A1911308-A89A-71D1-8410-E5BB4F5E8BE1}"/>
+                </a:ext>
+              </a:extLst>
+            </p:cNvPr>
+            <p:cNvGrpSpPr/>
+            <p:nvPr/>
+          </p:nvGrpSpPr>
+          <p:grpSpPr>
+            <a:xfrm>
+              <a:off x="8197392" y="798266"/>
+              <a:ext cx="4094531" cy="4573614"/>
+              <a:chOff x="8544332" y="798266"/>
+              <a:chExt cx="4094531" cy="4573614"/>
+            </a:xfrm>
+          </p:grpSpPr>
+          <p:grpSp>
+            <p:nvGrpSpPr>
+              <p:cNvPr id="257" name="Group 256">
+                <a:extLst>
+                  <a:ext uri="{FF2B5EF4-FFF2-40B4-BE49-F238E27FC236}">
+                    <a16:creationId xmlns:a16="http://schemas.microsoft.com/office/drawing/2014/main" id="{E9378D54-45A2-759B-A298-4BA013285611}"/>
+                  </a:ext>
+                </a:extLst>
+              </p:cNvPr>
+              <p:cNvGrpSpPr/>
+              <p:nvPr/>
+            </p:nvGrpSpPr>
+            <p:grpSpPr>
+              <a:xfrm>
+                <a:off x="8544332" y="1344337"/>
+                <a:ext cx="4094531" cy="4027543"/>
+                <a:chOff x="445723" y="1232543"/>
+                <a:chExt cx="4094531" cy="4027543"/>
+              </a:xfrm>
+            </p:grpSpPr>
+            <p:sp>
+              <p:nvSpPr>
+                <p:cNvPr id="258" name="Partial Circle 257">
+                  <a:extLst>
+                    <a:ext uri="{FF2B5EF4-FFF2-40B4-BE49-F238E27FC236}">
+                      <a16:creationId xmlns:a16="http://schemas.microsoft.com/office/drawing/2014/main" id="{E678F102-183D-5836-A1A3-BFD61BD5ABEF}"/>
+                    </a:ext>
+                  </a:extLst>
+                </p:cNvPr>
+                <p:cNvSpPr/>
+                <p:nvPr/>
+              </p:nvSpPr>
+              <p:spPr>
+                <a:xfrm>
+                  <a:off x="613962" y="1368091"/>
+                  <a:ext cx="3657600" cy="3657600"/>
+                </a:xfrm>
+                <a:prstGeom prst="pie">
+                  <a:avLst>
+                    <a:gd name="adj1" fmla="val 17242230"/>
+                    <a:gd name="adj2" fmla="val 21313"/>
+                  </a:avLst>
+                </a:prstGeom>
+                <a:solidFill>
+                  <a:srgbClr val="A79ADF">
+                    <a:alpha val="50000"/>
+                  </a:srgbClr>
+                </a:solidFill>
+                <a:ln>
+                  <a:noFill/>
+                </a:ln>
+              </p:spPr>
+              <p:style>
+                <a:lnRef idx="2">
+                  <a:schemeClr val="accent1">
+                    <a:shade val="15000"/>
+                  </a:schemeClr>
+                </a:lnRef>
+                <a:fillRef idx="1">
+                  <a:schemeClr val="accent1"/>
+                </a:fillRef>
+                <a:effectRef idx="0">
+                  <a:schemeClr val="accent1"/>
+                </a:effectRef>
+                <a:fontRef idx="minor">
+                  <a:schemeClr val="lt1"/>
+                </a:fontRef>
+              </p:style>
+              <p:txBody>
+                <a:bodyPr rtlCol="0" anchor="ctr"/>
+                <a:lstStyle/>
+                <a:p>
+                  <a:pPr algn="ctr"/>
+                  <a:endParaRPr lang="en-US">
+                    <a:solidFill>
+                      <a:schemeClr val="tx1"/>
+                    </a:solidFill>
+                  </a:endParaRPr>
+                </a:p>
+              </p:txBody>
+            </p:sp>
+            <p:sp>
+              <p:nvSpPr>
+                <p:cNvPr id="259" name="Partial Circle 258">
+                  <a:extLst>
+                    <a:ext uri="{FF2B5EF4-FFF2-40B4-BE49-F238E27FC236}">
+                      <a16:creationId xmlns:a16="http://schemas.microsoft.com/office/drawing/2014/main" id="{E1B0806B-2C8D-E0B6-F748-AEE6D1CBBB53}"/>
+                    </a:ext>
+                  </a:extLst>
+                </p:cNvPr>
+                <p:cNvSpPr/>
+                <p:nvPr/>
+              </p:nvSpPr>
+              <p:spPr>
+                <a:xfrm>
+                  <a:off x="602759" y="1369023"/>
+                  <a:ext cx="3657600" cy="3657600"/>
+                </a:xfrm>
+                <a:prstGeom prst="pie">
+                  <a:avLst>
+                    <a:gd name="adj1" fmla="val 10761800"/>
+                    <a:gd name="adj2" fmla="val 15143024"/>
+                  </a:avLst>
+                </a:prstGeom>
+                <a:solidFill>
+                  <a:srgbClr val="B0DF9A">
+                    <a:alpha val="50000"/>
+                  </a:srgbClr>
+                </a:solidFill>
+                <a:ln>
+                  <a:noFill/>
+                </a:ln>
+              </p:spPr>
+              <p:style>
+                <a:lnRef idx="2">
+                  <a:schemeClr val="accent1">
+                    <a:shade val="15000"/>
+                  </a:schemeClr>
+                </a:lnRef>
+                <a:fillRef idx="1">
+                  <a:schemeClr val="accent1"/>
+                </a:fillRef>
+                <a:effectRef idx="0">
+                  <a:schemeClr val="accent1"/>
+                </a:effectRef>
+                <a:fontRef idx="minor">
+                  <a:schemeClr val="lt1"/>
+                </a:fontRef>
+              </p:style>
+              <p:txBody>
+                <a:bodyPr rtlCol="0" anchor="ctr"/>
+                <a:lstStyle/>
+                <a:p>
+                  <a:pPr algn="ctr"/>
+                  <a:endParaRPr lang="en-US">
+                    <a:solidFill>
+                      <a:schemeClr val="tx1"/>
+                    </a:solidFill>
+                  </a:endParaRPr>
+                </a:p>
+              </p:txBody>
+            </p:sp>
+            <p:sp>
+              <p:nvSpPr>
+                <p:cNvPr id="260" name="Partial Circle 259">
+                  <a:extLst>
+                    <a:ext uri="{FF2B5EF4-FFF2-40B4-BE49-F238E27FC236}">
+                      <a16:creationId xmlns:a16="http://schemas.microsoft.com/office/drawing/2014/main" id="{0814D1A4-14CA-D204-5698-00FE53C71BDE}"/>
+                    </a:ext>
+                  </a:extLst>
+                </p:cNvPr>
+                <p:cNvSpPr/>
+                <p:nvPr/>
+              </p:nvSpPr>
+              <p:spPr>
+                <a:xfrm>
+                  <a:off x="826871" y="1601122"/>
+                  <a:ext cx="3200400" cy="3200400"/>
+                </a:xfrm>
+                <a:prstGeom prst="pie">
+                  <a:avLst>
+                    <a:gd name="adj1" fmla="val 17267760"/>
+                    <a:gd name="adj2" fmla="val 6512"/>
+                  </a:avLst>
+                </a:prstGeom>
+                <a:solidFill>
+                  <a:srgbClr val="A79ADF">
+                    <a:alpha val="50000"/>
+                  </a:srgbClr>
+                </a:solidFill>
+                <a:ln>
+                  <a:noFill/>
+                </a:ln>
+              </p:spPr>
+              <p:style>
+                <a:lnRef idx="2">
+                  <a:schemeClr val="accent1">
+                    <a:shade val="15000"/>
+                  </a:schemeClr>
+                </a:lnRef>
+                <a:fillRef idx="1">
+                  <a:schemeClr val="accent1"/>
+                </a:fillRef>
+                <a:effectRef idx="0">
+                  <a:schemeClr val="accent1"/>
+                </a:effectRef>
+                <a:fontRef idx="minor">
+                  <a:schemeClr val="lt1"/>
+                </a:fontRef>
+              </p:style>
+              <p:txBody>
+                <a:bodyPr rtlCol="0" anchor="ctr"/>
+                <a:lstStyle/>
+                <a:p>
+                  <a:pPr algn="ctr"/>
+                  <a:endParaRPr lang="en-US">
+                    <a:solidFill>
+                      <a:schemeClr val="tx1"/>
+                    </a:solidFill>
+                  </a:endParaRPr>
+                </a:p>
+              </p:txBody>
+            </p:sp>
+            <p:sp>
+              <p:nvSpPr>
+                <p:cNvPr id="261" name="Partial Circle 260">
+                  <a:extLst>
+                    <a:ext uri="{FF2B5EF4-FFF2-40B4-BE49-F238E27FC236}">
+                      <a16:creationId xmlns:a16="http://schemas.microsoft.com/office/drawing/2014/main" id="{E27B8CC2-4C1F-61FC-A5A7-B5F226382605}"/>
+                    </a:ext>
+                  </a:extLst>
+                </p:cNvPr>
+                <p:cNvSpPr/>
+                <p:nvPr/>
+              </p:nvSpPr>
+              <p:spPr>
+                <a:xfrm>
+                  <a:off x="600841" y="1386003"/>
+                  <a:ext cx="3657600" cy="3657600"/>
+                </a:xfrm>
+                <a:prstGeom prst="pie">
+                  <a:avLst>
+                    <a:gd name="adj1" fmla="val 2118224"/>
+                    <a:gd name="adj2" fmla="val 8689523"/>
+                  </a:avLst>
+                </a:prstGeom>
+                <a:solidFill>
+                  <a:srgbClr val="DFCA9A">
+                    <a:alpha val="50000"/>
+                  </a:srgbClr>
+                </a:solidFill>
+                <a:ln>
+                  <a:noFill/>
+                </a:ln>
+              </p:spPr>
+              <p:style>
+                <a:lnRef idx="2">
+                  <a:schemeClr val="accent1">
+                    <a:shade val="15000"/>
+                  </a:schemeClr>
+                </a:lnRef>
+                <a:fillRef idx="1">
+                  <a:schemeClr val="accent1"/>
+                </a:fillRef>
+                <a:effectRef idx="0">
+                  <a:schemeClr val="accent1"/>
+                </a:effectRef>
+                <a:fontRef idx="minor">
+                  <a:schemeClr val="lt1"/>
+                </a:fontRef>
+              </p:style>
+              <p:txBody>
+                <a:bodyPr rtlCol="0" anchor="ctr"/>
+                <a:lstStyle/>
+                <a:p>
+                  <a:pPr algn="ctr"/>
+                  <a:endParaRPr lang="en-US">
+                    <a:solidFill>
+                      <a:srgbClr val="00F5D4"/>
+                    </a:solidFill>
+                  </a:endParaRPr>
+                </a:p>
+              </p:txBody>
+            </p:sp>
+            <p:grpSp>
+              <p:nvGrpSpPr>
+                <p:cNvPr id="262" name="Group 261">
+                  <a:extLst>
+                    <a:ext uri="{FF2B5EF4-FFF2-40B4-BE49-F238E27FC236}">
+                      <a16:creationId xmlns:a16="http://schemas.microsoft.com/office/drawing/2014/main" id="{97CB6E96-736D-9B0C-C6CD-23BAA0780648}"/>
+                    </a:ext>
+                  </a:extLst>
+                </p:cNvPr>
+                <p:cNvGrpSpPr/>
+                <p:nvPr/>
+              </p:nvGrpSpPr>
+              <p:grpSpPr>
+                <a:xfrm>
+                  <a:off x="445723" y="1232543"/>
+                  <a:ext cx="4094531" cy="4027543"/>
+                  <a:chOff x="325572" y="1263648"/>
+                  <a:chExt cx="4134064" cy="4003182"/>
+                </a:xfrm>
+              </p:grpSpPr>
+              <mc:AlternateContent xmlns:mc="http://schemas.openxmlformats.org/markup-compatibility/2006">
+                <mc:Choice xmlns:a14="http://schemas.microsoft.com/office/drawing/2010/main" Requires="a14">
+                  <p:sp>
+                    <p:nvSpPr>
+                      <p:cNvPr id="281" name="文本框 14">
+                        <a:extLst>
+                          <a:ext uri="{FF2B5EF4-FFF2-40B4-BE49-F238E27FC236}">
+                            <a16:creationId xmlns:a16="http://schemas.microsoft.com/office/drawing/2014/main" id="{CCD96BD6-65B8-BBA8-6855-C73238B8452E}"/>
+                          </a:ext>
+                        </a:extLst>
+                      </p:cNvPr>
+                      <p:cNvSpPr txBox="1"/>
+                      <p:nvPr/>
+                    </p:nvSpPr>
+                    <p:spPr>
+                      <a:xfrm>
+                        <a:off x="4153254" y="2246040"/>
+                        <a:ext cx="306382" cy="396425"/>
+                      </a:xfrm>
+                      <a:prstGeom prst="rect">
+                        <a:avLst/>
+                      </a:prstGeom>
+                      <a:noFill/>
+                    </p:spPr>
+                    <p:txBody>
+                      <a:bodyPr wrap="square" rtlCol="0">
+                        <a:noAutofit/>
+                      </a:bodyPr>
+                      <a:lstStyle/>
+                      <a:p>
+                        <a:pPr algn="ctr"/>
+                        <a14:m>
+                          <m:oMathPara xmlns:m="http://schemas.openxmlformats.org/officeDocument/2006/math">
+                            <m:oMathParaPr>
+                              <m:jc m:val="center"/>
+                            </m:oMathParaPr>
+                            <m:oMath xmlns:m="http://schemas.openxmlformats.org/officeDocument/2006/math">
+                              <m:r>
+                                <a:rPr lang="en-US" altLang="zh-CN" sz="2000" i="1">
+                                  <a:latin typeface="Cambria Math" panose="02040503050406030204" charset="0"/>
+                                  <a:ea typeface="MS Mincho" charset="0"/>
+                                  <a:cs typeface="Cambria Math" panose="02040503050406030204" charset="0"/>
+                                </a:rPr>
+                                <m:t>𝛽</m:t>
+                              </m:r>
+                            </m:oMath>
+                          </m:oMathPara>
+                        </a14:m>
+                        <a:endParaRPr lang="en-US" altLang="zh-CN" sz="2000" i="1" dirty="0">
+                          <a:latin typeface="Cambria Math" panose="02040503050406030204" charset="0"/>
+                          <a:ea typeface="MS Mincho" charset="0"/>
+                          <a:cs typeface="Cambria Math" panose="02040503050406030204" charset="0"/>
+                        </a:endParaRPr>
+                      </a:p>
+                    </p:txBody>
+                  </p:sp>
+                </mc:Choice>
+                <mc:Fallback>
+                  <p:sp>
+                    <p:nvSpPr>
+                      <p:cNvPr id="281" name="文本框 14">
+                        <a:extLst>
+                          <a:ext uri="{FF2B5EF4-FFF2-40B4-BE49-F238E27FC236}">
+                            <a16:creationId xmlns:a16="http://schemas.microsoft.com/office/drawing/2014/main" id="{CCD96BD6-65B8-BBA8-6855-C73238B8452E}"/>
+                          </a:ext>
+                        </a:extLst>
+                      </p:cNvPr>
+                      <p:cNvSpPr txBox="1">
+                        <a:spLocks noRot="1" noChangeAspect="1" noMove="1" noResize="1" noEditPoints="1" noAdjustHandles="1" noChangeArrowheads="1" noChangeShapeType="1" noTextEdit="1"/>
+                      </p:cNvSpPr>
+                      <p:nvPr/>
+                    </p:nvSpPr>
+                    <p:spPr>
+                      <a:xfrm>
+                        <a:off x="4153254" y="2246040"/>
+                        <a:ext cx="306382" cy="396425"/>
+                      </a:xfrm>
+                      <a:prstGeom prst="rect">
+                        <a:avLst/>
+                      </a:prstGeom>
+                      <a:blipFill>
+                        <a:blip r:embed="rId17"/>
+                        <a:stretch>
+                          <a:fillRect l="-26531" r="-4082" b="-18462"/>
+                        </a:stretch>
+                      </a:blipFill>
+                    </p:spPr>
+                    <p:txBody>
+                      <a:bodyPr/>
+                      <a:lstStyle/>
+                      <a:p>
+                        <a:r>
+                          <a:rPr lang="en-US">
+                            <a:noFill/>
+                          </a:rPr>
+                          <a:t> </a:t>
+                        </a:r>
+                      </a:p>
+                    </p:txBody>
+                  </p:sp>
+                </mc:Fallback>
+              </mc:AlternateContent>
+              <mc:AlternateContent xmlns:mc="http://schemas.openxmlformats.org/markup-compatibility/2006">
+                <mc:Choice xmlns:a14="http://schemas.microsoft.com/office/drawing/2010/main" Requires="a14">
+                  <p:sp>
+                    <p:nvSpPr>
+                      <p:cNvPr id="282" name="文本框 21">
+                        <a:extLst>
+                          <a:ext uri="{FF2B5EF4-FFF2-40B4-BE49-F238E27FC236}">
+                            <a16:creationId xmlns:a16="http://schemas.microsoft.com/office/drawing/2014/main" id="{A48C6293-7315-4C54-6B1F-674628C79216}"/>
+                          </a:ext>
+                        </a:extLst>
+                      </p:cNvPr>
+                      <p:cNvSpPr txBox="1"/>
+                      <p:nvPr/>
+                    </p:nvSpPr>
+                    <p:spPr>
+                      <a:xfrm>
+                        <a:off x="880377" y="1263648"/>
+                        <a:ext cx="641384" cy="414627"/>
+                      </a:xfrm>
+                      <a:prstGeom prst="rect">
+                        <a:avLst/>
+                      </a:prstGeom>
+                      <a:noFill/>
+                    </p:spPr>
+                    <p:txBody>
+                      <a:bodyPr wrap="square" rtlCol="0">
+                        <a:noAutofit/>
+                      </a:bodyPr>
+                      <a:lstStyle/>
+                      <a:p>
+                        <a:pPr algn="ctr"/>
+                        <a14:m>
+                          <m:oMathPara xmlns:m="http://schemas.openxmlformats.org/officeDocument/2006/math">
+                            <m:oMathParaPr>
+                              <m:jc m:val="center"/>
+                            </m:oMathParaPr>
+                            <m:oMath xmlns:m="http://schemas.openxmlformats.org/officeDocument/2006/math">
+                              <m:sSub>
+                                <m:sSubPr>
+                                  <m:ctrlPr>
+                                    <a:rPr lang="en-US" altLang="zh-CN" sz="2000" i="1" smtClean="0">
+                                      <a:latin typeface="Cambria Math" panose="02040503050406030204" pitchFamily="18" charset="0"/>
+                                      <a:ea typeface="MS Mincho" charset="0"/>
+                                    </a:rPr>
+                                  </m:ctrlPr>
+                                </m:sSubPr>
+                                <m:e>
+                                  <m:r>
+                                    <a:rPr lang="en-US" altLang="zh-CN" sz="2000" b="0" i="1" smtClean="0">
+                                      <a:latin typeface="Cambria Math" panose="02040503050406030204" pitchFamily="18" charset="0"/>
+                                      <a:ea typeface="MS Mincho" charset="0"/>
+                                    </a:rPr>
+                                    <m:t>𝑝</m:t>
+                                  </m:r>
+                                </m:e>
+                                <m:sub>
+                                  <m:r>
+                                    <a:rPr lang="zh-CN" altLang="en-US" sz="2000" i="1" smtClean="0">
+                                      <a:latin typeface="Cambria Math" panose="02040503050406030204" pitchFamily="18" charset="0"/>
+                                      <a:ea typeface="MS Mincho" charset="0"/>
+                                    </a:rPr>
+                                    <m:t>𝜅</m:t>
+                                  </m:r>
+                                </m:sub>
+                              </m:sSub>
+                            </m:oMath>
+                          </m:oMathPara>
+                        </a14:m>
+                        <a:endParaRPr lang="en-US" altLang="zh-CN" sz="2000" i="1" dirty="0">
+                          <a:latin typeface="Cambria Math" panose="02040503050406030204" charset="0"/>
+                          <a:ea typeface="MS Mincho" charset="0"/>
+                          <a:cs typeface="Cambria Math" panose="02040503050406030204" charset="0"/>
+                        </a:endParaRPr>
+                      </a:p>
+                    </p:txBody>
+                  </p:sp>
+                </mc:Choice>
+                <mc:Fallback>
+                  <p:sp>
+                    <p:nvSpPr>
+                      <p:cNvPr id="282" name="文本框 21">
+                        <a:extLst>
+                          <a:ext uri="{FF2B5EF4-FFF2-40B4-BE49-F238E27FC236}">
+                            <a16:creationId xmlns:a16="http://schemas.microsoft.com/office/drawing/2014/main" id="{A48C6293-7315-4C54-6B1F-674628C79216}"/>
+                          </a:ext>
+                        </a:extLst>
+                      </p:cNvPr>
+                      <p:cNvSpPr txBox="1">
+                        <a:spLocks noRot="1" noChangeAspect="1" noMove="1" noResize="1" noEditPoints="1" noAdjustHandles="1" noChangeArrowheads="1" noChangeShapeType="1" noTextEdit="1"/>
+                      </p:cNvSpPr>
+                      <p:nvPr/>
+                    </p:nvSpPr>
+                    <p:spPr>
+                      <a:xfrm>
+                        <a:off x="880377" y="1263648"/>
+                        <a:ext cx="641384" cy="414627"/>
+                      </a:xfrm>
+                      <a:prstGeom prst="rect">
+                        <a:avLst/>
+                      </a:prstGeom>
+                      <a:blipFill>
+                        <a:blip r:embed="rId18"/>
+                        <a:stretch>
+                          <a:fillRect b="-5882"/>
+                        </a:stretch>
+                      </a:blipFill>
+                    </p:spPr>
+                    <p:txBody>
+                      <a:bodyPr/>
+                      <a:lstStyle/>
+                      <a:p>
+                        <a:r>
+                          <a:rPr lang="en-US">
+                            <a:noFill/>
+                          </a:rPr>
+                          <a:t> </a:t>
+                        </a:r>
+                      </a:p>
+                    </p:txBody>
+                  </p:sp>
+                </mc:Fallback>
+              </mc:AlternateContent>
+              <mc:AlternateContent xmlns:mc="http://schemas.openxmlformats.org/markup-compatibility/2006">
+                <mc:Choice xmlns:a14="http://schemas.microsoft.com/office/drawing/2010/main" Requires="a14">
+                  <p:sp>
+                    <p:nvSpPr>
+                      <p:cNvPr id="283" name="文本框 22">
+                        <a:extLst>
+                          <a:ext uri="{FF2B5EF4-FFF2-40B4-BE49-F238E27FC236}">
+                            <a16:creationId xmlns:a16="http://schemas.microsoft.com/office/drawing/2014/main" id="{3363E5B4-ADE6-FB83-17C0-FD78E64FCC4E}"/>
+                          </a:ext>
+                        </a:extLst>
+                      </p:cNvPr>
+                      <p:cNvSpPr txBox="1"/>
+                      <p:nvPr/>
+                    </p:nvSpPr>
+                    <p:spPr>
+                      <a:xfrm>
+                        <a:off x="325572" y="2329605"/>
+                        <a:ext cx="262815" cy="369327"/>
+                      </a:xfrm>
+                      <a:prstGeom prst="rect">
+                        <a:avLst/>
+                      </a:prstGeom>
+                      <a:noFill/>
+                    </p:spPr>
+                    <p:txBody>
+                      <a:bodyPr wrap="square" rtlCol="0">
+                        <a:noAutofit/>
+                      </a:bodyPr>
+                      <a:lstStyle/>
+                      <a:p>
+                        <a:pPr algn="ctr"/>
+                        <a14:m>
+                          <m:oMathPara xmlns:m="http://schemas.openxmlformats.org/officeDocument/2006/math">
+                            <m:oMathParaPr>
+                              <m:jc m:val="center"/>
+                            </m:oMathParaPr>
+                            <m:oMath xmlns:m="http://schemas.openxmlformats.org/officeDocument/2006/math">
+                              <m:r>
+                                <a:rPr lang="en-US" altLang="zh-CN" sz="2000" i="1">
+                                  <a:latin typeface="Cambria Math" panose="02040503050406030204" charset="0"/>
+                                  <a:ea typeface="MS Mincho" charset="0"/>
+                                  <a:cs typeface="Cambria Math" panose="02040503050406030204" charset="0"/>
+                                </a:rPr>
+                                <m:t>𝛿</m:t>
+                              </m:r>
+                            </m:oMath>
+                          </m:oMathPara>
+                        </a14:m>
+                        <a:endParaRPr lang="en-US" altLang="zh-CN" sz="2000" i="1" dirty="0">
+                          <a:latin typeface="Cambria Math" panose="02040503050406030204" charset="0"/>
+                          <a:ea typeface="MS Mincho" charset="0"/>
+                          <a:cs typeface="Cambria Math" panose="02040503050406030204" charset="0"/>
+                        </a:endParaRPr>
+                      </a:p>
+                    </p:txBody>
+                  </p:sp>
+                </mc:Choice>
+                <mc:Fallback>
+                  <p:sp>
+                    <p:nvSpPr>
+                      <p:cNvPr id="283" name="文本框 22">
+                        <a:extLst>
+                          <a:ext uri="{FF2B5EF4-FFF2-40B4-BE49-F238E27FC236}">
+                            <a16:creationId xmlns:a16="http://schemas.microsoft.com/office/drawing/2014/main" id="{3363E5B4-ADE6-FB83-17C0-FD78E64FCC4E}"/>
+                          </a:ext>
+                        </a:extLst>
+                      </p:cNvPr>
+                      <p:cNvSpPr txBox="1">
+                        <a:spLocks noRot="1" noChangeAspect="1" noMove="1" noResize="1" noEditPoints="1" noAdjustHandles="1" noChangeArrowheads="1" noChangeShapeType="1" noTextEdit="1"/>
+                      </p:cNvSpPr>
+                      <p:nvPr/>
+                    </p:nvSpPr>
+                    <p:spPr>
+                      <a:xfrm>
+                        <a:off x="325572" y="2329605"/>
+                        <a:ext cx="262815" cy="369327"/>
+                      </a:xfrm>
+                      <a:prstGeom prst="rect">
+                        <a:avLst/>
+                      </a:prstGeom>
+                      <a:blipFill>
+                        <a:blip r:embed="rId19"/>
+                        <a:stretch>
+                          <a:fillRect l="-26190" b="-4918"/>
+                        </a:stretch>
+                      </a:blipFill>
+                    </p:spPr>
+                    <p:txBody>
+                      <a:bodyPr/>
+                      <a:lstStyle/>
+                      <a:p>
+                        <a:r>
+                          <a:rPr lang="en-US">
+                            <a:noFill/>
+                          </a:rPr>
+                          <a:t> </a:t>
+                        </a:r>
+                      </a:p>
+                    </p:txBody>
+                  </p:sp>
+                </mc:Fallback>
+              </mc:AlternateContent>
+              <mc:AlternateContent xmlns:mc="http://schemas.openxmlformats.org/markup-compatibility/2006">
+                <mc:Choice xmlns:a14="http://schemas.microsoft.com/office/drawing/2010/main" Requires="a14">
+                  <p:sp>
+                    <p:nvSpPr>
+                      <p:cNvPr id="284" name="文本框 6">
+                        <a:extLst>
+                          <a:ext uri="{FF2B5EF4-FFF2-40B4-BE49-F238E27FC236}">
+                            <a16:creationId xmlns:a16="http://schemas.microsoft.com/office/drawing/2014/main" id="{5AC8FC48-61BF-43A3-6F5F-959F677349CA}"/>
+                          </a:ext>
+                        </a:extLst>
+                      </p:cNvPr>
+                      <p:cNvSpPr txBox="1"/>
+                      <p:nvPr/>
+                    </p:nvSpPr>
+                    <p:spPr>
+                      <a:xfrm>
+                        <a:off x="3531763" y="4546812"/>
+                        <a:ext cx="306382" cy="256543"/>
+                      </a:xfrm>
+                      <a:prstGeom prst="rect">
+                        <a:avLst/>
+                      </a:prstGeom>
+                      <a:noFill/>
+                    </p:spPr>
+                    <p:txBody>
+                      <a:bodyPr wrap="square" rtlCol="0">
+                        <a:noAutofit/>
+                      </a:bodyPr>
+                      <a:lstStyle/>
+                      <a:p>
+                        <a:pPr algn="ctr"/>
+                        <a14:m>
+                          <m:oMathPara xmlns:m="http://schemas.openxmlformats.org/officeDocument/2006/math">
+                            <m:oMathParaPr>
+                              <m:jc m:val="center"/>
+                            </m:oMathParaPr>
+                            <m:oMath xmlns:m="http://schemas.openxmlformats.org/officeDocument/2006/math">
+                              <m:r>
+                                <a:rPr lang="en-US" altLang="zh-CN" sz="2000" i="1">
+                                  <a:latin typeface="Cambria Math" panose="02040503050406030204" charset="0"/>
+                                  <a:ea typeface="MS Mincho" charset="0"/>
+                                  <a:cs typeface="Cambria Math" panose="02040503050406030204" charset="0"/>
+                                </a:rPr>
+                                <m:t>𝐴</m:t>
+                              </m:r>
+                            </m:oMath>
+                          </m:oMathPara>
+                        </a14:m>
+                        <a:endParaRPr lang="en-US" altLang="zh-CN" sz="2000" i="1" dirty="0">
+                          <a:latin typeface="Cambria Math" panose="02040503050406030204" charset="0"/>
+                          <a:ea typeface="MS Mincho" charset="0"/>
+                          <a:cs typeface="Cambria Math" panose="02040503050406030204" charset="0"/>
+                        </a:endParaRPr>
+                      </a:p>
+                    </p:txBody>
+                  </p:sp>
+                </mc:Choice>
+                <mc:Fallback>
+                  <p:sp>
+                    <p:nvSpPr>
+                      <p:cNvPr id="284" name="文本框 6">
+                        <a:extLst>
+                          <a:ext uri="{FF2B5EF4-FFF2-40B4-BE49-F238E27FC236}">
+                            <a16:creationId xmlns:a16="http://schemas.microsoft.com/office/drawing/2014/main" id="{5AC8FC48-61BF-43A3-6F5F-959F677349CA}"/>
+                          </a:ext>
+                        </a:extLst>
+                      </p:cNvPr>
+                      <p:cNvSpPr txBox="1">
+                        <a:spLocks noRot="1" noChangeAspect="1" noMove="1" noResize="1" noEditPoints="1" noAdjustHandles="1" noChangeArrowheads="1" noChangeShapeType="1" noTextEdit="1"/>
+                      </p:cNvSpPr>
+                      <p:nvPr/>
+                    </p:nvSpPr>
+                    <p:spPr>
+                      <a:xfrm>
+                        <a:off x="3531763" y="4546812"/>
+                        <a:ext cx="306382" cy="256543"/>
+                      </a:xfrm>
+                      <a:prstGeom prst="rect">
+                        <a:avLst/>
+                      </a:prstGeom>
+                      <a:blipFill>
+                        <a:blip r:embed="rId20"/>
+                        <a:stretch>
+                          <a:fillRect l="-16327" b="-46512"/>
+                        </a:stretch>
+                      </a:blipFill>
+                    </p:spPr>
+                    <p:txBody>
+                      <a:bodyPr/>
+                      <a:lstStyle/>
+                      <a:p>
+                        <a:r>
+                          <a:rPr lang="en-US">
+                            <a:noFill/>
+                          </a:rPr>
+                          <a:t> </a:t>
+                        </a:r>
+                      </a:p>
+                    </p:txBody>
+                  </p:sp>
+                </mc:Fallback>
+              </mc:AlternateContent>
+              <mc:AlternateContent xmlns:mc="http://schemas.openxmlformats.org/markup-compatibility/2006">
+                <mc:Choice xmlns:a14="http://schemas.microsoft.com/office/drawing/2010/main" Requires="a14">
+                  <p:sp>
+                    <p:nvSpPr>
+                      <p:cNvPr id="285" name="文本框 7">
+                        <a:extLst>
+                          <a:ext uri="{FF2B5EF4-FFF2-40B4-BE49-F238E27FC236}">
+                            <a16:creationId xmlns:a16="http://schemas.microsoft.com/office/drawing/2014/main" id="{29E551B9-9E53-630D-2F3A-37749D7504A1}"/>
+                          </a:ext>
+                        </a:extLst>
+                      </p:cNvPr>
+                      <p:cNvSpPr txBox="1"/>
+                      <p:nvPr/>
+                    </p:nvSpPr>
+                    <p:spPr>
+                      <a:xfrm>
+                        <a:off x="2216862" y="5010287"/>
+                        <a:ext cx="306382" cy="256543"/>
+                      </a:xfrm>
+                      <a:prstGeom prst="rect">
+                        <a:avLst/>
+                      </a:prstGeom>
+                      <a:noFill/>
+                    </p:spPr>
+                    <p:txBody>
+                      <a:bodyPr wrap="square" rtlCol="0">
+                        <a:noAutofit/>
+                      </a:bodyPr>
+                      <a:lstStyle/>
+                      <a:p>
+                        <a:pPr algn="ctr"/>
+                        <a14:m>
+                          <m:oMathPara xmlns:m="http://schemas.openxmlformats.org/officeDocument/2006/math">
+                            <m:oMathParaPr>
+                              <m:jc m:val="center"/>
+                            </m:oMathParaPr>
+                            <m:oMath xmlns:m="http://schemas.openxmlformats.org/officeDocument/2006/math">
+                              <m:r>
+                                <a:rPr lang="en-US" altLang="zh-CN" sz="2000" b="0" i="1" smtClean="0">
+                                  <a:latin typeface="Cambria Math" panose="02040503050406030204" pitchFamily="18" charset="0"/>
+                                  <a:ea typeface="MS Mincho" charset="0"/>
+                                  <a:cs typeface="Cambria Math" panose="02040503050406030204" charset="0"/>
+                                </a:rPr>
+                                <m:t>|</m:t>
+                              </m:r>
+                              <m:r>
+                                <a:rPr lang="en-US" altLang="zh-CN" sz="2000" i="1" smtClean="0">
+                                  <a:latin typeface="Cambria Math" panose="02040503050406030204" charset="0"/>
+                                  <a:ea typeface="MS Mincho" charset="0"/>
+                                  <a:cs typeface="Cambria Math" panose="02040503050406030204" charset="0"/>
+                                </a:rPr>
+                                <m:t>𝐵</m:t>
+                              </m:r>
+                              <m:r>
+                                <a:rPr lang="en-US" altLang="zh-CN" sz="2000" b="0" i="1" smtClean="0">
+                                  <a:latin typeface="Cambria Math" panose="02040503050406030204" pitchFamily="18" charset="0"/>
+                                  <a:ea typeface="MS Mincho" charset="0"/>
+                                  <a:cs typeface="Cambria Math" panose="02040503050406030204" charset="0"/>
+                                </a:rPr>
+                                <m:t>|</m:t>
+                              </m:r>
+                            </m:oMath>
+                          </m:oMathPara>
+                        </a14:m>
+                        <a:endParaRPr lang="en-US" altLang="zh-CN" sz="2000" i="1" dirty="0">
+                          <a:latin typeface="Cambria Math" panose="02040503050406030204" charset="0"/>
+                          <a:ea typeface="MS Mincho" charset="0"/>
+                          <a:cs typeface="Cambria Math" panose="02040503050406030204" charset="0"/>
+                        </a:endParaRPr>
+                      </a:p>
+                    </p:txBody>
+                  </p:sp>
+                </mc:Choice>
+                <mc:Fallback>
+                  <p:sp>
+                    <p:nvSpPr>
+                      <p:cNvPr id="285" name="文本框 7">
+                        <a:extLst>
+                          <a:ext uri="{FF2B5EF4-FFF2-40B4-BE49-F238E27FC236}">
+                            <a16:creationId xmlns:a16="http://schemas.microsoft.com/office/drawing/2014/main" id="{29E551B9-9E53-630D-2F3A-37749D7504A1}"/>
+                          </a:ext>
+                        </a:extLst>
+                      </p:cNvPr>
+                      <p:cNvSpPr txBox="1">
+                        <a:spLocks noRot="1" noChangeAspect="1" noMove="1" noResize="1" noEditPoints="1" noAdjustHandles="1" noChangeArrowheads="1" noChangeShapeType="1" noTextEdit="1"/>
+                      </p:cNvSpPr>
+                      <p:nvPr/>
+                    </p:nvSpPr>
+                    <p:spPr>
+                      <a:xfrm>
+                        <a:off x="2216862" y="5010287"/>
+                        <a:ext cx="306382" cy="256543"/>
+                      </a:xfrm>
+                      <a:prstGeom prst="rect">
+                        <a:avLst/>
+                      </a:prstGeom>
+                      <a:blipFill>
+                        <a:blip r:embed="rId21"/>
+                        <a:stretch>
+                          <a:fillRect l="-54000" r="-34000" b="-83333"/>
+                        </a:stretch>
+                      </a:blipFill>
+                    </p:spPr>
+                    <p:txBody>
+                      <a:bodyPr/>
+                      <a:lstStyle/>
+                      <a:p>
+                        <a:r>
+                          <a:rPr lang="en-US">
+                            <a:noFill/>
+                          </a:rPr>
+                          <a:t> </a:t>
+                        </a:r>
+                      </a:p>
+                    </p:txBody>
+                  </p:sp>
+                </mc:Fallback>
+              </mc:AlternateContent>
+              <mc:AlternateContent xmlns:mc="http://schemas.openxmlformats.org/markup-compatibility/2006">
+                <mc:Choice xmlns:a14="http://schemas.microsoft.com/office/drawing/2010/main" Requires="a14">
+                  <p:sp>
+                    <p:nvSpPr>
+                      <p:cNvPr id="286" name="文本框 8">
+                        <a:extLst>
+                          <a:ext uri="{FF2B5EF4-FFF2-40B4-BE49-F238E27FC236}">
+                            <a16:creationId xmlns:a16="http://schemas.microsoft.com/office/drawing/2014/main" id="{DEA4D6DF-5143-9804-6096-3E2EACE4932B}"/>
+                          </a:ext>
+                        </a:extLst>
+                      </p:cNvPr>
+                      <p:cNvSpPr txBox="1"/>
+                      <p:nvPr/>
+                    </p:nvSpPr>
+                    <p:spPr>
+                      <a:xfrm>
+                        <a:off x="967720" y="4604017"/>
+                        <a:ext cx="306382" cy="256543"/>
+                      </a:xfrm>
+                      <a:prstGeom prst="rect">
+                        <a:avLst/>
+                      </a:prstGeom>
+                      <a:noFill/>
+                    </p:spPr>
+                    <p:txBody>
+                      <a:bodyPr wrap="square" rtlCol="0">
+                        <a:noAutofit/>
+                      </a:bodyPr>
+                      <a:lstStyle/>
+                      <a:p>
+                        <a:pPr algn="ctr"/>
+                        <a14:m>
+                          <m:oMathPara xmlns:m="http://schemas.openxmlformats.org/officeDocument/2006/math">
+                            <m:oMathParaPr>
+                              <m:jc m:val="center"/>
+                            </m:oMathParaPr>
+                            <m:oMath xmlns:m="http://schemas.openxmlformats.org/officeDocument/2006/math">
+                              <m:r>
+                                <a:rPr lang="en-US" altLang="zh-CN" sz="2000" i="1">
+                                  <a:latin typeface="Cambria Math" panose="02040503050406030204" charset="0"/>
+                                  <a:ea typeface="MS Mincho" charset="0"/>
+                                  <a:cs typeface="Cambria Math" panose="02040503050406030204" charset="0"/>
+                                </a:rPr>
+                                <m:t>𝐶</m:t>
+                              </m:r>
+                            </m:oMath>
+                          </m:oMathPara>
+                        </a14:m>
+                        <a:endParaRPr lang="en-US" altLang="zh-CN" sz="2000" i="1" dirty="0">
+                          <a:latin typeface="Cambria Math" panose="02040503050406030204" charset="0"/>
+                          <a:ea typeface="MS Mincho" charset="0"/>
+                          <a:cs typeface="Cambria Math" panose="02040503050406030204" charset="0"/>
+                        </a:endParaRPr>
+                      </a:p>
+                    </p:txBody>
+                  </p:sp>
+                </mc:Choice>
+                <mc:Fallback>
+                  <p:sp>
+                    <p:nvSpPr>
+                      <p:cNvPr id="286" name="文本框 8">
+                        <a:extLst>
+                          <a:ext uri="{FF2B5EF4-FFF2-40B4-BE49-F238E27FC236}">
+                            <a16:creationId xmlns:a16="http://schemas.microsoft.com/office/drawing/2014/main" id="{DEA4D6DF-5143-9804-6096-3E2EACE4932B}"/>
+                          </a:ext>
+                        </a:extLst>
+                      </p:cNvPr>
+                      <p:cNvSpPr txBox="1">
+                        <a:spLocks noRot="1" noChangeAspect="1" noMove="1" noResize="1" noEditPoints="1" noAdjustHandles="1" noChangeArrowheads="1" noChangeShapeType="1" noTextEdit="1"/>
+                      </p:cNvSpPr>
+                      <p:nvPr/>
+                    </p:nvSpPr>
+                    <p:spPr>
+                      <a:xfrm>
+                        <a:off x="967720" y="4604017"/>
+                        <a:ext cx="306382" cy="256543"/>
+                      </a:xfrm>
+                      <a:prstGeom prst="rect">
+                        <a:avLst/>
+                      </a:prstGeom>
+                      <a:blipFill>
+                        <a:blip r:embed="rId22"/>
+                        <a:stretch>
+                          <a:fillRect l="-14000" b="-50000"/>
+                        </a:stretch>
+                      </a:blipFill>
+                    </p:spPr>
+                    <p:txBody>
+                      <a:bodyPr/>
+                      <a:lstStyle/>
+                      <a:p>
+                        <a:r>
+                          <a:rPr lang="en-US">
+                            <a:noFill/>
+                          </a:rPr>
+                          <a:t> </a:t>
+                        </a:r>
+                      </a:p>
+                    </p:txBody>
+                  </p:sp>
+                </mc:Fallback>
+              </mc:AlternateContent>
+              <mc:AlternateContent xmlns:mc="http://schemas.openxmlformats.org/markup-compatibility/2006">
+                <mc:Choice xmlns:a14="http://schemas.microsoft.com/office/drawing/2010/main" Requires="a14">
+                  <p:sp>
+                    <p:nvSpPr>
+                      <p:cNvPr id="287" name="文本框 21">
+                        <a:extLst>
+                          <a:ext uri="{FF2B5EF4-FFF2-40B4-BE49-F238E27FC236}">
+                            <a16:creationId xmlns:a16="http://schemas.microsoft.com/office/drawing/2014/main" id="{677DAB5E-75A7-504E-8C3E-7464276BF3E6}"/>
+                          </a:ext>
+                        </a:extLst>
+                      </p:cNvPr>
+                      <p:cNvSpPr txBox="1"/>
+                      <p:nvPr/>
+                    </p:nvSpPr>
+                    <p:spPr>
+                      <a:xfrm>
+                        <a:off x="3302055" y="1374321"/>
+                        <a:ext cx="641385" cy="479471"/>
+                      </a:xfrm>
+                      <a:prstGeom prst="rect">
+                        <a:avLst/>
+                      </a:prstGeom>
+                      <a:noFill/>
+                    </p:spPr>
+                    <p:txBody>
+                      <a:bodyPr wrap="square" rtlCol="0">
+                        <a:noAutofit/>
+                      </a:bodyPr>
+                      <a:lstStyle/>
+                      <a:p>
+                        <a:pPr algn="ctr"/>
+                        <a14:m>
+                          <m:oMathPara xmlns:m="http://schemas.openxmlformats.org/officeDocument/2006/math">
+                            <m:oMathParaPr>
+                              <m:jc m:val="center"/>
+                            </m:oMathParaPr>
+                            <m:oMath xmlns:m="http://schemas.openxmlformats.org/officeDocument/2006/math">
+                              <m:sSub>
+                                <m:sSubPr>
+                                  <m:ctrlPr>
+                                    <a:rPr lang="en-US" altLang="zh-CN" sz="2000" i="1" smtClean="0">
+                                      <a:latin typeface="Cambria Math" panose="02040503050406030204" pitchFamily="18" charset="0"/>
+                                      <a:ea typeface="MS Mincho" charset="0"/>
+                                    </a:rPr>
+                                  </m:ctrlPr>
+                                </m:sSubPr>
+                                <m:e>
+                                  <m:r>
+                                    <a:rPr lang="en-US" altLang="zh-CN" sz="2000" b="0" i="1" smtClean="0">
+                                      <a:latin typeface="Cambria Math" panose="02040503050406030204" pitchFamily="18" charset="0"/>
+                                      <a:ea typeface="MS Mincho" charset="0"/>
+                                    </a:rPr>
+                                    <m:t>𝑝</m:t>
+                                  </m:r>
+                                </m:e>
+                                <m:sub>
+                                  <m:r>
+                                    <a:rPr lang="zh-CN" altLang="en-US" sz="2000" b="0" i="1" smtClean="0">
+                                      <a:latin typeface="Cambria Math" panose="02040503050406030204" pitchFamily="18" charset="0"/>
+                                      <a:ea typeface="MS Mincho" charset="0"/>
+                                    </a:rPr>
+                                    <m:t>𝛼</m:t>
+                                  </m:r>
+                                </m:sub>
+                              </m:sSub>
+                            </m:oMath>
+                          </m:oMathPara>
+                        </a14:m>
+                        <a:endParaRPr lang="en-US" altLang="zh-CN" sz="2000" i="1" dirty="0">
+                          <a:latin typeface="Cambria Math" panose="02040503050406030204" charset="0"/>
+                          <a:ea typeface="MS Mincho" charset="0"/>
+                          <a:cs typeface="Cambria Math" panose="02040503050406030204" charset="0"/>
+                        </a:endParaRPr>
+                      </a:p>
+                    </p:txBody>
+                  </p:sp>
+                </mc:Choice>
+                <mc:Fallback>
+                  <p:sp>
+                    <p:nvSpPr>
+                      <p:cNvPr id="287" name="文本框 21">
+                        <a:extLst>
+                          <a:ext uri="{FF2B5EF4-FFF2-40B4-BE49-F238E27FC236}">
+                            <a16:creationId xmlns:a16="http://schemas.microsoft.com/office/drawing/2014/main" id="{677DAB5E-75A7-504E-8C3E-7464276BF3E6}"/>
+                          </a:ext>
+                        </a:extLst>
+                      </p:cNvPr>
+                      <p:cNvSpPr txBox="1">
+                        <a:spLocks noRot="1" noChangeAspect="1" noMove="1" noResize="1" noEditPoints="1" noAdjustHandles="1" noChangeArrowheads="1" noChangeShapeType="1" noTextEdit="1"/>
+                      </p:cNvSpPr>
+                      <p:nvPr/>
+                    </p:nvSpPr>
+                    <p:spPr>
+                      <a:xfrm>
+                        <a:off x="3302055" y="1374321"/>
+                        <a:ext cx="641385" cy="479471"/>
+                      </a:xfrm>
+                      <a:prstGeom prst="rect">
+                        <a:avLst/>
+                      </a:prstGeom>
+                      <a:blipFill>
+                        <a:blip r:embed="rId23"/>
+                        <a:stretch>
+                          <a:fillRect/>
+                        </a:stretch>
+                      </a:blipFill>
+                    </p:spPr>
+                    <p:txBody>
+                      <a:bodyPr/>
+                      <a:lstStyle/>
+                      <a:p>
+                        <a:r>
+                          <a:rPr lang="en-US">
+                            <a:noFill/>
+                          </a:rPr>
+                          <a:t> </a:t>
+                        </a:r>
+                      </a:p>
+                    </p:txBody>
+                  </p:sp>
+                </mc:Fallback>
+              </mc:AlternateContent>
+            </p:grpSp>
+            <p:sp>
+              <p:nvSpPr>
+                <p:cNvPr id="263" name="TextBox 262">
+                  <a:extLst>
+                    <a:ext uri="{FF2B5EF4-FFF2-40B4-BE49-F238E27FC236}">
+                      <a16:creationId xmlns:a16="http://schemas.microsoft.com/office/drawing/2014/main" id="{FCD7D082-7465-EBD4-BE96-74AE181F0E31}"/>
+                    </a:ext>
+                  </a:extLst>
+                </p:cNvPr>
+                <p:cNvSpPr txBox="1"/>
+                <p:nvPr/>
+              </p:nvSpPr>
+              <p:spPr>
+                <a:xfrm rot="1998811">
+                  <a:off x="2947782" y="1876188"/>
+                  <a:ext cx="766557" cy="338554"/>
+                </a:xfrm>
+                <a:prstGeom prst="rect">
+                  <a:avLst/>
+                </a:prstGeom>
+                <a:noFill/>
+              </p:spPr>
+              <p:txBody>
+                <a:bodyPr wrap="none" rtlCol="0">
+                  <a:spAutoFit/>
+                </a:bodyPr>
+                <a:lstStyle/>
+                <a:p>
+                  <a:r>
+                    <a:rPr lang="en-US" sz="1600" dirty="0">
+                      <a:latin typeface="Arial" panose="020B0604020202020204" pitchFamily="34" charset="0"/>
+                      <a:cs typeface="Arial" panose="020B0604020202020204" pitchFamily="34" charset="0"/>
+                    </a:rPr>
+                    <a:t>32.9%</a:t>
+                  </a:r>
+                </a:p>
+              </p:txBody>
+            </p:sp>
+            <p:sp>
+              <p:nvSpPr>
+                <p:cNvPr id="264" name="TextBox 263">
+                  <a:extLst>
+                    <a:ext uri="{FF2B5EF4-FFF2-40B4-BE49-F238E27FC236}">
+                      <a16:creationId xmlns:a16="http://schemas.microsoft.com/office/drawing/2014/main" id="{E811B432-AF76-4D60-E17C-C914A66195D9}"/>
+                    </a:ext>
+                  </a:extLst>
+                </p:cNvPr>
+                <p:cNvSpPr txBox="1"/>
+                <p:nvPr/>
+              </p:nvSpPr>
+              <p:spPr>
+                <a:xfrm rot="1872829">
+                  <a:off x="3087001" y="1673183"/>
+                  <a:ext cx="766557" cy="338554"/>
+                </a:xfrm>
+                <a:prstGeom prst="rect">
+                  <a:avLst/>
+                </a:prstGeom>
+                <a:noFill/>
+              </p:spPr>
+              <p:txBody>
+                <a:bodyPr wrap="none" rtlCol="0">
+                  <a:spAutoFit/>
+                </a:bodyPr>
+                <a:lstStyle/>
+                <a:p>
+                  <a:r>
+                    <a:rPr lang="en-US" sz="1600" dirty="0">
+                      <a:latin typeface="Arial" panose="020B0604020202020204" pitchFamily="34" charset="0"/>
+                      <a:cs typeface="Arial" panose="020B0604020202020204" pitchFamily="34" charset="0"/>
+                    </a:rPr>
+                    <a:t>33.1%</a:t>
+                  </a:r>
+                </a:p>
+              </p:txBody>
+            </p:sp>
+            <p:sp>
+              <p:nvSpPr>
+                <p:cNvPr id="265" name="TextBox 264">
+                  <a:extLst>
+                    <a:ext uri="{FF2B5EF4-FFF2-40B4-BE49-F238E27FC236}">
+                      <a16:creationId xmlns:a16="http://schemas.microsoft.com/office/drawing/2014/main" id="{E0F6F57F-45B7-0558-368F-EDA33C6FC4C5}"/>
+                    </a:ext>
+                  </a:extLst>
+                </p:cNvPr>
+                <p:cNvSpPr txBox="1"/>
+                <p:nvPr/>
+              </p:nvSpPr>
+              <p:spPr>
+                <a:xfrm>
+                  <a:off x="2409937" y="1619880"/>
+                  <a:ext cx="498855" cy="261610"/>
+                </a:xfrm>
+                <a:prstGeom prst="rect">
+                  <a:avLst/>
+                </a:prstGeom>
+                <a:noFill/>
+              </p:spPr>
+              <p:txBody>
+                <a:bodyPr wrap="none" rtlCol="0">
+                  <a:spAutoFit/>
+                </a:bodyPr>
+                <a:lstStyle/>
+                <a:p>
+                  <a:r>
+                    <a:rPr lang="en-US" sz="1100" dirty="0">
+                      <a:latin typeface="Arial" panose="020B0604020202020204" pitchFamily="34" charset="0"/>
+                      <a:cs typeface="Arial" panose="020B0604020202020204" pitchFamily="34" charset="0"/>
+                    </a:rPr>
+                    <a:t>2016</a:t>
+                  </a:r>
+                </a:p>
+              </p:txBody>
+            </p:sp>
+            <p:sp>
+              <p:nvSpPr>
+                <p:cNvPr id="266" name="TextBox 265">
+                  <a:extLst>
+                    <a:ext uri="{FF2B5EF4-FFF2-40B4-BE49-F238E27FC236}">
+                      <a16:creationId xmlns:a16="http://schemas.microsoft.com/office/drawing/2014/main" id="{555F7AC8-B75B-474B-13DF-68F6B06375DD}"/>
+                    </a:ext>
+                  </a:extLst>
+                </p:cNvPr>
+                <p:cNvSpPr txBox="1"/>
+                <p:nvPr/>
+              </p:nvSpPr>
+              <p:spPr>
+                <a:xfrm>
+                  <a:off x="2470653" y="1423744"/>
+                  <a:ext cx="498855" cy="261610"/>
+                </a:xfrm>
+                <a:prstGeom prst="rect">
+                  <a:avLst/>
+                </a:prstGeom>
+                <a:noFill/>
+              </p:spPr>
+              <p:txBody>
+                <a:bodyPr wrap="none" rtlCol="0">
+                  <a:spAutoFit/>
+                </a:bodyPr>
+                <a:lstStyle/>
+                <a:p>
+                  <a:r>
+                    <a:rPr lang="en-US" sz="1100" dirty="0">
+                      <a:latin typeface="Arial" panose="020B0604020202020204" pitchFamily="34" charset="0"/>
+                      <a:cs typeface="Arial" panose="020B0604020202020204" pitchFamily="34" charset="0"/>
+                    </a:rPr>
+                    <a:t>2023</a:t>
+                  </a:r>
+                </a:p>
+              </p:txBody>
+            </p:sp>
+            <p:sp>
+              <p:nvSpPr>
+                <p:cNvPr id="267" name="TextBox 266">
+                  <a:extLst>
+                    <a:ext uri="{FF2B5EF4-FFF2-40B4-BE49-F238E27FC236}">
+                      <a16:creationId xmlns:a16="http://schemas.microsoft.com/office/drawing/2014/main" id="{692058EE-285D-522D-2F59-ACE5779BFD57}"/>
+                    </a:ext>
+                  </a:extLst>
+                </p:cNvPr>
+                <p:cNvSpPr txBox="1"/>
+                <p:nvPr/>
+              </p:nvSpPr>
+              <p:spPr>
+                <a:xfrm rot="4450356">
+                  <a:off x="3709523" y="2517467"/>
+                  <a:ext cx="697627" cy="338554"/>
+                </a:xfrm>
+                <a:prstGeom prst="rect">
+                  <a:avLst/>
+                </a:prstGeom>
+                <a:noFill/>
+              </p:spPr>
+              <p:txBody>
+                <a:bodyPr wrap="none" rtlCol="0">
+                  <a:spAutoFit/>
+                </a:bodyPr>
+                <a:lstStyle/>
+                <a:p>
+                  <a:r>
+                    <a:rPr lang="en-US" sz="1600" dirty="0">
+                      <a:latin typeface="Arial" panose="020B0604020202020204" pitchFamily="34" charset="0"/>
+                      <a:cs typeface="Arial" panose="020B0604020202020204" pitchFamily="34" charset="0"/>
+                    </a:rPr>
+                    <a:t>0.317</a:t>
+                  </a:r>
+                </a:p>
+              </p:txBody>
+            </p:sp>
+            <p:sp>
+              <p:nvSpPr>
+                <p:cNvPr id="268" name="TextBox 267">
+                  <a:extLst>
+                    <a:ext uri="{FF2B5EF4-FFF2-40B4-BE49-F238E27FC236}">
+                      <a16:creationId xmlns:a16="http://schemas.microsoft.com/office/drawing/2014/main" id="{97D61193-D0E6-B7CE-555A-32CB8572B1A4}"/>
+                    </a:ext>
+                  </a:extLst>
+                </p:cNvPr>
+                <p:cNvSpPr txBox="1"/>
+                <p:nvPr/>
+              </p:nvSpPr>
+              <p:spPr>
+                <a:xfrm rot="4362618">
+                  <a:off x="3458937" y="2568974"/>
+                  <a:ext cx="697627" cy="338554"/>
+                </a:xfrm>
+                <a:prstGeom prst="rect">
+                  <a:avLst/>
+                </a:prstGeom>
+                <a:noFill/>
+              </p:spPr>
+              <p:txBody>
+                <a:bodyPr wrap="none" rtlCol="0">
+                  <a:spAutoFit/>
+                </a:bodyPr>
+                <a:lstStyle/>
+                <a:p>
+                  <a:r>
+                    <a:rPr lang="en-US" sz="1600" dirty="0">
+                      <a:latin typeface="Arial" panose="020B0604020202020204" pitchFamily="34" charset="0"/>
+                      <a:cs typeface="Arial" panose="020B0604020202020204" pitchFamily="34" charset="0"/>
+                    </a:rPr>
+                    <a:t>0.321</a:t>
+                  </a:r>
+                </a:p>
+              </p:txBody>
+            </p:sp>
+            <p:sp>
+              <p:nvSpPr>
+                <p:cNvPr id="269" name="Partial Circle 268">
+                  <a:extLst>
+                    <a:ext uri="{FF2B5EF4-FFF2-40B4-BE49-F238E27FC236}">
+                      <a16:creationId xmlns:a16="http://schemas.microsoft.com/office/drawing/2014/main" id="{7EDD55AB-7E78-F238-F43F-4337D21A4070}"/>
+                    </a:ext>
+                  </a:extLst>
+                </p:cNvPr>
+                <p:cNvSpPr/>
+                <p:nvPr/>
+              </p:nvSpPr>
+              <p:spPr>
+                <a:xfrm>
+                  <a:off x="834945" y="1583249"/>
+                  <a:ext cx="3200400" cy="3200400"/>
+                </a:xfrm>
+                <a:prstGeom prst="pie">
+                  <a:avLst>
+                    <a:gd name="adj1" fmla="val 10752796"/>
+                    <a:gd name="adj2" fmla="val 15122580"/>
+                  </a:avLst>
+                </a:prstGeom>
+                <a:solidFill>
+                  <a:srgbClr val="B0DF9A">
+                    <a:alpha val="50000"/>
+                  </a:srgbClr>
+                </a:solidFill>
+                <a:ln>
+                  <a:noFill/>
+                </a:ln>
+              </p:spPr>
+              <p:style>
+                <a:lnRef idx="2">
+                  <a:schemeClr val="accent1">
+                    <a:shade val="15000"/>
+                  </a:schemeClr>
+                </a:lnRef>
+                <a:fillRef idx="1">
+                  <a:schemeClr val="accent1"/>
+                </a:fillRef>
+                <a:effectRef idx="0">
+                  <a:schemeClr val="accent1"/>
+                </a:effectRef>
+                <a:fontRef idx="minor">
+                  <a:schemeClr val="lt1"/>
+                </a:fontRef>
+              </p:style>
+              <p:txBody>
+                <a:bodyPr rtlCol="0" anchor="ctr"/>
+                <a:lstStyle/>
+                <a:p>
+                  <a:pPr algn="ctr"/>
+                  <a:endParaRPr lang="en-US">
+                    <a:solidFill>
+                      <a:schemeClr val="tx1"/>
+                    </a:solidFill>
+                  </a:endParaRPr>
+                </a:p>
+              </p:txBody>
+            </p:sp>
+            <p:sp>
+              <p:nvSpPr>
+                <p:cNvPr id="270" name="Partial Circle 269">
+                  <a:extLst>
+                    <a:ext uri="{FF2B5EF4-FFF2-40B4-BE49-F238E27FC236}">
+                      <a16:creationId xmlns:a16="http://schemas.microsoft.com/office/drawing/2014/main" id="{1DA35698-0D5F-462E-8564-990A77A7F6F0}"/>
+                    </a:ext>
+                  </a:extLst>
+                </p:cNvPr>
+                <p:cNvSpPr/>
+                <p:nvPr/>
+              </p:nvSpPr>
+              <p:spPr>
+                <a:xfrm>
+                  <a:off x="834491" y="1601121"/>
+                  <a:ext cx="3200400" cy="3200400"/>
+                </a:xfrm>
+                <a:prstGeom prst="pie">
+                  <a:avLst>
+                    <a:gd name="adj1" fmla="val 2154102"/>
+                    <a:gd name="adj2" fmla="val 8665389"/>
+                  </a:avLst>
+                </a:prstGeom>
+                <a:solidFill>
+                  <a:srgbClr val="DFCA9A">
+                    <a:alpha val="50000"/>
+                  </a:srgbClr>
+                </a:solidFill>
+                <a:ln>
+                  <a:noFill/>
+                </a:ln>
+              </p:spPr>
+              <p:style>
+                <a:lnRef idx="2">
+                  <a:schemeClr val="accent1">
+                    <a:shade val="15000"/>
+                  </a:schemeClr>
+                </a:lnRef>
+                <a:fillRef idx="1">
+                  <a:schemeClr val="accent1"/>
+                </a:fillRef>
+                <a:effectRef idx="0">
+                  <a:schemeClr val="accent1"/>
+                </a:effectRef>
+                <a:fontRef idx="minor">
+                  <a:schemeClr val="lt1"/>
+                </a:fontRef>
+              </p:style>
+              <p:txBody>
+                <a:bodyPr rtlCol="0" anchor="ctr"/>
+                <a:lstStyle/>
+                <a:p>
+                  <a:pPr algn="ctr"/>
+                  <a:endParaRPr lang="en-US">
+                    <a:solidFill>
+                      <a:srgbClr val="00F5D4"/>
+                    </a:solidFill>
+                  </a:endParaRPr>
+                </a:p>
+              </p:txBody>
+            </p:sp>
+            <p:sp>
+              <p:nvSpPr>
+                <p:cNvPr id="271" name="TextBox 270">
+                  <a:extLst>
+                    <a:ext uri="{FF2B5EF4-FFF2-40B4-BE49-F238E27FC236}">
+                      <a16:creationId xmlns:a16="http://schemas.microsoft.com/office/drawing/2014/main" id="{B9E95871-BCAB-A814-C495-79C31EF69604}"/>
+                    </a:ext>
+                  </a:extLst>
+                </p:cNvPr>
+                <p:cNvSpPr txBox="1"/>
+                <p:nvPr/>
+              </p:nvSpPr>
+              <p:spPr>
+                <a:xfrm rot="19415433">
+                  <a:off x="1133864" y="1876187"/>
+                  <a:ext cx="773968" cy="338554"/>
+                </a:xfrm>
+                <a:prstGeom prst="rect">
+                  <a:avLst/>
+                </a:prstGeom>
+                <a:noFill/>
+              </p:spPr>
+              <p:txBody>
+                <a:bodyPr wrap="square">
+                  <a:spAutoFit/>
+                </a:bodyPr>
+                <a:lstStyle/>
+                <a:p>
+                  <a:r>
+                    <a:rPr lang="en-US" sz="1600" dirty="0">
+                      <a:latin typeface="Arial" panose="020B0604020202020204" pitchFamily="34" charset="0"/>
+                      <a:cs typeface="Arial" panose="020B0604020202020204" pitchFamily="34" charset="0"/>
+                    </a:rPr>
+                    <a:t>46.7%</a:t>
+                  </a:r>
+                </a:p>
+              </p:txBody>
+            </p:sp>
+            <p:sp>
+              <p:nvSpPr>
+                <p:cNvPr id="272" name="TextBox 271">
+                  <a:extLst>
+                    <a:ext uri="{FF2B5EF4-FFF2-40B4-BE49-F238E27FC236}">
+                      <a16:creationId xmlns:a16="http://schemas.microsoft.com/office/drawing/2014/main" id="{091CEE4D-7D39-CDC9-3C67-CC39DD934293}"/>
+                    </a:ext>
+                  </a:extLst>
+                </p:cNvPr>
+                <p:cNvSpPr txBox="1"/>
+                <p:nvPr/>
+              </p:nvSpPr>
+              <p:spPr>
+                <a:xfrm rot="19460468">
+                  <a:off x="985508" y="1673182"/>
+                  <a:ext cx="773968" cy="338554"/>
+                </a:xfrm>
+                <a:prstGeom prst="rect">
+                  <a:avLst/>
+                </a:prstGeom>
+                <a:noFill/>
+              </p:spPr>
+              <p:txBody>
+                <a:bodyPr wrap="square">
+                  <a:spAutoFit/>
+                </a:bodyPr>
+                <a:lstStyle/>
+                <a:p>
+                  <a:r>
+                    <a:rPr lang="en-US" sz="1600" dirty="0">
+                      <a:latin typeface="Arial" panose="020B0604020202020204" pitchFamily="34" charset="0"/>
+                      <a:cs typeface="Arial" panose="020B0604020202020204" pitchFamily="34" charset="0"/>
+                    </a:rPr>
+                    <a:t>47.1%</a:t>
+                  </a:r>
+                </a:p>
+              </p:txBody>
+            </p:sp>
+            <p:sp>
+              <p:nvSpPr>
+                <p:cNvPr id="273" name="TextBox 272">
+                  <a:extLst>
+                    <a:ext uri="{FF2B5EF4-FFF2-40B4-BE49-F238E27FC236}">
+                      <a16:creationId xmlns:a16="http://schemas.microsoft.com/office/drawing/2014/main" id="{D9BB4BDF-07C5-1CD6-ED78-39CFE3C3B5BE}"/>
+                    </a:ext>
+                  </a:extLst>
+                </p:cNvPr>
+                <p:cNvSpPr txBox="1"/>
+                <p:nvPr/>
+              </p:nvSpPr>
+              <p:spPr>
+                <a:xfrm rot="17343629">
+                  <a:off x="653436" y="2558305"/>
+                  <a:ext cx="773968" cy="338554"/>
+                </a:xfrm>
+                <a:prstGeom prst="rect">
+                  <a:avLst/>
+                </a:prstGeom>
+                <a:noFill/>
+              </p:spPr>
+              <p:txBody>
+                <a:bodyPr wrap="square">
+                  <a:spAutoFit/>
+                </a:bodyPr>
+                <a:lstStyle/>
+                <a:p>
+                  <a:r>
+                    <a:rPr lang="en-US" sz="1600" dirty="0">
+                      <a:latin typeface="Arial" panose="020B0604020202020204" pitchFamily="34" charset="0"/>
+                      <a:cs typeface="Arial" panose="020B0604020202020204" pitchFamily="34" charset="0"/>
+                    </a:rPr>
+                    <a:t>0.079</a:t>
+                  </a:r>
+                </a:p>
+              </p:txBody>
+            </p:sp>
+            <p:sp>
+              <p:nvSpPr>
+                <p:cNvPr id="274" name="TextBox 273">
+                  <a:extLst>
+                    <a:ext uri="{FF2B5EF4-FFF2-40B4-BE49-F238E27FC236}">
+                      <a16:creationId xmlns:a16="http://schemas.microsoft.com/office/drawing/2014/main" id="{40D2497E-0AAD-5EA8-B789-5E43EB9861FB}"/>
+                    </a:ext>
+                  </a:extLst>
+                </p:cNvPr>
+                <p:cNvSpPr txBox="1"/>
+                <p:nvPr/>
+              </p:nvSpPr>
+              <p:spPr>
+                <a:xfrm rot="17357952">
+                  <a:off x="423558" y="2484236"/>
+                  <a:ext cx="773968" cy="338554"/>
+                </a:xfrm>
+                <a:prstGeom prst="rect">
+                  <a:avLst/>
+                </a:prstGeom>
+                <a:noFill/>
+              </p:spPr>
+              <p:txBody>
+                <a:bodyPr wrap="square">
+                  <a:spAutoFit/>
+                </a:bodyPr>
+                <a:lstStyle/>
+                <a:p>
+                  <a:r>
+                    <a:rPr lang="en-US" sz="1600" dirty="0">
+                      <a:latin typeface="Arial" panose="020B0604020202020204" pitchFamily="34" charset="0"/>
+                      <a:cs typeface="Arial" panose="020B0604020202020204" pitchFamily="34" charset="0"/>
+                    </a:rPr>
+                    <a:t>0.075</a:t>
+                  </a:r>
+                </a:p>
+              </p:txBody>
+            </p:sp>
+            <p:sp>
+              <p:nvSpPr>
+                <p:cNvPr id="275" name="TextBox 274">
+                  <a:extLst>
+                    <a:ext uri="{FF2B5EF4-FFF2-40B4-BE49-F238E27FC236}">
+                      <a16:creationId xmlns:a16="http://schemas.microsoft.com/office/drawing/2014/main" id="{A1C6A5DF-5241-A4AF-9593-D6FBD33A82B0}"/>
+                    </a:ext>
+                  </a:extLst>
+                </p:cNvPr>
+                <p:cNvSpPr txBox="1"/>
+                <p:nvPr/>
+              </p:nvSpPr>
+              <p:spPr>
+                <a:xfrm rot="19343146">
+                  <a:off x="2976370" y="4147458"/>
+                  <a:ext cx="773968" cy="338554"/>
+                </a:xfrm>
+                <a:prstGeom prst="rect">
+                  <a:avLst/>
+                </a:prstGeom>
+                <a:noFill/>
+              </p:spPr>
+              <p:txBody>
+                <a:bodyPr wrap="square">
+                  <a:spAutoFit/>
+                </a:bodyPr>
+                <a:lstStyle/>
+                <a:p>
+                  <a:r>
+                    <a:rPr lang="en-US" sz="1600" dirty="0">
+                      <a:latin typeface="Arial" panose="020B0604020202020204" pitchFamily="34" charset="0"/>
+                      <a:cs typeface="Arial" panose="020B0604020202020204" pitchFamily="34" charset="0"/>
+                    </a:rPr>
+                    <a:t>8.20</a:t>
+                  </a:r>
+                </a:p>
+              </p:txBody>
+            </p:sp>
+            <p:sp>
+              <p:nvSpPr>
+                <p:cNvPr id="276" name="TextBox 275">
+                  <a:extLst>
+                    <a:ext uri="{FF2B5EF4-FFF2-40B4-BE49-F238E27FC236}">
+                      <a16:creationId xmlns:a16="http://schemas.microsoft.com/office/drawing/2014/main" id="{A8547D75-1F6C-8B98-EF05-0F657A02FBA2}"/>
+                    </a:ext>
+                  </a:extLst>
+                </p:cNvPr>
+                <p:cNvSpPr txBox="1"/>
+                <p:nvPr/>
+              </p:nvSpPr>
+              <p:spPr>
+                <a:xfrm rot="19232585">
+                  <a:off x="3136626" y="4341842"/>
+                  <a:ext cx="773968" cy="338554"/>
+                </a:xfrm>
+                <a:prstGeom prst="rect">
+                  <a:avLst/>
+                </a:prstGeom>
+                <a:noFill/>
+              </p:spPr>
+              <p:txBody>
+                <a:bodyPr wrap="square">
+                  <a:spAutoFit/>
+                </a:bodyPr>
+                <a:lstStyle/>
+                <a:p>
+                  <a:r>
+                    <a:rPr lang="en-US" sz="1600" dirty="0">
+                      <a:latin typeface="Arial" panose="020B0604020202020204" pitchFamily="34" charset="0"/>
+                      <a:cs typeface="Arial" panose="020B0604020202020204" pitchFamily="34" charset="0"/>
+                    </a:rPr>
+                    <a:t>8.02</a:t>
+                  </a:r>
+                </a:p>
+              </p:txBody>
+            </p:sp>
+            <p:sp>
+              <p:nvSpPr>
+                <p:cNvPr id="277" name="TextBox 276">
+                  <a:extLst>
+                    <a:ext uri="{FF2B5EF4-FFF2-40B4-BE49-F238E27FC236}">
+                      <a16:creationId xmlns:a16="http://schemas.microsoft.com/office/drawing/2014/main" id="{4CCF0528-0E03-1DD2-5B39-11B4AA2CC675}"/>
+                    </a:ext>
+                  </a:extLst>
+                </p:cNvPr>
+                <p:cNvSpPr txBox="1"/>
+                <p:nvPr/>
+              </p:nvSpPr>
+              <p:spPr>
+                <a:xfrm>
+                  <a:off x="2082230" y="4485408"/>
+                  <a:ext cx="773968" cy="338554"/>
+                </a:xfrm>
+                <a:prstGeom prst="rect">
+                  <a:avLst/>
+                </a:prstGeom>
+                <a:noFill/>
+              </p:spPr>
+              <p:txBody>
+                <a:bodyPr wrap="square">
+                  <a:spAutoFit/>
+                </a:bodyPr>
+                <a:lstStyle/>
+                <a:p>
+                  <a:r>
+                    <a:rPr lang="en-US" sz="1600" dirty="0">
+                      <a:latin typeface="Arial" panose="020B0604020202020204" pitchFamily="34" charset="0"/>
+                      <a:cs typeface="Arial" panose="020B0604020202020204" pitchFamily="34" charset="0"/>
+                    </a:rPr>
+                    <a:t>0.099</a:t>
+                  </a:r>
+                </a:p>
+              </p:txBody>
+            </p:sp>
+            <p:sp>
+              <p:nvSpPr>
+                <p:cNvPr id="278" name="TextBox 277">
+                  <a:extLst>
+                    <a:ext uri="{FF2B5EF4-FFF2-40B4-BE49-F238E27FC236}">
+                      <a16:creationId xmlns:a16="http://schemas.microsoft.com/office/drawing/2014/main" id="{3D8FDAA4-10EB-9D2A-52A8-AA3D5783B3A9}"/>
+                    </a:ext>
+                  </a:extLst>
+                </p:cNvPr>
+                <p:cNvSpPr txBox="1"/>
+                <p:nvPr/>
+              </p:nvSpPr>
+              <p:spPr>
+                <a:xfrm>
+                  <a:off x="2089140" y="4732526"/>
+                  <a:ext cx="773968" cy="338554"/>
+                </a:xfrm>
+                <a:prstGeom prst="rect">
+                  <a:avLst/>
+                </a:prstGeom>
+                <a:noFill/>
+              </p:spPr>
+              <p:txBody>
+                <a:bodyPr wrap="square">
+                  <a:spAutoFit/>
+                </a:bodyPr>
+                <a:lstStyle/>
+                <a:p>
+                  <a:r>
+                    <a:rPr lang="en-US" sz="1600" dirty="0">
+                      <a:latin typeface="Arial" panose="020B0604020202020204" pitchFamily="34" charset="0"/>
+                      <a:cs typeface="Arial" panose="020B0604020202020204" pitchFamily="34" charset="0"/>
+                    </a:rPr>
+                    <a:t>0.098</a:t>
+                  </a:r>
+                </a:p>
+              </p:txBody>
+            </p:sp>
+            <p:sp>
+              <p:nvSpPr>
+                <p:cNvPr id="279" name="TextBox 278">
+                  <a:extLst>
+                    <a:ext uri="{FF2B5EF4-FFF2-40B4-BE49-F238E27FC236}">
+                      <a16:creationId xmlns:a16="http://schemas.microsoft.com/office/drawing/2014/main" id="{C6D549DE-523A-C2C2-D83F-BD2832456537}"/>
+                    </a:ext>
+                  </a:extLst>
+                </p:cNvPr>
+                <p:cNvSpPr txBox="1"/>
+                <p:nvPr/>
+              </p:nvSpPr>
+              <p:spPr>
+                <a:xfrm rot="2122247">
+                  <a:off x="1145732" y="4205060"/>
+                  <a:ext cx="842878" cy="338554"/>
+                </a:xfrm>
+                <a:prstGeom prst="rect">
+                  <a:avLst/>
+                </a:prstGeom>
+                <a:noFill/>
+              </p:spPr>
+              <p:txBody>
+                <a:bodyPr wrap="square">
+                  <a:spAutoFit/>
+                </a:bodyPr>
+                <a:lstStyle/>
+                <a:p>
+                  <a:r>
+                    <a:rPr lang="en-US" sz="1600" dirty="0">
+                      <a:latin typeface="Arial" panose="020B0604020202020204" pitchFamily="34" charset="0"/>
+                      <a:cs typeface="Arial" panose="020B0604020202020204" pitchFamily="34" charset="0"/>
+                    </a:rPr>
+                    <a:t>0.0061</a:t>
+                  </a:r>
+                </a:p>
+              </p:txBody>
+            </p:sp>
+            <p:sp>
+              <p:nvSpPr>
+                <p:cNvPr id="280" name="TextBox 279">
+                  <a:extLst>
+                    <a:ext uri="{FF2B5EF4-FFF2-40B4-BE49-F238E27FC236}">
+                      <a16:creationId xmlns:a16="http://schemas.microsoft.com/office/drawing/2014/main" id="{C3702433-1876-62CF-8962-C64F098F7853}"/>
+                    </a:ext>
+                  </a:extLst>
+                </p:cNvPr>
+                <p:cNvSpPr txBox="1"/>
+                <p:nvPr/>
+              </p:nvSpPr>
+              <p:spPr>
+                <a:xfrm rot="2298318">
+                  <a:off x="1020562" y="4386045"/>
+                  <a:ext cx="842878" cy="338554"/>
+                </a:xfrm>
+                <a:prstGeom prst="rect">
+                  <a:avLst/>
+                </a:prstGeom>
+                <a:noFill/>
+              </p:spPr>
+              <p:txBody>
+                <a:bodyPr wrap="square">
+                  <a:spAutoFit/>
+                </a:bodyPr>
+                <a:lstStyle/>
+                <a:p>
+                  <a:r>
+                    <a:rPr lang="en-US" sz="1600" dirty="0">
+                      <a:latin typeface="Arial" panose="020B0604020202020204" pitchFamily="34" charset="0"/>
+                      <a:cs typeface="Arial" panose="020B0604020202020204" pitchFamily="34" charset="0"/>
+                    </a:rPr>
+                    <a:t>0.0065</a:t>
+                  </a:r>
+                </a:p>
+              </p:txBody>
+            </p:sp>
+          </p:grpSp>
+          <p:sp>
+            <p:nvSpPr>
+              <p:cNvPr id="100" name="文本框 51">
+                <a:extLst>
+                  <a:ext uri="{FF2B5EF4-FFF2-40B4-BE49-F238E27FC236}">
+                    <a16:creationId xmlns:a16="http://schemas.microsoft.com/office/drawing/2014/main" id="{2CA9ADD1-6ABB-B8CD-D3BE-9F7B927505FC}"/>
+                  </a:ext>
+                </a:extLst>
+              </p:cNvPr>
+              <p:cNvSpPr txBox="1"/>
+              <p:nvPr/>
+            </p:nvSpPr>
+            <p:spPr>
+              <a:xfrm>
+                <a:off x="8820653" y="798266"/>
+                <a:ext cx="3511616" cy="461665"/>
+              </a:xfrm>
+              <a:prstGeom prst="rect">
+                <a:avLst/>
+              </a:prstGeom>
+              <a:noFill/>
+            </p:spPr>
+            <p:txBody>
+              <a:bodyPr wrap="square" rtlCol="0">
+                <a:spAutoFit/>
+              </a:bodyPr>
+              <a:lstStyle/>
+              <a:p>
+                <a:pPr algn="ctr"/>
+                <a:r>
+                  <a:rPr lang="en-US" altLang="zh-CN" sz="2400" b="1" dirty="0">
+                    <a:solidFill>
+                      <a:srgbClr val="47A2DE"/>
+                    </a:solidFill>
+                    <a:latin typeface="Arial" panose="020B0604020202020204" pitchFamily="34" charset="0"/>
+                    <a:cs typeface="Arial" panose="020B0604020202020204" pitchFamily="34" charset="0"/>
+                  </a:rPr>
+                  <a:t>Latin America</a:t>
+                </a:r>
+              </a:p>
+            </p:txBody>
+          </p:sp>
+        </p:grpSp>
+        <p:pic>
+          <p:nvPicPr>
+            <p:cNvPr id="26" name="Picture 25">
+              <a:extLst>
+                <a:ext uri="{FF2B5EF4-FFF2-40B4-BE49-F238E27FC236}">
+                  <a16:creationId xmlns:a16="http://schemas.microsoft.com/office/drawing/2014/main" id="{6DB9E8FC-CFE5-1AA1-50D6-4AF72DCCFE15}"/>
+                </a:ext>
+              </a:extLst>
+            </p:cNvPr>
+            <p:cNvPicPr>
+              <a:picLocks noChangeAspect="1"/>
+            </p:cNvPicPr>
+            <p:nvPr/>
+          </p:nvPicPr>
+          <p:blipFill>
+            <a:blip r:embed="rId24"/>
+            <a:stretch>
+              <a:fillRect/>
+            </a:stretch>
+          </p:blipFill>
+          <p:spPr>
+            <a:xfrm>
+              <a:off x="719131" y="1945444"/>
+              <a:ext cx="2743200" cy="2743200"/>
+            </a:xfrm>
+            <a:prstGeom prst="rect">
+              <a:avLst/>
+            </a:prstGeom>
+          </p:spPr>
+        </p:pic>
+        <p:pic>
+          <p:nvPicPr>
+            <p:cNvPr id="31" name="Picture 30">
+              <a:extLst>
+                <a:ext uri="{FF2B5EF4-FFF2-40B4-BE49-F238E27FC236}">
+                  <a16:creationId xmlns:a16="http://schemas.microsoft.com/office/drawing/2014/main" id="{A9F92817-8ADA-B54C-C705-C3F086FFD032}"/>
+                </a:ext>
+              </a:extLst>
+            </p:cNvPr>
+            <p:cNvPicPr>
+              <a:picLocks noChangeAspect="1"/>
+            </p:cNvPicPr>
+            <p:nvPr/>
+          </p:nvPicPr>
+          <p:blipFill>
+            <a:blip r:embed="rId25"/>
+            <a:stretch>
+              <a:fillRect/>
+            </a:stretch>
+          </p:blipFill>
+          <p:spPr>
+            <a:xfrm>
+              <a:off x="4758683" y="1945444"/>
+              <a:ext cx="2743200" cy="2743200"/>
+            </a:xfrm>
+            <a:prstGeom prst="rect">
+              <a:avLst/>
+            </a:prstGeom>
+          </p:spPr>
+        </p:pic>
+        <p:pic>
+          <p:nvPicPr>
+            <p:cNvPr id="34" name="Picture 33">
+              <a:extLst>
+                <a:ext uri="{FF2B5EF4-FFF2-40B4-BE49-F238E27FC236}">
+                  <a16:creationId xmlns:a16="http://schemas.microsoft.com/office/drawing/2014/main" id="{D0BE7592-55A1-BC29-16CA-9616D85181D7}"/>
+                </a:ext>
+              </a:extLst>
+            </p:cNvPr>
+            <p:cNvPicPr>
+              <a:picLocks noChangeAspect="1"/>
+            </p:cNvPicPr>
+            <p:nvPr/>
+          </p:nvPicPr>
+          <p:blipFill>
+            <a:blip r:embed="rId26"/>
+            <a:stretch>
+              <a:fillRect/>
+            </a:stretch>
+          </p:blipFill>
+          <p:spPr>
+            <a:xfrm>
+              <a:off x="8798236" y="1945444"/>
+              <a:ext cx="2743200" cy="2743200"/>
+            </a:xfrm>
+            <a:prstGeom prst="rect">
+              <a:avLst/>
+            </a:prstGeom>
+          </p:spPr>
+        </p:pic>
+        <p:grpSp>
+          <p:nvGrpSpPr>
+            <p:cNvPr id="47" name="Group 46">
+              <a:extLst>
+                <a:ext uri="{FF2B5EF4-FFF2-40B4-BE49-F238E27FC236}">
+                  <a16:creationId xmlns:a16="http://schemas.microsoft.com/office/drawing/2014/main" id="{20160524-D5AD-EFDF-2A7C-2521A913F30A}"/>
+                </a:ext>
+              </a:extLst>
+            </p:cNvPr>
+            <p:cNvGrpSpPr/>
+            <p:nvPr/>
+          </p:nvGrpSpPr>
+          <p:grpSpPr>
+            <a:xfrm>
+              <a:off x="3714393" y="5624607"/>
+              <a:ext cx="1407390" cy="273229"/>
+              <a:chOff x="3474397" y="5567178"/>
+              <a:chExt cx="1407390" cy="273229"/>
+            </a:xfrm>
+          </p:grpSpPr>
+          <p:sp>
+            <p:nvSpPr>
+              <p:cNvPr id="38" name="圆角矩形 40">
+                <a:extLst>
+                  <a:ext uri="{FF2B5EF4-FFF2-40B4-BE49-F238E27FC236}">
+                    <a16:creationId xmlns:a16="http://schemas.microsoft.com/office/drawing/2014/main" id="{492F21E9-2617-1F4A-DE6C-1987333F5030}"/>
+                  </a:ext>
+                </a:extLst>
+              </p:cNvPr>
+              <p:cNvSpPr/>
+              <p:nvPr/>
+            </p:nvSpPr>
+            <p:spPr>
+              <a:xfrm>
+                <a:off x="3474397" y="5567178"/>
+                <a:ext cx="420257" cy="273229"/>
+              </a:xfrm>
+              <a:prstGeom prst="roundRect">
+                <a:avLst/>
+              </a:prstGeom>
+              <a:noFill/>
+              <a:ln w="19050">
+                <a:solidFill>
+                  <a:srgbClr val="E85748"/>
+                </a:solidFill>
+                <a:prstDash val="sysDash"/>
+              </a:ln>
+            </p:spPr>
+            <p:style>
+              <a:lnRef idx="2">
+                <a:schemeClr val="accent1">
+                  <a:lumMod val="75000"/>
+                </a:schemeClr>
+              </a:lnRef>
+              <a:fillRef idx="1">
+                <a:schemeClr val="accent1"/>
+              </a:fillRef>
+              <a:effectRef idx="0">
+                <a:srgbClr val="FFFFFF"/>
+              </a:effectRef>
+              <a:fontRef idx="minor">
+                <a:schemeClr val="lt1"/>
+              </a:fontRef>
+            </p:style>
+            <p:txBody>
+              <a:bodyPr rtlCol="0" anchor="ctr"/>
+              <a:lstStyle/>
+              <a:p>
+                <a:pPr algn="ctr"/>
+                <a:endParaRPr lang="zh-CN" altLang="en-US" dirty="0">
+                  <a:solidFill>
+                    <a:srgbClr val="47A2DE"/>
+                  </a:solidFill>
+                  <a:latin typeface="Arial" panose="020B0604020202020204" pitchFamily="34" charset="0"/>
+                  <a:cs typeface="Arial" panose="020B0604020202020204" pitchFamily="34" charset="0"/>
+                </a:endParaRPr>
+              </a:p>
+            </p:txBody>
+          </p:sp>
+          <p:sp>
+            <p:nvSpPr>
+              <p:cNvPr id="44" name="圆角矩形 41">
+                <a:extLst>
+                  <a:ext uri="{FF2B5EF4-FFF2-40B4-BE49-F238E27FC236}">
+                    <a16:creationId xmlns:a16="http://schemas.microsoft.com/office/drawing/2014/main" id="{E8C4B3D8-BF0A-2809-1179-7F45568FD587}"/>
+                  </a:ext>
+                </a:extLst>
+              </p:cNvPr>
+              <p:cNvSpPr/>
+              <p:nvPr/>
+            </p:nvSpPr>
+            <p:spPr>
+              <a:xfrm>
+                <a:off x="3973060" y="5567178"/>
+                <a:ext cx="415552" cy="265378"/>
+              </a:xfrm>
+              <a:prstGeom prst="roundRect">
+                <a:avLst/>
+              </a:prstGeom>
+              <a:noFill/>
+              <a:ln w="19050">
+                <a:solidFill>
+                  <a:srgbClr val="F39F1B"/>
+                </a:solidFill>
+                <a:prstDash val="sysDash"/>
+              </a:ln>
+            </p:spPr>
+            <p:style>
+              <a:lnRef idx="2">
+                <a:schemeClr val="accent1">
+                  <a:lumMod val="75000"/>
+                </a:schemeClr>
+              </a:lnRef>
+              <a:fillRef idx="1">
+                <a:schemeClr val="accent1"/>
+              </a:fillRef>
+              <a:effectRef idx="0">
+                <a:srgbClr val="FFFFFF"/>
+              </a:effectRef>
+              <a:fontRef idx="minor">
+                <a:schemeClr val="lt1"/>
+              </a:fontRef>
+            </p:style>
+            <p:txBody>
+              <a:bodyPr rtlCol="0" anchor="ctr"/>
+              <a:lstStyle/>
+              <a:p>
+                <a:pPr algn="ctr"/>
+                <a:endParaRPr lang="zh-CN" altLang="en-US">
+                  <a:latin typeface="Arial" panose="020B0604020202020204" pitchFamily="34" charset="0"/>
+                  <a:cs typeface="Arial" panose="020B0604020202020204" pitchFamily="34" charset="0"/>
+                </a:endParaRPr>
+              </a:p>
+            </p:txBody>
+          </p:sp>
+          <p:sp>
+            <p:nvSpPr>
+              <p:cNvPr id="46" name="圆角矩形 42">
+                <a:extLst>
+                  <a:ext uri="{FF2B5EF4-FFF2-40B4-BE49-F238E27FC236}">
+                    <a16:creationId xmlns:a16="http://schemas.microsoft.com/office/drawing/2014/main" id="{FEE938E7-F49C-B771-5E2A-74BAE15C0757}"/>
+                  </a:ext>
+                </a:extLst>
+              </p:cNvPr>
+              <p:cNvSpPr/>
+              <p:nvPr/>
+            </p:nvSpPr>
+            <p:spPr>
+              <a:xfrm>
+                <a:off x="4466235" y="5567178"/>
+                <a:ext cx="415552" cy="265378"/>
+              </a:xfrm>
+              <a:prstGeom prst="roundRect">
+                <a:avLst/>
+              </a:prstGeom>
+              <a:noFill/>
+              <a:ln w="19050">
+                <a:solidFill>
+                  <a:srgbClr val="47A2DE"/>
+                </a:solidFill>
+                <a:prstDash val="sysDash"/>
+              </a:ln>
+            </p:spPr>
+            <p:style>
+              <a:lnRef idx="2">
+                <a:schemeClr val="accent1">
+                  <a:lumMod val="75000"/>
+                </a:schemeClr>
+              </a:lnRef>
+              <a:fillRef idx="1">
+                <a:schemeClr val="accent1"/>
+              </a:fillRef>
+              <a:effectRef idx="0">
+                <a:srgbClr val="FFFFFF"/>
+              </a:effectRef>
+              <a:fontRef idx="minor">
+                <a:schemeClr val="lt1"/>
+              </a:fontRef>
+            </p:style>
+            <p:txBody>
+              <a:bodyPr rtlCol="0" anchor="ctr"/>
+              <a:lstStyle/>
+              <a:p>
+                <a:pPr algn="ctr"/>
+                <a:endParaRPr lang="zh-CN" altLang="en-US">
+                  <a:latin typeface="Arial" panose="020B0604020202020204" pitchFamily="34" charset="0"/>
+                  <a:cs typeface="Arial" panose="020B0604020202020204" pitchFamily="34" charset="0"/>
+                </a:endParaRPr>
+              </a:p>
+            </p:txBody>
+          </p:sp>
+        </p:grpSp>
+      </p:grpSp>
+    </p:spTree>
+    <p:extLst>
+      <p:ext uri="{BB962C8B-B14F-4D97-AF65-F5344CB8AC3E}">
+        <p14:creationId xmlns:p14="http://schemas.microsoft.com/office/powerpoint/2010/main" val="3824560053"/>
+      </p:ext>
+    </p:extLst>
+  </p:cSld>
+  <p:clrMapOvr>
+    <a:masterClrMapping/>
+  </p:clrMapOvr>
+</p:sld>
+</file>
+
+<file path=ppt/slides/slide3.xml><?xml version="1.0" encoding="utf-8"?>
 <p:sld xmlns:a="http://schemas.openxmlformats.org/drawingml/2006/main" xmlns:r="http://schemas.openxmlformats.org/officeDocument/2006/relationships" xmlns:p="http://schemas.openxmlformats.org/presentationml/2006/main">
   <p:cSld>
     <p:spTree>
